--- a/Praesentation_Barrierefreiheit.pptx
+++ b/Praesentation_Barrierefreiheit.pptx
@@ -5,7 +5,7 @@
     <p:sldMasterId id="2147483648" r:id="rId1"/>
   </p:sldMasterIdLst>
   <p:notesMasterIdLst>
-    <p:notesMasterId r:id="rId20"/>
+    <p:notesMasterId r:id="rId19"/>
   </p:notesMasterIdLst>
   <p:sldIdLst>
     <p:sldId id="256" r:id="rId2"/>
@@ -22,10 +22,9 @@
     <p:sldId id="270" r:id="rId13"/>
     <p:sldId id="269" r:id="rId14"/>
     <p:sldId id="267" r:id="rId15"/>
-    <p:sldId id="268" r:id="rId16"/>
-    <p:sldId id="275" r:id="rId17"/>
-    <p:sldId id="273" r:id="rId18"/>
-    <p:sldId id="277" r:id="rId19"/>
+    <p:sldId id="275" r:id="rId16"/>
+    <p:sldId id="273" r:id="rId17"/>
+    <p:sldId id="277" r:id="rId18"/>
   </p:sldIdLst>
   <p:sldSz cx="12192000" cy="6858000"/>
   <p:notesSz cx="6858000" cy="9144000"/>
@@ -536,7 +535,10 @@
           <a:bodyPr/>
           <a:lstStyle/>
           <a:p>
-            <a:endParaRPr lang="de-DE"/>
+            <a:r>
+              <a:rPr lang="de-DE" dirty="0"/>
+              <a:t>Mein Kollege Rainer Brell und ich möchten in den folgenden 5 Stunden, nein 20 Minuten, dafür sensibilisieren, wie man Software-Anwendungen prüfen, anpassen und barrierefrei entwickeln kann.</a:t>
+            </a:r>
           </a:p>
         </p:txBody>
       </p:sp>
@@ -620,7 +622,10 @@
           <a:bodyPr/>
           <a:lstStyle/>
           <a:p>
-            <a:endParaRPr lang="de-DE"/>
+            <a:r>
+              <a:rPr lang="de-DE" dirty="0"/>
+              <a:t>Vorab eine Warnung: Das wird jetzt aus Zeitgründen ein wilder Ritt durch die 3 Themengebiete – keine Angst, alle Infos, Codes und einiges mehr gibt es im Web unter der Adresse am Ende der Präsentation</a:t>
+            </a:r>
           </a:p>
         </p:txBody>
       </p:sp>
@@ -719,23 +724,21 @@
           <a:p>
             <a:r>
               <a:rPr lang="de-DE" dirty="0"/>
-              <a:t>Untertitel in Videos→ gedacht für gehörlose Personen, genutzt auch in lauter Umgebung oder beim </a:t>
-            </a:r>
-            <a:r>
-              <a:rPr lang="de-DE" dirty="0" err="1"/>
-              <a:t>SprachenlernenSpracherkennung</a:t>
-            </a:r>
-            <a:r>
+              <a:t>Untertitel in Videos→ gedacht für gehörlose Personen, genutzt auch in lauter Umgebung oder beim Sprachenlernen </a:t>
+            </a:r>
+            <a:br>
               <a:rPr lang="de-DE" dirty="0"/>
-              <a:t> (z. B. Siri, Alexa)→ entwickelt zur Unterstützung von Menschen mit Einschränkungen, heute </a:t>
-            </a:r>
-            <a:r>
-              <a:rPr lang="de-DE" dirty="0" err="1"/>
-              <a:t>AlltagsfunktionAutomatische</a:t>
-            </a:r>
+            </a:br>
             <a:r>
               <a:rPr lang="de-DE" dirty="0"/>
-              <a:t> Türen→ hilfreich für Menschen mit Behinderungen, aber auch für alle mit vollen Händen</a:t>
+              <a:t>Spracherkennung (z. B. Siri, Alexa)→ entwickelt zur Unterstützung von Menschen mit Einschränkungen, heute Alltagsfunktion</a:t>
+            </a:r>
+            <a:br>
+              <a:rPr lang="de-DE" dirty="0"/>
+            </a:br>
+            <a:r>
+              <a:rPr lang="de-DE" dirty="0"/>
+              <a:t>Automatische Türen→ hilfreich für Menschen mit Behinderungen, aber auch für alle mit vollen Händen</a:t>
             </a:r>
           </a:p>
         </p:txBody>
@@ -988,7 +991,17 @@
           <a:bodyPr/>
           <a:lstStyle/>
           <a:p>
-            <a:endParaRPr lang="de-DE"/>
+            <a:pPr marL="0" indent="0">
+              <a:buFontTx/>
+              <a:buNone/>
+            </a:pPr>
+            <a:r>
+              <a:rPr lang="de-DE" dirty="0"/>
+              <a:t>Praxis: ohne Skript, Skript, mit Skript</a:t>
+            </a:r>
+          </a:p>
+          <a:p>
+            <a:endParaRPr lang="de-DE" dirty="0"/>
           </a:p>
         </p:txBody>
       </p:sp>
@@ -1009,7 +1022,7 @@
           <a:p>
             <a:fld id="{A68AEE88-1FAD-4B99-B45F-DFF552009D32}" type="slidenum">
               <a:rPr lang="de-DE" smtClean="0"/>
-              <a:t>11</a:t>
+              <a:t>8</a:t>
             </a:fld>
             <a:endParaRPr lang="de-DE"/>
           </a:p>
@@ -1018,7 +1031,7 @@
     </p:spTree>
     <p:extLst>
       <p:ext uri="{BB962C8B-B14F-4D97-AF65-F5344CB8AC3E}">
-        <p14:creationId xmlns:p14="http://schemas.microsoft.com/office/powerpoint/2010/main" val="1912411003"/>
+        <p14:creationId xmlns:p14="http://schemas.microsoft.com/office/powerpoint/2010/main" val="3106577425"/>
       </p:ext>
     </p:extLst>
   </p:cSld>
@@ -1072,7 +1085,16 @@
           <a:bodyPr/>
           <a:lstStyle/>
           <a:p>
-            <a:endParaRPr lang="de-DE"/>
+            <a:r>
+              <a:rPr lang="de-DE" dirty="0"/>
+              <a:t>Entwickeln…</a:t>
+            </a:r>
+          </a:p>
+          <a:p>
+            <a:r>
+              <a:rPr lang="de-DE" dirty="0"/>
+              <a:t>Nicht versuchen alles im Detail mitzudenken… Es geht uns dabei darum zu zeigen, dass der Unterschied zwischen dem Code von zugänglichen und nicht zugänglichen Software-Oberflächen für viele Standard-Barrieren sehr gering ist und damit der Aufwand diese Barrieren zu beseitigen</a:t>
+            </a:r>
           </a:p>
         </p:txBody>
       </p:sp>
@@ -1093,7 +1115,175 @@
           <a:p>
             <a:fld id="{A68AEE88-1FAD-4B99-B45F-DFF552009D32}" type="slidenum">
               <a:rPr lang="de-DE" smtClean="0"/>
-              <a:t>18</a:t>
+              <a:t>10</a:t>
+            </a:fld>
+            <a:endParaRPr lang="de-DE"/>
+          </a:p>
+        </p:txBody>
+      </p:sp>
+    </p:spTree>
+    <p:extLst>
+      <p:ext uri="{BB962C8B-B14F-4D97-AF65-F5344CB8AC3E}">
+        <p14:creationId xmlns:p14="http://schemas.microsoft.com/office/powerpoint/2010/main" val="1511797435"/>
+      </p:ext>
+    </p:extLst>
+  </p:cSld>
+  <p:clrMapOvr>
+    <a:masterClrMapping/>
+  </p:clrMapOvr>
+</p:notes>
+</file>
+
+<file path=ppt/notesSlides/notesSlide8.xml><?xml version="1.0" encoding="utf-8"?>
+<p:notes xmlns:a="http://schemas.openxmlformats.org/drawingml/2006/main" xmlns:r="http://schemas.openxmlformats.org/officeDocument/2006/relationships" xmlns:p="http://schemas.openxmlformats.org/presentationml/2006/main">
+  <p:cSld>
+    <p:spTree>
+      <p:nvGrpSpPr>
+        <p:cNvPr id="1" name=""/>
+        <p:cNvGrpSpPr/>
+        <p:nvPr/>
+      </p:nvGrpSpPr>
+      <p:grpSpPr>
+        <a:xfrm>
+          <a:off x="0" y="0"/>
+          <a:ext cx="0" cy="0"/>
+          <a:chOff x="0" y="0"/>
+          <a:chExt cx="0" cy="0"/>
+        </a:xfrm>
+      </p:grpSpPr>
+      <p:sp>
+        <p:nvSpPr>
+          <p:cNvPr id="2" name="Folienbildplatzhalter 1"/>
+          <p:cNvSpPr>
+            <a:spLocks noGrp="1" noRot="1" noChangeAspect="1"/>
+          </p:cNvSpPr>
+          <p:nvPr>
+            <p:ph type="sldImg"/>
+          </p:nvPr>
+        </p:nvSpPr>
+        <p:spPr/>
+      </p:sp>
+      <p:sp>
+        <p:nvSpPr>
+          <p:cNvPr id="3" name="Notizenplatzhalter 2"/>
+          <p:cNvSpPr>
+            <a:spLocks noGrp="1"/>
+          </p:cNvSpPr>
+          <p:nvPr>
+            <p:ph type="body" idx="1"/>
+          </p:nvPr>
+        </p:nvSpPr>
+        <p:spPr/>
+        <p:txBody>
+          <a:bodyPr/>
+          <a:lstStyle/>
+          <a:p>
+            <a:endParaRPr lang="de-DE"/>
+          </a:p>
+        </p:txBody>
+      </p:sp>
+      <p:sp>
+        <p:nvSpPr>
+          <p:cNvPr id="4" name="Foliennummernplatzhalter 3"/>
+          <p:cNvSpPr>
+            <a:spLocks noGrp="1"/>
+          </p:cNvSpPr>
+          <p:nvPr>
+            <p:ph type="sldNum" sz="quarter" idx="5"/>
+          </p:nvPr>
+        </p:nvSpPr>
+        <p:spPr/>
+        <p:txBody>
+          <a:bodyPr/>
+          <a:lstStyle/>
+          <a:p>
+            <a:fld id="{A68AEE88-1FAD-4B99-B45F-DFF552009D32}" type="slidenum">
+              <a:rPr lang="de-DE" smtClean="0"/>
+              <a:t>11</a:t>
+            </a:fld>
+            <a:endParaRPr lang="de-DE"/>
+          </a:p>
+        </p:txBody>
+      </p:sp>
+    </p:spTree>
+    <p:extLst>
+      <p:ext uri="{BB962C8B-B14F-4D97-AF65-F5344CB8AC3E}">
+        <p14:creationId xmlns:p14="http://schemas.microsoft.com/office/powerpoint/2010/main" val="1912411003"/>
+      </p:ext>
+    </p:extLst>
+  </p:cSld>
+  <p:clrMapOvr>
+    <a:masterClrMapping/>
+  </p:clrMapOvr>
+</p:notes>
+</file>
+
+<file path=ppt/notesSlides/notesSlide9.xml><?xml version="1.0" encoding="utf-8"?>
+<p:notes xmlns:a="http://schemas.openxmlformats.org/drawingml/2006/main" xmlns:r="http://schemas.openxmlformats.org/officeDocument/2006/relationships" xmlns:p="http://schemas.openxmlformats.org/presentationml/2006/main">
+  <p:cSld>
+    <p:spTree>
+      <p:nvGrpSpPr>
+        <p:cNvPr id="1" name=""/>
+        <p:cNvGrpSpPr/>
+        <p:nvPr/>
+      </p:nvGrpSpPr>
+      <p:grpSpPr>
+        <a:xfrm>
+          <a:off x="0" y="0"/>
+          <a:ext cx="0" cy="0"/>
+          <a:chOff x="0" y="0"/>
+          <a:chExt cx="0" cy="0"/>
+        </a:xfrm>
+      </p:grpSpPr>
+      <p:sp>
+        <p:nvSpPr>
+          <p:cNvPr id="2" name="Folienbildplatzhalter 1"/>
+          <p:cNvSpPr>
+            <a:spLocks noGrp="1" noRot="1" noChangeAspect="1"/>
+          </p:cNvSpPr>
+          <p:nvPr>
+            <p:ph type="sldImg"/>
+          </p:nvPr>
+        </p:nvSpPr>
+        <p:spPr/>
+      </p:sp>
+      <p:sp>
+        <p:nvSpPr>
+          <p:cNvPr id="3" name="Notizenplatzhalter 2"/>
+          <p:cNvSpPr>
+            <a:spLocks noGrp="1"/>
+          </p:cNvSpPr>
+          <p:nvPr>
+            <p:ph type="body" idx="1"/>
+          </p:nvPr>
+        </p:nvSpPr>
+        <p:spPr/>
+        <p:txBody>
+          <a:bodyPr/>
+          <a:lstStyle/>
+          <a:p>
+            <a:endParaRPr lang="de-DE"/>
+          </a:p>
+        </p:txBody>
+      </p:sp>
+      <p:sp>
+        <p:nvSpPr>
+          <p:cNvPr id="4" name="Foliennummernplatzhalter 3"/>
+          <p:cNvSpPr>
+            <a:spLocks noGrp="1"/>
+          </p:cNvSpPr>
+          <p:nvPr>
+            <p:ph type="sldNum" sz="quarter" idx="5"/>
+          </p:nvPr>
+        </p:nvSpPr>
+        <p:spPr/>
+        <p:txBody>
+          <a:bodyPr/>
+          <a:lstStyle/>
+          <a:p>
+            <a:fld id="{A68AEE88-1FAD-4B99-B45F-DFF552009D32}" type="slidenum">
+              <a:rPr lang="de-DE" smtClean="0"/>
+              <a:t>17</a:t>
             </a:fld>
             <a:endParaRPr lang="de-DE"/>
           </a:p>
@@ -4790,7 +4980,7 @@
         <p:spPr>
           <a:xfrm>
             <a:off x="3108960" y="3422075"/>
-            <a:ext cx="8686800" cy="687111"/>
+            <a:ext cx="8686800" cy="1328312"/>
           </a:xfrm>
           <a:prstGeom prst="rect">
             <a:avLst/>
@@ -4886,7 +5076,7 @@
                 </a:solidFill>
                 <a:latin typeface="Calibri"/>
               </a:rPr>
-              <a:t>zwei klassischen Windows Anwendungen (Python und </a:t>
+              <a:t>einer klassischen Windows Anwendung (</a:t>
             </a:r>
             <a:r>
               <a:rPr sz="2000" b="0" i="1" dirty="0">
@@ -4904,11 +5094,44 @@
                 </a:solidFill>
                 <a:latin typeface="Calibri"/>
               </a:rPr>
-              <a:t>)</a:t>
-            </a:r>
-            <a:endParaRPr sz="2000" b="0" i="1" dirty="0">
+              <a:t>) </a:t>
+            </a:r>
+          </a:p>
+          <a:p>
+            <a:pPr algn="l">
+              <a:lnSpc>
+                <a:spcPct val="115000"/>
+              </a:lnSpc>
+            </a:pPr>
+            <a:endParaRPr lang="de-DE" sz="2000" b="0" i="1" dirty="0">
               <a:solidFill>
                 <a:srgbClr val="E9ECEF"/>
+              </a:solidFill>
+              <a:latin typeface="Calibri"/>
+            </a:endParaRPr>
+          </a:p>
+          <a:p>
+            <a:pPr algn="l">
+              <a:lnSpc>
+                <a:spcPct val="115000"/>
+              </a:lnSpc>
+            </a:pPr>
+            <a:r>
+              <a:rPr lang="de-DE" sz="1600" b="0" i="1" dirty="0">
+                <a:solidFill>
+                  <a:schemeClr val="bg1">
+                    <a:lumMod val="75000"/>
+                  </a:schemeClr>
+                </a:solidFill>
+                <a:latin typeface="Calibri"/>
+              </a:rPr>
+              <a:t>…weitere im Begleitmaterial</a:t>
+            </a:r>
+            <a:endParaRPr sz="1600" b="0" i="1" dirty="0">
+              <a:solidFill>
+                <a:schemeClr val="bg1">
+                  <a:lumMod val="75000"/>
+                </a:schemeClr>
               </a:solidFill>
               <a:latin typeface="Calibri"/>
             </a:endParaRPr>
@@ -4975,7 +5198,7 @@
           <p:nvPr/>
         </p:nvPicPr>
         <p:blipFill>
-          <a:blip r:embed="rId2"/>
+          <a:blip r:embed="rId3"/>
           <a:stretch>
             <a:fillRect/>
           </a:stretch>
@@ -5778,9 +6001,9 @@
         <p:grpSpPr>
           <a:xfrm>
             <a:off x="6309360" y="2286000"/>
-            <a:ext cx="5486400" cy="1234440"/>
+            <a:ext cx="5486400" cy="823772"/>
             <a:chOff x="6309360" y="2286000"/>
-            <a:chExt cx="5486400" cy="1234440"/>
+            <a:chExt cx="5486400" cy="823772"/>
           </a:xfrm>
         </p:grpSpPr>
         <p:sp>
@@ -5883,7 +6106,7 @@
           <p:spPr>
             <a:xfrm>
               <a:off x="6858000" y="2697480"/>
-              <a:ext cx="4937760" cy="822960"/>
+              <a:ext cx="4937760" cy="412292"/>
             </a:xfrm>
             <a:prstGeom prst="rect">
               <a:avLst/>
@@ -6016,7 +6239,25 @@
                   </a:solidFill>
                   <a:latin typeface="Calibri"/>
                 </a:rPr>
-                <a:t>. Disabled </a:t>
+                <a:t>. </a:t>
+              </a:r>
+              <a:r>
+                <a:rPr lang="de-DE" sz="1200" b="0" i="0" dirty="0">
+                  <a:solidFill>
+                    <a:srgbClr val="5A6470"/>
+                  </a:solidFill>
+                  <a:latin typeface="Calibri"/>
+                </a:rPr>
+                <a:t>Deaktivieren von Elementen</a:t>
+              </a:r>
+              <a:r>
+                <a:rPr sz="1200" b="0" i="0" dirty="0">
+                  <a:solidFill>
+                    <a:srgbClr val="5A6470"/>
+                  </a:solidFill>
+                  <a:latin typeface="Calibri"/>
+                </a:rPr>
+                <a:t> </a:t>
               </a:r>
               <a:r>
                 <a:rPr sz="1200" b="0" i="0" dirty="0" err="1">
@@ -7574,7 +7815,7 @@
           <p:spPr>
             <a:xfrm>
               <a:off x="457200" y="2468880"/>
-              <a:ext cx="5486400" cy="365760"/>
+              <a:ext cx="5486400" cy="183255"/>
             </a:xfrm>
             <a:prstGeom prst="rect">
               <a:avLst/>
@@ -7593,13 +7834,112 @@
                 </a:lnSpc>
               </a:pPr>
               <a:r>
-                <a:rPr sz="1100" b="0" i="1">
+                <a:rPr sz="1100" b="0" i="1" dirty="0" err="1">
                   <a:solidFill>
                     <a:srgbClr val="5A6470"/>
                   </a:solidFill>
                   <a:latin typeface="Calibri"/>
                 </a:rPr>
-                <a:t>Unbeschriftete TextBox, IsEnabled=False entzieht den Fokus, kein Name.</a:t>
+                <a:t>Unbeschriftete</a:t>
+              </a:r>
+              <a:r>
+                <a:rPr sz="1100" b="0" i="1" dirty="0">
+                  <a:solidFill>
+                    <a:srgbClr val="5A6470"/>
+                  </a:solidFill>
+                  <a:latin typeface="Calibri"/>
+                </a:rPr>
+                <a:t> </a:t>
+              </a:r>
+              <a:r>
+                <a:rPr sz="1100" b="0" i="1" dirty="0" err="1">
+                  <a:solidFill>
+                    <a:srgbClr val="5A6470"/>
+                  </a:solidFill>
+                  <a:latin typeface="Calibri"/>
+                </a:rPr>
+                <a:t>TextBox</a:t>
+              </a:r>
+              <a:r>
+                <a:rPr sz="1100" b="0" i="1" dirty="0">
+                  <a:solidFill>
+                    <a:srgbClr val="5A6470"/>
+                  </a:solidFill>
+                  <a:latin typeface="Calibri"/>
+                </a:rPr>
+                <a:t>, </a:t>
+              </a:r>
+              <a:r>
+                <a:rPr sz="1100" b="0" i="1" dirty="0" err="1">
+                  <a:solidFill>
+                    <a:srgbClr val="5A6470"/>
+                  </a:solidFill>
+                  <a:latin typeface="Calibri"/>
+                </a:rPr>
+                <a:t>IsEnabled</a:t>
+              </a:r>
+              <a:r>
+                <a:rPr sz="1100" b="0" i="1" dirty="0">
+                  <a:solidFill>
+                    <a:srgbClr val="5A6470"/>
+                  </a:solidFill>
+                  <a:latin typeface="Calibri"/>
+                </a:rPr>
+                <a:t>=False </a:t>
+              </a:r>
+              <a:r>
+                <a:rPr sz="1100" b="0" i="1" dirty="0" err="1">
+                  <a:solidFill>
+                    <a:srgbClr val="5A6470"/>
+                  </a:solidFill>
+                  <a:latin typeface="Calibri"/>
+                </a:rPr>
+                <a:t>entzieht</a:t>
+              </a:r>
+              <a:r>
+                <a:rPr sz="1100" b="0" i="1" dirty="0">
+                  <a:solidFill>
+                    <a:srgbClr val="5A6470"/>
+                  </a:solidFill>
+                  <a:latin typeface="Calibri"/>
+                </a:rPr>
+                <a:t> den </a:t>
+              </a:r>
+              <a:r>
+                <a:rPr sz="1100" b="0" i="1" dirty="0" err="1">
+                  <a:solidFill>
+                    <a:srgbClr val="5A6470"/>
+                  </a:solidFill>
+                  <a:latin typeface="Calibri"/>
+                </a:rPr>
+                <a:t>Fokus</a:t>
+              </a:r>
+              <a:r>
+                <a:rPr sz="1100" b="0" i="1" dirty="0">
+                  <a:solidFill>
+                    <a:srgbClr val="5A6470"/>
+                  </a:solidFill>
+                  <a:latin typeface="Calibri"/>
+                </a:rPr>
+                <a:t>, </a:t>
+              </a:r>
+              <a:r>
+                <a:rPr lang="de-DE" sz="1100" i="1" dirty="0">
+                  <a:solidFill>
+                    <a:srgbClr val="5A6470"/>
+                  </a:solidFill>
+                  <a:latin typeface="Calibri"/>
+                </a:rPr>
+                <a:t>Icon-Schaltfläche ohne</a:t>
+              </a:r>
+              <a:r>
+                <a:rPr sz="1100" b="0" i="1" dirty="0">
+                  <a:solidFill>
+                    <a:srgbClr val="5A6470"/>
+                  </a:solidFill>
+                  <a:latin typeface="Calibri"/>
+                </a:rPr>
+                <a:t> Name</a:t>
               </a:r>
             </a:p>
           </p:txBody>
@@ -8345,6 +8685,46 @@
           </a:p>
         </p:txBody>
       </p:sp>
+      <p:sp>
+        <p:nvSpPr>
+          <p:cNvPr id="20" name="Textfeld 19">
+            <a:extLst>
+              <a:ext uri="{FF2B5EF4-FFF2-40B4-BE49-F238E27FC236}">
+                <a16:creationId xmlns:a16="http://schemas.microsoft.com/office/drawing/2014/main" id="{E1C8BEFF-89B8-00D3-3B6C-4F3326A7BAF3}"/>
+              </a:ext>
+            </a:extLst>
+          </p:cNvPr>
+          <p:cNvSpPr txBox="1"/>
+          <p:nvPr/>
+        </p:nvSpPr>
+        <p:spPr>
+          <a:xfrm>
+            <a:off x="8442463" y="1432084"/>
+            <a:ext cx="3261857" cy="461665"/>
+          </a:xfrm>
+          <a:prstGeom prst="rect">
+            <a:avLst/>
+          </a:prstGeom>
+          <a:noFill/>
+        </p:spPr>
+        <p:txBody>
+          <a:bodyPr wrap="square" rtlCol="0">
+            <a:spAutoFit/>
+          </a:bodyPr>
+          <a:lstStyle/>
+          <a:p>
+            <a:r>
+              <a:rPr lang="de-DE" sz="2400" b="1" dirty="0">
+                <a:solidFill>
+                  <a:srgbClr val="FF0000"/>
+                </a:solidFill>
+              </a:rPr>
+              <a:t>PRAXIS-VORFÜHRUNG</a:t>
+            </a:r>
+            <a:endParaRPr lang="de-DE" sz="2400" dirty="0"/>
+          </a:p>
+        </p:txBody>
+      </p:sp>
     </p:spTree>
   </p:cSld>
   <p:clrMapOvr>
@@ -8371,7 +8751,7 @@
                             </p:stCondLst>
                             <p:childTnLst>
                               <p:par>
-                                <p:cTn id="5" presetID="1" presetClass="entr" presetSubtype="0" fill="hold" nodeType="clickEffect">
+                                <p:cTn id="5" presetID="1" presetClass="entr" presetSubtype="0" fill="hold" grpId="0" nodeType="clickEffect">
                                   <p:stCondLst>
                                     <p:cond delay="0"/>
                                   </p:stCondLst>
@@ -8384,7 +8764,7 @@
                                           </p:stCondLst>
                                         </p:cTn>
                                         <p:tgtEl>
-                                          <p:spTgt spid="18"/>
+                                          <p:spTgt spid="20"/>
                                         </p:tgtEl>
                                         <p:attrNameLst>
                                           <p:attrName>style.visibility</p:attrName>
@@ -8424,6 +8804,51 @@
                                     <p:set>
                                       <p:cBhvr>
                                         <p:cTn id="10" dur="1" fill="hold">
+                                          <p:stCondLst>
+                                            <p:cond delay="0"/>
+                                          </p:stCondLst>
+                                        </p:cTn>
+                                        <p:tgtEl>
+                                          <p:spTgt spid="18"/>
+                                        </p:tgtEl>
+                                        <p:attrNameLst>
+                                          <p:attrName>style.visibility</p:attrName>
+                                        </p:attrNameLst>
+                                      </p:cBhvr>
+                                      <p:to>
+                                        <p:strVal val="visible"/>
+                                      </p:to>
+                                    </p:set>
+                                  </p:childTnLst>
+                                </p:cTn>
+                              </p:par>
+                            </p:childTnLst>
+                          </p:cTn>
+                        </p:par>
+                      </p:childTnLst>
+                    </p:cTn>
+                  </p:par>
+                  <p:par>
+                    <p:cTn id="11" fill="hold">
+                      <p:stCondLst>
+                        <p:cond delay="indefinite"/>
+                      </p:stCondLst>
+                      <p:childTnLst>
+                        <p:par>
+                          <p:cTn id="12" fill="hold">
+                            <p:stCondLst>
+                              <p:cond delay="0"/>
+                            </p:stCondLst>
+                            <p:childTnLst>
+                              <p:par>
+                                <p:cTn id="13" presetID="1" presetClass="entr" presetSubtype="0" fill="hold" nodeType="clickEffect">
+                                  <p:stCondLst>
+                                    <p:cond delay="0"/>
+                                  </p:stCondLst>
+                                  <p:childTnLst>
+                                    <p:set>
+                                      <p:cBhvr>
+                                        <p:cTn id="14" dur="1" fill="hold">
                                           <p:stCondLst>
                                             <p:cond delay="0"/>
                                           </p:stCondLst>
@@ -8469,6 +8894,9 @@
         </p:cTn>
       </p:par>
     </p:tnLst>
+    <p:bldLst>
+      <p:bldP spid="20" grpId="0"/>
+    </p:bldLst>
   </p:timing>
 </p:sld>
 </file>
@@ -8639,34 +9067,7 @@
                 </a:solidFill>
                 <a:latin typeface="Calibri"/>
               </a:rPr>
-              <a:t> · Web (</a:t>
-            </a:r>
-            <a:r>
-              <a:rPr lang="de-DE" sz="3000" b="1" i="0" dirty="0" err="1">
-                <a:solidFill>
-                  <a:srgbClr val="C8102E"/>
-                </a:solidFill>
-                <a:latin typeface="Calibri"/>
-              </a:rPr>
-              <a:t>ReactJS</a:t>
-            </a:r>
-            <a:r>
-              <a:rPr lang="de-DE" sz="3000" b="1" i="0" dirty="0">
-                <a:solidFill>
-                  <a:srgbClr val="C8102E"/>
-                </a:solidFill>
-                <a:latin typeface="Calibri"/>
-              </a:rPr>
-              <a:t> + Bootstrap / </a:t>
-            </a:r>
-            <a:r>
-              <a:rPr sz="3000" b="1" i="0" dirty="0">
-                <a:solidFill>
-                  <a:srgbClr val="C8102E"/>
-                </a:solidFill>
-                <a:latin typeface="Calibri"/>
-              </a:rPr>
-              <a:t>Blazor Server)</a:t>
+              <a:t> · Web</a:t>
             </a:r>
           </a:p>
         </p:txBody>
@@ -8725,7 +9126,7 @@
         <p:spPr>
           <a:xfrm>
             <a:off x="457200" y="1554480"/>
-            <a:ext cx="10972800" cy="365760"/>
+            <a:ext cx="10972800" cy="233205"/>
           </a:xfrm>
           <a:prstGeom prst="rect">
             <a:avLst/>
@@ -8851,15 +9252,12 @@
               </a:rPr>
               <a:t>Screenreader</a:t>
             </a:r>
-            <a:r>
-              <a:rPr sz="1400" b="0" i="1" dirty="0">
-                <a:solidFill>
-                  <a:srgbClr val="5A6470"/>
-                </a:solidFill>
-                <a:latin typeface="Calibri"/>
-              </a:rPr>
-              <a:t>.</a:t>
-            </a:r>
+            <a:endParaRPr sz="1400" b="0" i="1" dirty="0">
+              <a:solidFill>
+                <a:srgbClr val="5A6470"/>
+              </a:solidFill>
+              <a:latin typeface="Calibri"/>
+            </a:endParaRPr>
           </a:p>
         </p:txBody>
       </p:sp>
@@ -9829,6 +10227,46 @@
           </a:p>
         </p:txBody>
       </p:sp>
+      <p:sp>
+        <p:nvSpPr>
+          <p:cNvPr id="20" name="Textfeld 19">
+            <a:extLst>
+              <a:ext uri="{FF2B5EF4-FFF2-40B4-BE49-F238E27FC236}">
+                <a16:creationId xmlns:a16="http://schemas.microsoft.com/office/drawing/2014/main" id="{66C75A06-A93D-13BF-0911-0C8D85B5F94C}"/>
+              </a:ext>
+            </a:extLst>
+          </p:cNvPr>
+          <p:cNvSpPr txBox="1"/>
+          <p:nvPr/>
+        </p:nvSpPr>
+        <p:spPr>
+          <a:xfrm>
+            <a:off x="8472659" y="1483737"/>
+            <a:ext cx="3261836" cy="461665"/>
+          </a:xfrm>
+          <a:prstGeom prst="rect">
+            <a:avLst/>
+          </a:prstGeom>
+          <a:noFill/>
+        </p:spPr>
+        <p:txBody>
+          <a:bodyPr wrap="square" rtlCol="0">
+            <a:spAutoFit/>
+          </a:bodyPr>
+          <a:lstStyle/>
+          <a:p>
+            <a:r>
+              <a:rPr lang="de-DE" sz="2400" b="1" dirty="0">
+                <a:solidFill>
+                  <a:srgbClr val="FF0000"/>
+                </a:solidFill>
+              </a:rPr>
+              <a:t>PRAXIS-VORFÜHRUNG</a:t>
+            </a:r>
+            <a:endParaRPr lang="de-DE" sz="2400" dirty="0"/>
+          </a:p>
+        </p:txBody>
+      </p:sp>
     </p:spTree>
   </p:cSld>
   <p:clrMapOvr>
@@ -9855,7 +10293,7 @@
                             </p:stCondLst>
                             <p:childTnLst>
                               <p:par>
-                                <p:cTn id="5" presetID="1" presetClass="entr" presetSubtype="0" fill="hold" nodeType="clickEffect">
+                                <p:cTn id="5" presetID="1" presetClass="entr" presetSubtype="0" fill="hold" grpId="0" nodeType="clickEffect">
                                   <p:stCondLst>
                                     <p:cond delay="0"/>
                                   </p:stCondLst>
@@ -9868,7 +10306,7 @@
                                           </p:stCondLst>
                                         </p:cTn>
                                         <p:tgtEl>
-                                          <p:spTgt spid="18"/>
+                                          <p:spTgt spid="20"/>
                                         </p:tgtEl>
                                         <p:attrNameLst>
                                           <p:attrName>style.visibility</p:attrName>
@@ -9908,6 +10346,51 @@
                                     <p:set>
                                       <p:cBhvr>
                                         <p:cTn id="10" dur="1" fill="hold">
+                                          <p:stCondLst>
+                                            <p:cond delay="0"/>
+                                          </p:stCondLst>
+                                        </p:cTn>
+                                        <p:tgtEl>
+                                          <p:spTgt spid="18"/>
+                                        </p:tgtEl>
+                                        <p:attrNameLst>
+                                          <p:attrName>style.visibility</p:attrName>
+                                        </p:attrNameLst>
+                                      </p:cBhvr>
+                                      <p:to>
+                                        <p:strVal val="visible"/>
+                                      </p:to>
+                                    </p:set>
+                                  </p:childTnLst>
+                                </p:cTn>
+                              </p:par>
+                            </p:childTnLst>
+                          </p:cTn>
+                        </p:par>
+                      </p:childTnLst>
+                    </p:cTn>
+                  </p:par>
+                  <p:par>
+                    <p:cTn id="11" fill="hold">
+                      <p:stCondLst>
+                        <p:cond delay="indefinite"/>
+                      </p:stCondLst>
+                      <p:childTnLst>
+                        <p:par>
+                          <p:cTn id="12" fill="hold">
+                            <p:stCondLst>
+                              <p:cond delay="0"/>
+                            </p:stCondLst>
+                            <p:childTnLst>
+                              <p:par>
+                                <p:cTn id="13" presetID="1" presetClass="entr" presetSubtype="0" fill="hold" nodeType="clickEffect">
+                                  <p:stCondLst>
+                                    <p:cond delay="0"/>
+                                  </p:stCondLst>
+                                  <p:childTnLst>
+                                    <p:set>
+                                      <p:cBhvr>
+                                        <p:cTn id="14" dur="1" fill="hold">
                                           <p:stCondLst>
                                             <p:cond delay="0"/>
                                           </p:stCondLst>
@@ -9953,6 +10436,9 @@
         </p:cTn>
       </p:par>
     </p:tnLst>
+    <p:bldLst>
+      <p:bldP spid="20" grpId="0"/>
+    </p:bldLst>
   </p:timing>
 </p:sld>
 </file>
@@ -12377,2783 +12863,6 @@
   <p:cSld>
     <p:spTree>
       <p:nvGrpSpPr>
-        <p:cNvPr id="1" name=""/>
-        <p:cNvGrpSpPr/>
-        <p:nvPr/>
-      </p:nvGrpSpPr>
-      <p:grpSpPr>
-        <a:xfrm>
-          <a:off x="0" y="0"/>
-          <a:ext cx="0" cy="0"/>
-          <a:chOff x="0" y="0"/>
-          <a:chExt cx="0" cy="0"/>
-        </a:xfrm>
-      </p:grpSpPr>
-      <p:sp>
-        <p:nvSpPr>
-          <p:cNvPr id="2" name="Right Triangle 1"/>
-          <p:cNvSpPr/>
-          <p:nvPr/>
-        </p:nvSpPr>
-        <p:spPr>
-          <a:xfrm rot="16200000">
-            <a:off x="457200" y="384048"/>
-            <a:ext cx="201168" cy="201168"/>
-          </a:xfrm>
-          <a:prstGeom prst="rtTriangle">
-            <a:avLst/>
-          </a:prstGeom>
-          <a:solidFill>
-            <a:srgbClr val="C8102E"/>
-          </a:solidFill>
-          <a:ln>
-            <a:noFill/>
-          </a:ln>
-        </p:spPr>
-        <p:style>
-          <a:lnRef idx="1">
-            <a:schemeClr val="accent1"/>
-          </a:lnRef>
-          <a:fillRef idx="3">
-            <a:schemeClr val="accent1"/>
-          </a:fillRef>
-          <a:effectRef idx="2">
-            <a:schemeClr val="accent1"/>
-          </a:effectRef>
-          <a:fontRef idx="minor">
-            <a:schemeClr val="lt1"/>
-          </a:fontRef>
-        </p:style>
-        <p:txBody>
-          <a:bodyPr rtlCol="0" anchor="ctr"/>
-          <a:lstStyle/>
-          <a:p>
-            <a:pPr algn="ctr"/>
-            <a:endParaRPr/>
-          </a:p>
-        </p:txBody>
-      </p:sp>
-      <p:sp>
-        <p:nvSpPr>
-          <p:cNvPr id="3" name="TextBox 2"/>
-          <p:cNvSpPr txBox="1"/>
-          <p:nvPr/>
-        </p:nvSpPr>
-        <p:spPr>
-          <a:xfrm>
-            <a:off x="777240" y="329184"/>
-            <a:ext cx="7315200" cy="183255"/>
-          </a:xfrm>
-          <a:prstGeom prst="rect">
-            <a:avLst/>
-          </a:prstGeom>
-          <a:noFill/>
-        </p:spPr>
-        <p:txBody>
-          <a:bodyPr wrap="square" lIns="0" tIns="0" rIns="0" bIns="0" anchor="t">
-            <a:spAutoFit/>
-          </a:bodyPr>
-          <a:lstStyle/>
-          <a:p>
-            <a:pPr>
-              <a:lnSpc>
-                <a:spcPct val="115000"/>
-              </a:lnSpc>
-            </a:pPr>
-            <a:r>
-              <a:rPr sz="1100" b="1" i="0" dirty="0">
-                <a:solidFill>
-                  <a:srgbClr val="1F2A36"/>
-                </a:solidFill>
-                <a:latin typeface="Calibri"/>
-              </a:rPr>
-              <a:t>BFW Würzburg  ·  </a:t>
-            </a:r>
-            <a:r>
-              <a:rPr sz="1100" b="1" i="0" dirty="0" err="1">
-                <a:solidFill>
-                  <a:srgbClr val="1F2A36"/>
-                </a:solidFill>
-                <a:latin typeface="Calibri"/>
-              </a:rPr>
-              <a:t>Barrierefreiheit</a:t>
-            </a:r>
-            <a:r>
-              <a:rPr lang="de-DE" sz="1100" b="1" dirty="0">
-                <a:solidFill>
-                  <a:srgbClr val="1F2A36"/>
-                </a:solidFill>
-              </a:rPr>
-              <a:t> - Entwickeln</a:t>
-            </a:r>
-            <a:endParaRPr sz="1100" b="1" i="0" dirty="0">
-              <a:solidFill>
-                <a:srgbClr val="1F2A36"/>
-              </a:solidFill>
-              <a:latin typeface="Calibri"/>
-            </a:endParaRPr>
-          </a:p>
-        </p:txBody>
-      </p:sp>
-      <p:sp>
-        <p:nvSpPr>
-          <p:cNvPr id="4" name="TextBox 3"/>
-          <p:cNvSpPr txBox="1"/>
-          <p:nvPr/>
-        </p:nvSpPr>
-        <p:spPr>
-          <a:xfrm>
-            <a:off x="457200" y="822960"/>
-            <a:ext cx="10972800" cy="640080"/>
-          </a:xfrm>
-          <a:prstGeom prst="rect">
-            <a:avLst/>
-          </a:prstGeom>
-          <a:noFill/>
-        </p:spPr>
-        <p:txBody>
-          <a:bodyPr wrap="square" lIns="0" tIns="0" rIns="0" bIns="0" anchor="t">
-            <a:spAutoFit/>
-          </a:bodyPr>
-          <a:lstStyle/>
-          <a:p>
-            <a:pPr algn="l">
-              <a:lnSpc>
-                <a:spcPct val="115000"/>
-              </a:lnSpc>
-            </a:pPr>
-            <a:r>
-              <a:rPr sz="3000" b="1" i="0" dirty="0" err="1">
-                <a:solidFill>
-                  <a:srgbClr val="C8102E"/>
-                </a:solidFill>
-                <a:latin typeface="Calibri"/>
-              </a:rPr>
-              <a:t>Fünf</a:t>
-            </a:r>
-            <a:r>
-              <a:rPr sz="3000" b="1" i="0" dirty="0">
-                <a:solidFill>
-                  <a:srgbClr val="C8102E"/>
-                </a:solidFill>
-                <a:latin typeface="Calibri"/>
-              </a:rPr>
-              <a:t> </a:t>
-            </a:r>
-            <a:r>
-              <a:rPr sz="3000" b="1" i="0" dirty="0" err="1">
-                <a:solidFill>
-                  <a:srgbClr val="C8102E"/>
-                </a:solidFill>
-                <a:latin typeface="Calibri"/>
-              </a:rPr>
-              <a:t>typische</a:t>
-            </a:r>
-            <a:r>
-              <a:rPr sz="3000" b="1" i="0" dirty="0">
-                <a:solidFill>
-                  <a:srgbClr val="C8102E"/>
-                </a:solidFill>
-                <a:latin typeface="Calibri"/>
-              </a:rPr>
-              <a:t> </a:t>
-            </a:r>
-            <a:r>
-              <a:rPr sz="3000" b="1" i="0" dirty="0" err="1">
-                <a:solidFill>
-                  <a:srgbClr val="C8102E"/>
-                </a:solidFill>
-                <a:latin typeface="Calibri"/>
-              </a:rPr>
-              <a:t>Barrieren</a:t>
-            </a:r>
-            <a:r>
-              <a:rPr sz="3000" b="1" i="0" dirty="0">
-                <a:solidFill>
-                  <a:srgbClr val="C8102E"/>
-                </a:solidFill>
-                <a:latin typeface="Calibri"/>
-              </a:rPr>
-              <a:t> – und </a:t>
-            </a:r>
-            <a:r>
-              <a:rPr sz="3000" b="1" i="0" dirty="0" err="1">
-                <a:solidFill>
-                  <a:srgbClr val="C8102E"/>
-                </a:solidFill>
-                <a:latin typeface="Calibri"/>
-              </a:rPr>
-              <a:t>ihre</a:t>
-            </a:r>
-            <a:r>
-              <a:rPr sz="3000" b="1" i="0" dirty="0">
-                <a:solidFill>
-                  <a:srgbClr val="C8102E"/>
-                </a:solidFill>
-                <a:latin typeface="Calibri"/>
-              </a:rPr>
-              <a:t> </a:t>
-            </a:r>
-            <a:r>
-              <a:rPr sz="3000" b="1" i="0" dirty="0" err="1">
-                <a:solidFill>
-                  <a:srgbClr val="C8102E"/>
-                </a:solidFill>
-                <a:latin typeface="Calibri"/>
-              </a:rPr>
-              <a:t>Lösung</a:t>
-            </a:r>
-            <a:endParaRPr sz="3000" b="1" i="0" dirty="0">
-              <a:solidFill>
-                <a:srgbClr val="C8102E"/>
-              </a:solidFill>
-              <a:latin typeface="Calibri"/>
-            </a:endParaRPr>
-          </a:p>
-        </p:txBody>
-      </p:sp>
-      <p:sp>
-        <p:nvSpPr>
-          <p:cNvPr id="5" name="Rectangle 4"/>
-          <p:cNvSpPr/>
-          <p:nvPr/>
-        </p:nvSpPr>
-        <p:spPr>
-          <a:xfrm>
-            <a:off x="457200" y="1417320"/>
-            <a:ext cx="731520" cy="38100"/>
-          </a:xfrm>
-          <a:prstGeom prst="rect">
-            <a:avLst/>
-          </a:prstGeom>
-          <a:solidFill>
-            <a:srgbClr val="C8102E"/>
-          </a:solidFill>
-          <a:ln>
-            <a:noFill/>
-          </a:ln>
-          <a:effectLst/>
-        </p:spPr>
-        <p:style>
-          <a:lnRef idx="1">
-            <a:schemeClr val="accent1"/>
-          </a:lnRef>
-          <a:fillRef idx="3">
-            <a:schemeClr val="accent1"/>
-          </a:fillRef>
-          <a:effectRef idx="2">
-            <a:schemeClr val="accent1"/>
-          </a:effectRef>
-          <a:fontRef idx="minor">
-            <a:schemeClr val="lt1"/>
-          </a:fontRef>
-        </p:style>
-        <p:txBody>
-          <a:bodyPr rtlCol="0" anchor="ctr"/>
-          <a:lstStyle/>
-          <a:p>
-            <a:pPr algn="ctr"/>
-            <a:endParaRPr/>
-          </a:p>
-        </p:txBody>
-      </p:sp>
-      <p:sp>
-        <p:nvSpPr>
-          <p:cNvPr id="6" name="TextBox 5"/>
-          <p:cNvSpPr txBox="1"/>
-          <p:nvPr/>
-        </p:nvSpPr>
-        <p:spPr>
-          <a:xfrm>
-            <a:off x="457200" y="1554480"/>
-            <a:ext cx="10972800" cy="233205"/>
-          </a:xfrm>
-          <a:prstGeom prst="rect">
-            <a:avLst/>
-          </a:prstGeom>
-          <a:noFill/>
-        </p:spPr>
-        <p:txBody>
-          <a:bodyPr wrap="square" lIns="0" tIns="0" rIns="0" bIns="0" anchor="t">
-            <a:spAutoFit/>
-          </a:bodyPr>
-          <a:lstStyle/>
-          <a:p>
-            <a:pPr algn="l">
-              <a:lnSpc>
-                <a:spcPct val="115000"/>
-              </a:lnSpc>
-            </a:pPr>
-            <a:r>
-              <a:rPr sz="1400" b="0" i="1" dirty="0" err="1">
-                <a:solidFill>
-                  <a:srgbClr val="5A6470"/>
-                </a:solidFill>
-                <a:latin typeface="Calibri"/>
-              </a:rPr>
-              <a:t>Diese</a:t>
-            </a:r>
-            <a:r>
-              <a:rPr sz="1400" b="0" i="1" dirty="0">
-                <a:solidFill>
-                  <a:srgbClr val="5A6470"/>
-                </a:solidFill>
-                <a:latin typeface="Calibri"/>
-              </a:rPr>
-              <a:t> </a:t>
-            </a:r>
-            <a:r>
-              <a:rPr sz="1400" b="0" i="1" dirty="0" err="1">
-                <a:solidFill>
-                  <a:srgbClr val="5A6470"/>
-                </a:solidFill>
-                <a:latin typeface="Calibri"/>
-              </a:rPr>
-              <a:t>fünf</a:t>
-            </a:r>
-            <a:r>
-              <a:rPr sz="1400" b="0" i="1" dirty="0">
-                <a:solidFill>
-                  <a:srgbClr val="5A6470"/>
-                </a:solidFill>
-                <a:latin typeface="Calibri"/>
-              </a:rPr>
-              <a:t> </a:t>
-            </a:r>
-            <a:r>
-              <a:rPr sz="1400" b="0" i="1" dirty="0" err="1">
-                <a:solidFill>
-                  <a:srgbClr val="5A6470"/>
-                </a:solidFill>
-                <a:latin typeface="Calibri"/>
-              </a:rPr>
-              <a:t>Fälle</a:t>
-            </a:r>
-            <a:r>
-              <a:rPr sz="1400" b="0" i="1" dirty="0">
-                <a:solidFill>
-                  <a:srgbClr val="5A6470"/>
-                </a:solidFill>
-                <a:latin typeface="Calibri"/>
-              </a:rPr>
-              <a:t> </a:t>
-            </a:r>
-            <a:r>
-              <a:rPr sz="1400" b="0" i="1" dirty="0" err="1">
-                <a:solidFill>
-                  <a:srgbClr val="5A6470"/>
-                </a:solidFill>
-                <a:latin typeface="Calibri"/>
-              </a:rPr>
-              <a:t>sind</a:t>
-            </a:r>
-            <a:r>
-              <a:rPr sz="1400" b="0" i="1" dirty="0">
-                <a:solidFill>
-                  <a:srgbClr val="5A6470"/>
-                </a:solidFill>
-                <a:latin typeface="Calibri"/>
-              </a:rPr>
-              <a:t> in </a:t>
-            </a:r>
-            <a:r>
-              <a:rPr sz="1400" b="0" i="1" dirty="0" err="1">
-                <a:solidFill>
-                  <a:srgbClr val="5A6470"/>
-                </a:solidFill>
-                <a:latin typeface="Calibri"/>
-              </a:rPr>
-              <a:t>allen</a:t>
-            </a:r>
-            <a:r>
-              <a:rPr sz="1400" b="0" i="1" dirty="0">
-                <a:solidFill>
-                  <a:srgbClr val="5A6470"/>
-                </a:solidFill>
-                <a:latin typeface="Calibri"/>
-              </a:rPr>
-              <a:t> </a:t>
-            </a:r>
-            <a:r>
-              <a:rPr sz="1400" b="0" i="1" dirty="0" err="1">
-                <a:solidFill>
-                  <a:srgbClr val="5A6470"/>
-                </a:solidFill>
-                <a:latin typeface="Calibri"/>
-              </a:rPr>
-              <a:t>Beispiel</a:t>
-            </a:r>
-            <a:r>
-              <a:rPr sz="1400" b="0" i="1" dirty="0">
-                <a:solidFill>
-                  <a:srgbClr val="5A6470"/>
-                </a:solidFill>
-                <a:latin typeface="Calibri"/>
-              </a:rPr>
-              <a:t>-Apps </a:t>
-            </a:r>
-            <a:r>
-              <a:rPr sz="1400" b="0" i="1" dirty="0" err="1">
-                <a:solidFill>
-                  <a:srgbClr val="5A6470"/>
-                </a:solidFill>
-                <a:latin typeface="Calibri"/>
-              </a:rPr>
-              <a:t>identisch</a:t>
-            </a:r>
-            <a:r>
-              <a:rPr sz="1400" b="0" i="1" dirty="0">
-                <a:solidFill>
-                  <a:srgbClr val="5A6470"/>
-                </a:solidFill>
-                <a:latin typeface="Calibri"/>
-              </a:rPr>
-              <a:t> </a:t>
-            </a:r>
-            <a:r>
-              <a:rPr sz="1400" b="0" i="1" dirty="0" err="1">
-                <a:solidFill>
-                  <a:srgbClr val="5A6470"/>
-                </a:solidFill>
-                <a:latin typeface="Calibri"/>
-              </a:rPr>
-              <a:t>umgesetzt</a:t>
-            </a:r>
-            <a:r>
-              <a:rPr sz="1400" b="0" i="1" dirty="0">
-                <a:solidFill>
-                  <a:srgbClr val="5A6470"/>
-                </a:solidFill>
-                <a:latin typeface="Calibri"/>
-              </a:rPr>
-              <a:t>.</a:t>
-            </a:r>
-          </a:p>
-        </p:txBody>
-      </p:sp>
-      <p:sp>
-        <p:nvSpPr>
-          <p:cNvPr id="7" name="Rectangle 6"/>
-          <p:cNvSpPr/>
-          <p:nvPr/>
-        </p:nvSpPr>
-        <p:spPr>
-          <a:xfrm>
-            <a:off x="457200" y="1965960"/>
-            <a:ext cx="457200" cy="457200"/>
-          </a:xfrm>
-          <a:prstGeom prst="rect">
-            <a:avLst/>
-          </a:prstGeom>
-          <a:solidFill>
-            <a:srgbClr val="1F2A36"/>
-          </a:solidFill>
-          <a:ln>
-            <a:noFill/>
-          </a:ln>
-          <a:effectLst/>
-        </p:spPr>
-        <p:style>
-          <a:lnRef idx="1">
-            <a:schemeClr val="accent1"/>
-          </a:lnRef>
-          <a:fillRef idx="3">
-            <a:schemeClr val="accent1"/>
-          </a:fillRef>
-          <a:effectRef idx="2">
-            <a:schemeClr val="accent1"/>
-          </a:effectRef>
-          <a:fontRef idx="minor">
-            <a:schemeClr val="lt1"/>
-          </a:fontRef>
-        </p:style>
-        <p:txBody>
-          <a:bodyPr rtlCol="0" anchor="ctr"/>
-          <a:lstStyle/>
-          <a:p>
-            <a:pPr algn="ctr"/>
-            <a:endParaRPr/>
-          </a:p>
-        </p:txBody>
-      </p:sp>
-      <p:sp>
-        <p:nvSpPr>
-          <p:cNvPr id="8" name="TextBox 7"/>
-          <p:cNvSpPr txBox="1"/>
-          <p:nvPr/>
-        </p:nvSpPr>
-        <p:spPr>
-          <a:xfrm>
-            <a:off x="594360" y="2057400"/>
-            <a:ext cx="274320" cy="347472"/>
-          </a:xfrm>
-          <a:prstGeom prst="rect">
-            <a:avLst/>
-          </a:prstGeom>
-          <a:noFill/>
-        </p:spPr>
-        <p:txBody>
-          <a:bodyPr wrap="square" lIns="0" tIns="0" rIns="0" bIns="0" anchor="t">
-            <a:spAutoFit/>
-          </a:bodyPr>
-          <a:lstStyle/>
-          <a:p>
-            <a:pPr algn="ctr">
-              <a:lnSpc>
-                <a:spcPct val="115000"/>
-              </a:lnSpc>
-            </a:pPr>
-            <a:r>
-              <a:rPr sz="1400" b="1" i="0">
-                <a:solidFill>
-                  <a:srgbClr val="FFFFFF"/>
-                </a:solidFill>
-                <a:latin typeface="Calibri"/>
-              </a:rPr>
-              <a:t>#</a:t>
-            </a:r>
-          </a:p>
-        </p:txBody>
-      </p:sp>
-      <p:sp>
-        <p:nvSpPr>
-          <p:cNvPr id="9" name="Rectangle 8"/>
-          <p:cNvSpPr/>
-          <p:nvPr/>
-        </p:nvSpPr>
-        <p:spPr>
-          <a:xfrm>
-            <a:off x="914400" y="1965960"/>
-            <a:ext cx="4572000" cy="457200"/>
-          </a:xfrm>
-          <a:prstGeom prst="rect">
-            <a:avLst/>
-          </a:prstGeom>
-          <a:solidFill>
-            <a:srgbClr val="1F2A36"/>
-          </a:solidFill>
-          <a:ln>
-            <a:noFill/>
-          </a:ln>
-          <a:effectLst/>
-        </p:spPr>
-        <p:style>
-          <a:lnRef idx="1">
-            <a:schemeClr val="accent1"/>
-          </a:lnRef>
-          <a:fillRef idx="3">
-            <a:schemeClr val="accent1"/>
-          </a:fillRef>
-          <a:effectRef idx="2">
-            <a:schemeClr val="accent1"/>
-          </a:effectRef>
-          <a:fontRef idx="minor">
-            <a:schemeClr val="lt1"/>
-          </a:fontRef>
-        </p:style>
-        <p:txBody>
-          <a:bodyPr rtlCol="0" anchor="ctr"/>
-          <a:lstStyle/>
-          <a:p>
-            <a:pPr algn="ctr"/>
-            <a:endParaRPr/>
-          </a:p>
-        </p:txBody>
-      </p:sp>
-      <p:sp>
-        <p:nvSpPr>
-          <p:cNvPr id="10" name="TextBox 9"/>
-          <p:cNvSpPr txBox="1"/>
-          <p:nvPr/>
-        </p:nvSpPr>
-        <p:spPr>
-          <a:xfrm>
-            <a:off x="1051560" y="2057400"/>
-            <a:ext cx="4389120" cy="347472"/>
-          </a:xfrm>
-          <a:prstGeom prst="rect">
-            <a:avLst/>
-          </a:prstGeom>
-          <a:noFill/>
-        </p:spPr>
-        <p:txBody>
-          <a:bodyPr wrap="square" lIns="0" tIns="0" rIns="0" bIns="0" anchor="t">
-            <a:spAutoFit/>
-          </a:bodyPr>
-          <a:lstStyle/>
-          <a:p>
-            <a:pPr algn="l">
-              <a:lnSpc>
-                <a:spcPct val="115000"/>
-              </a:lnSpc>
-            </a:pPr>
-            <a:r>
-              <a:rPr sz="1400" b="1" i="0">
-                <a:solidFill>
-                  <a:srgbClr val="FFFFFF"/>
-                </a:solidFill>
-                <a:latin typeface="Calibri"/>
-              </a:rPr>
-              <a:t>Barriere</a:t>
-            </a:r>
-          </a:p>
-        </p:txBody>
-      </p:sp>
-      <p:sp>
-        <p:nvSpPr>
-          <p:cNvPr id="11" name="Rectangle 10"/>
-          <p:cNvSpPr/>
-          <p:nvPr/>
-        </p:nvSpPr>
-        <p:spPr>
-          <a:xfrm>
-            <a:off x="5486400" y="1965960"/>
-            <a:ext cx="6400800" cy="457200"/>
-          </a:xfrm>
-          <a:prstGeom prst="rect">
-            <a:avLst/>
-          </a:prstGeom>
-          <a:solidFill>
-            <a:srgbClr val="1F2A36"/>
-          </a:solidFill>
-          <a:ln>
-            <a:noFill/>
-          </a:ln>
-          <a:effectLst/>
-        </p:spPr>
-        <p:style>
-          <a:lnRef idx="1">
-            <a:schemeClr val="accent1"/>
-          </a:lnRef>
-          <a:fillRef idx="3">
-            <a:schemeClr val="accent1"/>
-          </a:fillRef>
-          <a:effectRef idx="2">
-            <a:schemeClr val="accent1"/>
-          </a:effectRef>
-          <a:fontRef idx="minor">
-            <a:schemeClr val="lt1"/>
-          </a:fontRef>
-        </p:style>
-        <p:txBody>
-          <a:bodyPr rtlCol="0" anchor="ctr"/>
-          <a:lstStyle/>
-          <a:p>
-            <a:pPr algn="ctr"/>
-            <a:endParaRPr/>
-          </a:p>
-        </p:txBody>
-      </p:sp>
-      <p:sp>
-        <p:nvSpPr>
-          <p:cNvPr id="12" name="TextBox 11"/>
-          <p:cNvSpPr txBox="1"/>
-          <p:nvPr/>
-        </p:nvSpPr>
-        <p:spPr>
-          <a:xfrm>
-            <a:off x="5623560" y="2057400"/>
-            <a:ext cx="6217920" cy="347472"/>
-          </a:xfrm>
-          <a:prstGeom prst="rect">
-            <a:avLst/>
-          </a:prstGeom>
-          <a:noFill/>
-        </p:spPr>
-        <p:txBody>
-          <a:bodyPr wrap="square" lIns="0" tIns="0" rIns="0" bIns="0" anchor="t">
-            <a:spAutoFit/>
-          </a:bodyPr>
-          <a:lstStyle/>
-          <a:p>
-            <a:pPr algn="l">
-              <a:lnSpc>
-                <a:spcPct val="115000"/>
-              </a:lnSpc>
-            </a:pPr>
-            <a:r>
-              <a:rPr sz="1400" b="1" i="0">
-                <a:solidFill>
-                  <a:srgbClr val="FFFFFF"/>
-                </a:solidFill>
-                <a:latin typeface="Calibri"/>
-              </a:rPr>
-              <a:t>Lösung</a:t>
-            </a:r>
-          </a:p>
-        </p:txBody>
-      </p:sp>
-      <p:sp>
-        <p:nvSpPr>
-          <p:cNvPr id="13" name="Rectangle 12"/>
-          <p:cNvSpPr/>
-          <p:nvPr/>
-        </p:nvSpPr>
-        <p:spPr>
-          <a:xfrm>
-            <a:off x="457200" y="2423160"/>
-            <a:ext cx="457200" cy="777240"/>
-          </a:xfrm>
-          <a:prstGeom prst="rect">
-            <a:avLst/>
-          </a:prstGeom>
-          <a:solidFill>
-            <a:srgbClr val="FFFFFF"/>
-          </a:solidFill>
-          <a:ln w="9525">
-            <a:solidFill>
-              <a:srgbClr val="E9ECEF"/>
-            </a:solidFill>
-          </a:ln>
-          <a:effectLst/>
-        </p:spPr>
-        <p:style>
-          <a:lnRef idx="1">
-            <a:schemeClr val="accent1"/>
-          </a:lnRef>
-          <a:fillRef idx="3">
-            <a:schemeClr val="accent1"/>
-          </a:fillRef>
-          <a:effectRef idx="2">
-            <a:schemeClr val="accent1"/>
-          </a:effectRef>
-          <a:fontRef idx="minor">
-            <a:schemeClr val="lt1"/>
-          </a:fontRef>
-        </p:style>
-        <p:txBody>
-          <a:bodyPr rtlCol="0" anchor="ctr"/>
-          <a:lstStyle/>
-          <a:p>
-            <a:pPr algn="ctr"/>
-            <a:endParaRPr/>
-          </a:p>
-        </p:txBody>
-      </p:sp>
-      <p:sp>
-        <p:nvSpPr>
-          <p:cNvPr id="15" name="Rectangle 14"/>
-          <p:cNvSpPr/>
-          <p:nvPr/>
-        </p:nvSpPr>
-        <p:spPr>
-          <a:xfrm>
-            <a:off x="914400" y="2423160"/>
-            <a:ext cx="4572000" cy="777240"/>
-          </a:xfrm>
-          <a:prstGeom prst="rect">
-            <a:avLst/>
-          </a:prstGeom>
-          <a:solidFill>
-            <a:srgbClr val="FFFFFF"/>
-          </a:solidFill>
-          <a:ln w="9525">
-            <a:solidFill>
-              <a:srgbClr val="E9ECEF"/>
-            </a:solidFill>
-          </a:ln>
-          <a:effectLst/>
-        </p:spPr>
-        <p:style>
-          <a:lnRef idx="1">
-            <a:schemeClr val="accent1"/>
-          </a:lnRef>
-          <a:fillRef idx="3">
-            <a:schemeClr val="accent1"/>
-          </a:fillRef>
-          <a:effectRef idx="2">
-            <a:schemeClr val="accent1"/>
-          </a:effectRef>
-          <a:fontRef idx="minor">
-            <a:schemeClr val="lt1"/>
-          </a:fontRef>
-        </p:style>
-        <p:txBody>
-          <a:bodyPr rtlCol="0" anchor="ctr"/>
-          <a:lstStyle/>
-          <a:p>
-            <a:pPr algn="ctr"/>
-            <a:endParaRPr/>
-          </a:p>
-        </p:txBody>
-      </p:sp>
-      <p:sp>
-        <p:nvSpPr>
-          <p:cNvPr id="17" name="Rectangle 16"/>
-          <p:cNvSpPr/>
-          <p:nvPr/>
-        </p:nvSpPr>
-        <p:spPr>
-          <a:xfrm>
-            <a:off x="5486400" y="2423160"/>
-            <a:ext cx="6400800" cy="777240"/>
-          </a:xfrm>
-          <a:prstGeom prst="rect">
-            <a:avLst/>
-          </a:prstGeom>
-          <a:solidFill>
-            <a:srgbClr val="FFFFFF"/>
-          </a:solidFill>
-          <a:ln w="9525">
-            <a:solidFill>
-              <a:srgbClr val="E9ECEF"/>
-            </a:solidFill>
-          </a:ln>
-          <a:effectLst/>
-        </p:spPr>
-        <p:style>
-          <a:lnRef idx="1">
-            <a:schemeClr val="accent1"/>
-          </a:lnRef>
-          <a:fillRef idx="3">
-            <a:schemeClr val="accent1"/>
-          </a:fillRef>
-          <a:effectRef idx="2">
-            <a:schemeClr val="accent1"/>
-          </a:effectRef>
-          <a:fontRef idx="minor">
-            <a:schemeClr val="lt1"/>
-          </a:fontRef>
-        </p:style>
-        <p:txBody>
-          <a:bodyPr rtlCol="0" anchor="ctr"/>
-          <a:lstStyle/>
-          <a:p>
-            <a:pPr algn="ctr"/>
-            <a:endParaRPr/>
-          </a:p>
-        </p:txBody>
-      </p:sp>
-      <p:grpSp>
-        <p:nvGrpSpPr>
-          <p:cNvPr id="46" name="Gruppieren 45">
-            <a:extLst>
-              <a:ext uri="{FF2B5EF4-FFF2-40B4-BE49-F238E27FC236}">
-                <a16:creationId xmlns:a16="http://schemas.microsoft.com/office/drawing/2014/main" id="{2CDE3661-3D70-66E5-47EA-D95E38E1976B}"/>
-              </a:ext>
-            </a:extLst>
-          </p:cNvPr>
-          <p:cNvGrpSpPr/>
-          <p:nvPr/>
-        </p:nvGrpSpPr>
-        <p:grpSpPr>
-          <a:xfrm>
-            <a:off x="594360" y="2587752"/>
-            <a:ext cx="11247120" cy="612648"/>
-            <a:chOff x="594360" y="2587752"/>
-            <a:chExt cx="11247120" cy="612648"/>
-          </a:xfrm>
-        </p:grpSpPr>
-        <p:sp>
-          <p:nvSpPr>
-            <p:cNvPr id="14" name="TextBox 13"/>
-            <p:cNvSpPr txBox="1"/>
-            <p:nvPr/>
-          </p:nvSpPr>
-          <p:spPr>
-            <a:xfrm>
-              <a:off x="594360" y="2587752"/>
-              <a:ext cx="274320" cy="612648"/>
-            </a:xfrm>
-            <a:prstGeom prst="rect">
-              <a:avLst/>
-            </a:prstGeom>
-            <a:noFill/>
-          </p:spPr>
-          <p:txBody>
-            <a:bodyPr wrap="square" lIns="0" tIns="0" rIns="0" bIns="0" anchor="t">
-              <a:spAutoFit/>
-            </a:bodyPr>
-            <a:lstStyle/>
-            <a:p>
-              <a:pPr algn="ctr">
-                <a:lnSpc>
-                  <a:spcPct val="115000"/>
-                </a:lnSpc>
-              </a:pPr>
-              <a:r>
-                <a:rPr sz="1300" b="1" i="0">
-                  <a:solidFill>
-                    <a:srgbClr val="C8102E"/>
-                  </a:solidFill>
-                  <a:latin typeface="Calibri"/>
-                </a:rPr>
-                <a:t>1</a:t>
-              </a:r>
-            </a:p>
-          </p:txBody>
-        </p:sp>
-        <p:sp>
-          <p:nvSpPr>
-            <p:cNvPr id="16" name="TextBox 15"/>
-            <p:cNvSpPr txBox="1"/>
-            <p:nvPr/>
-          </p:nvSpPr>
-          <p:spPr>
-            <a:xfrm>
-              <a:off x="1051560" y="2587752"/>
-              <a:ext cx="4389120" cy="612648"/>
-            </a:xfrm>
-            <a:prstGeom prst="rect">
-              <a:avLst/>
-            </a:prstGeom>
-            <a:noFill/>
-          </p:spPr>
-          <p:txBody>
-            <a:bodyPr wrap="square" lIns="0" tIns="0" rIns="0" bIns="0" anchor="t">
-              <a:spAutoFit/>
-            </a:bodyPr>
-            <a:lstStyle/>
-            <a:p>
-              <a:pPr algn="l">
-                <a:lnSpc>
-                  <a:spcPct val="115000"/>
-                </a:lnSpc>
-              </a:pPr>
-              <a:r>
-                <a:rPr sz="1300" b="0" i="0" dirty="0" err="1">
-                  <a:solidFill>
-                    <a:srgbClr val="1F2A36"/>
-                  </a:solidFill>
-                  <a:latin typeface="Calibri"/>
-                </a:rPr>
-                <a:t>Eingabefeld</a:t>
-              </a:r>
-              <a:r>
-                <a:rPr sz="1300" b="0" i="0" dirty="0">
-                  <a:solidFill>
-                    <a:srgbClr val="1F2A36"/>
-                  </a:solidFill>
-                  <a:latin typeface="Calibri"/>
-                </a:rPr>
-                <a:t> </a:t>
-              </a:r>
-              <a:r>
-                <a:rPr sz="1300" b="0" i="0" dirty="0" err="1">
-                  <a:solidFill>
-                    <a:srgbClr val="1F2A36"/>
-                  </a:solidFill>
-                  <a:latin typeface="Calibri"/>
-                </a:rPr>
-                <a:t>ohne</a:t>
-              </a:r>
-              <a:r>
-                <a:rPr sz="1300" b="0" i="0" dirty="0">
-                  <a:solidFill>
-                    <a:srgbClr val="1F2A36"/>
-                  </a:solidFill>
-                  <a:latin typeface="Calibri"/>
-                </a:rPr>
-                <a:t> </a:t>
-              </a:r>
-              <a:r>
-                <a:rPr sz="1300" b="0" i="0" dirty="0" err="1">
-                  <a:solidFill>
-                    <a:srgbClr val="1F2A36"/>
-                  </a:solidFill>
-                  <a:latin typeface="Calibri"/>
-                </a:rPr>
-                <a:t>Beschriftung</a:t>
-              </a:r>
-              <a:endParaRPr sz="1300" b="0" i="0" dirty="0">
-                <a:solidFill>
-                  <a:srgbClr val="1F2A36"/>
-                </a:solidFill>
-                <a:latin typeface="Calibri"/>
-              </a:endParaRPr>
-            </a:p>
-          </p:txBody>
-        </p:sp>
-        <p:sp>
-          <p:nvSpPr>
-            <p:cNvPr id="18" name="TextBox 17"/>
-            <p:cNvSpPr txBox="1"/>
-            <p:nvPr/>
-          </p:nvSpPr>
-          <p:spPr>
-            <a:xfrm>
-              <a:off x="5623560" y="2587752"/>
-              <a:ext cx="6217920" cy="612648"/>
-            </a:xfrm>
-            <a:prstGeom prst="rect">
-              <a:avLst/>
-            </a:prstGeom>
-            <a:noFill/>
-          </p:spPr>
-          <p:txBody>
-            <a:bodyPr wrap="square" lIns="0" tIns="0" rIns="0" bIns="0" anchor="t">
-              <a:spAutoFit/>
-            </a:bodyPr>
-            <a:lstStyle/>
-            <a:p>
-              <a:pPr algn="l">
-                <a:lnSpc>
-                  <a:spcPct val="115000"/>
-                </a:lnSpc>
-              </a:pPr>
-              <a:r>
-                <a:rPr sz="1300" b="0" i="0">
-                  <a:solidFill>
-                    <a:srgbClr val="1F2A36"/>
-                  </a:solidFill>
-                  <a:latin typeface="Calibri"/>
-                </a:rPr>
-                <a:t>label/aria-label/Header bzw. AutomationProperties.LabeledBy oder SemanticProperties.Description</a:t>
-              </a:r>
-            </a:p>
-          </p:txBody>
-        </p:sp>
-      </p:grpSp>
-      <p:sp>
-        <p:nvSpPr>
-          <p:cNvPr id="19" name="Rectangle 18"/>
-          <p:cNvSpPr/>
-          <p:nvPr/>
-        </p:nvSpPr>
-        <p:spPr>
-          <a:xfrm>
-            <a:off x="457200" y="3200400"/>
-            <a:ext cx="457200" cy="777240"/>
-          </a:xfrm>
-          <a:prstGeom prst="rect">
-            <a:avLst/>
-          </a:prstGeom>
-          <a:solidFill>
-            <a:srgbClr val="F5F6F8"/>
-          </a:solidFill>
-          <a:ln w="9525">
-            <a:solidFill>
-              <a:srgbClr val="E9ECEF"/>
-            </a:solidFill>
-          </a:ln>
-          <a:effectLst/>
-        </p:spPr>
-        <p:style>
-          <a:lnRef idx="1">
-            <a:schemeClr val="accent1"/>
-          </a:lnRef>
-          <a:fillRef idx="3">
-            <a:schemeClr val="accent1"/>
-          </a:fillRef>
-          <a:effectRef idx="2">
-            <a:schemeClr val="accent1"/>
-          </a:effectRef>
-          <a:fontRef idx="minor">
-            <a:schemeClr val="lt1"/>
-          </a:fontRef>
-        </p:style>
-        <p:txBody>
-          <a:bodyPr rtlCol="0" anchor="ctr"/>
-          <a:lstStyle/>
-          <a:p>
-            <a:pPr algn="ctr"/>
-            <a:endParaRPr/>
-          </a:p>
-        </p:txBody>
-      </p:sp>
-      <p:sp>
-        <p:nvSpPr>
-          <p:cNvPr id="21" name="Rectangle 20"/>
-          <p:cNvSpPr/>
-          <p:nvPr/>
-        </p:nvSpPr>
-        <p:spPr>
-          <a:xfrm>
-            <a:off x="914400" y="3200400"/>
-            <a:ext cx="4572000" cy="777240"/>
-          </a:xfrm>
-          <a:prstGeom prst="rect">
-            <a:avLst/>
-          </a:prstGeom>
-          <a:solidFill>
-            <a:srgbClr val="F5F6F8"/>
-          </a:solidFill>
-          <a:ln w="9525">
-            <a:solidFill>
-              <a:srgbClr val="E9ECEF"/>
-            </a:solidFill>
-          </a:ln>
-          <a:effectLst/>
-        </p:spPr>
-        <p:style>
-          <a:lnRef idx="1">
-            <a:schemeClr val="accent1"/>
-          </a:lnRef>
-          <a:fillRef idx="3">
-            <a:schemeClr val="accent1"/>
-          </a:fillRef>
-          <a:effectRef idx="2">
-            <a:schemeClr val="accent1"/>
-          </a:effectRef>
-          <a:fontRef idx="minor">
-            <a:schemeClr val="lt1"/>
-          </a:fontRef>
-        </p:style>
-        <p:txBody>
-          <a:bodyPr rtlCol="0" anchor="ctr"/>
-          <a:lstStyle/>
-          <a:p>
-            <a:pPr algn="ctr"/>
-            <a:endParaRPr/>
-          </a:p>
-        </p:txBody>
-      </p:sp>
-      <p:sp>
-        <p:nvSpPr>
-          <p:cNvPr id="23" name="Rectangle 22"/>
-          <p:cNvSpPr/>
-          <p:nvPr/>
-        </p:nvSpPr>
-        <p:spPr>
-          <a:xfrm>
-            <a:off x="5486400" y="3200400"/>
-            <a:ext cx="6400800" cy="777240"/>
-          </a:xfrm>
-          <a:prstGeom prst="rect">
-            <a:avLst/>
-          </a:prstGeom>
-          <a:solidFill>
-            <a:srgbClr val="F5F6F8"/>
-          </a:solidFill>
-          <a:ln w="9525">
-            <a:solidFill>
-              <a:srgbClr val="E9ECEF"/>
-            </a:solidFill>
-          </a:ln>
-          <a:effectLst/>
-        </p:spPr>
-        <p:style>
-          <a:lnRef idx="1">
-            <a:schemeClr val="accent1"/>
-          </a:lnRef>
-          <a:fillRef idx="3">
-            <a:schemeClr val="accent1"/>
-          </a:fillRef>
-          <a:effectRef idx="2">
-            <a:schemeClr val="accent1"/>
-          </a:effectRef>
-          <a:fontRef idx="minor">
-            <a:schemeClr val="lt1"/>
-          </a:fontRef>
-        </p:style>
-        <p:txBody>
-          <a:bodyPr rtlCol="0" anchor="ctr"/>
-          <a:lstStyle/>
-          <a:p>
-            <a:pPr algn="ctr"/>
-            <a:endParaRPr/>
-          </a:p>
-        </p:txBody>
-      </p:sp>
-      <p:grpSp>
-        <p:nvGrpSpPr>
-          <p:cNvPr id="47" name="Gruppieren 46">
-            <a:extLst>
-              <a:ext uri="{FF2B5EF4-FFF2-40B4-BE49-F238E27FC236}">
-                <a16:creationId xmlns:a16="http://schemas.microsoft.com/office/drawing/2014/main" id="{E77FCFFB-6405-44C2-337F-21001EF6CA18}"/>
-              </a:ext>
-            </a:extLst>
-          </p:cNvPr>
-          <p:cNvGrpSpPr/>
-          <p:nvPr/>
-        </p:nvGrpSpPr>
-        <p:grpSpPr>
-          <a:xfrm>
-            <a:off x="594360" y="3364992"/>
-            <a:ext cx="11247120" cy="612648"/>
-            <a:chOff x="594360" y="3364992"/>
-            <a:chExt cx="11247120" cy="612648"/>
-          </a:xfrm>
-        </p:grpSpPr>
-        <p:sp>
-          <p:nvSpPr>
-            <p:cNvPr id="20" name="TextBox 19"/>
-            <p:cNvSpPr txBox="1"/>
-            <p:nvPr/>
-          </p:nvSpPr>
-          <p:spPr>
-            <a:xfrm>
-              <a:off x="594360" y="3364992"/>
-              <a:ext cx="274320" cy="612648"/>
-            </a:xfrm>
-            <a:prstGeom prst="rect">
-              <a:avLst/>
-            </a:prstGeom>
-            <a:noFill/>
-          </p:spPr>
-          <p:txBody>
-            <a:bodyPr wrap="square" lIns="0" tIns="0" rIns="0" bIns="0" anchor="t">
-              <a:spAutoFit/>
-            </a:bodyPr>
-            <a:lstStyle/>
-            <a:p>
-              <a:pPr algn="ctr">
-                <a:lnSpc>
-                  <a:spcPct val="115000"/>
-                </a:lnSpc>
-              </a:pPr>
-              <a:r>
-                <a:rPr sz="1300" b="1" i="0" dirty="0">
-                  <a:solidFill>
-                    <a:srgbClr val="C8102E"/>
-                  </a:solidFill>
-                  <a:latin typeface="Calibri"/>
-                </a:rPr>
-                <a:t>2</a:t>
-              </a:r>
-            </a:p>
-          </p:txBody>
-        </p:sp>
-        <p:sp>
-          <p:nvSpPr>
-            <p:cNvPr id="22" name="TextBox 21"/>
-            <p:cNvSpPr txBox="1"/>
-            <p:nvPr/>
-          </p:nvSpPr>
-          <p:spPr>
-            <a:xfrm>
-              <a:off x="1051560" y="3364992"/>
-              <a:ext cx="4389120" cy="612648"/>
-            </a:xfrm>
-            <a:prstGeom prst="rect">
-              <a:avLst/>
-            </a:prstGeom>
-            <a:noFill/>
-          </p:spPr>
-          <p:txBody>
-            <a:bodyPr wrap="square" lIns="0" tIns="0" rIns="0" bIns="0" anchor="t">
-              <a:spAutoFit/>
-            </a:bodyPr>
-            <a:lstStyle/>
-            <a:p>
-              <a:pPr algn="l">
-                <a:lnSpc>
-                  <a:spcPct val="115000"/>
-                </a:lnSpc>
-              </a:pPr>
-              <a:r>
-                <a:rPr sz="1300" b="0" i="0" dirty="0">
-                  <a:solidFill>
-                    <a:srgbClr val="1F2A36"/>
-                  </a:solidFill>
-                  <a:latin typeface="Calibri"/>
-                </a:rPr>
-                <a:t>Feld disabled / </a:t>
-              </a:r>
-              <a:r>
-                <a:rPr sz="1300" b="0" i="0" dirty="0" err="1">
-                  <a:solidFill>
-                    <a:srgbClr val="1F2A36"/>
-                  </a:solidFill>
-                  <a:latin typeface="Calibri"/>
-                </a:rPr>
-                <a:t>IsEnabled</a:t>
-              </a:r>
-              <a:r>
-                <a:rPr sz="1300" b="0" i="0" dirty="0">
-                  <a:solidFill>
-                    <a:srgbClr val="1F2A36"/>
-                  </a:solidFill>
-                  <a:latin typeface="Calibri"/>
-                </a:rPr>
-                <a:t>=False </a:t>
-              </a:r>
-              <a:r>
-                <a:rPr sz="1300" b="0" i="0" dirty="0" err="1">
-                  <a:solidFill>
-                    <a:srgbClr val="1F2A36"/>
-                  </a:solidFill>
-                  <a:latin typeface="Calibri"/>
-                </a:rPr>
-                <a:t>statt</a:t>
-              </a:r>
-              <a:r>
-                <a:rPr sz="1300" b="0" i="0" dirty="0">
-                  <a:solidFill>
-                    <a:srgbClr val="1F2A36"/>
-                  </a:solidFill>
-                  <a:latin typeface="Calibri"/>
-                </a:rPr>
-                <a:t> </a:t>
-              </a:r>
-              <a:r>
-                <a:rPr sz="1300" b="0" i="0" dirty="0" err="1">
-                  <a:solidFill>
-                    <a:srgbClr val="1F2A36"/>
-                  </a:solidFill>
-                  <a:latin typeface="Calibri"/>
-                </a:rPr>
-                <a:t>readonly</a:t>
-              </a:r>
-              <a:endParaRPr sz="1300" b="0" i="0" dirty="0">
-                <a:solidFill>
-                  <a:srgbClr val="1F2A36"/>
-                </a:solidFill>
-                <a:latin typeface="Calibri"/>
-              </a:endParaRPr>
-            </a:p>
-          </p:txBody>
-        </p:sp>
-        <p:sp>
-          <p:nvSpPr>
-            <p:cNvPr id="24" name="TextBox 23"/>
-            <p:cNvSpPr txBox="1"/>
-            <p:nvPr/>
-          </p:nvSpPr>
-          <p:spPr>
-            <a:xfrm>
-              <a:off x="5623560" y="3364992"/>
-              <a:ext cx="6217920" cy="612648"/>
-            </a:xfrm>
-            <a:prstGeom prst="rect">
-              <a:avLst/>
-            </a:prstGeom>
-            <a:noFill/>
-          </p:spPr>
-          <p:txBody>
-            <a:bodyPr wrap="square" lIns="0" tIns="0" rIns="0" bIns="0" anchor="t">
-              <a:spAutoFit/>
-            </a:bodyPr>
-            <a:lstStyle/>
-            <a:p>
-              <a:pPr algn="l">
-                <a:lnSpc>
-                  <a:spcPct val="115000"/>
-                </a:lnSpc>
-              </a:pPr>
-              <a:r>
-                <a:rPr sz="1300" b="0" i="0">
-                  <a:solidFill>
-                    <a:srgbClr val="1F2A36"/>
-                  </a:solidFill>
-                  <a:latin typeface="Calibri"/>
-                </a:rPr>
-                <a:t>readonly / IsReadOnly=true – Fokus und Vorlesbarkeit bleiben erhalten.</a:t>
-              </a:r>
-            </a:p>
-          </p:txBody>
-        </p:sp>
-      </p:grpSp>
-      <p:sp>
-        <p:nvSpPr>
-          <p:cNvPr id="25" name="Rectangle 24"/>
-          <p:cNvSpPr/>
-          <p:nvPr/>
-        </p:nvSpPr>
-        <p:spPr>
-          <a:xfrm>
-            <a:off x="457200" y="3977640"/>
-            <a:ext cx="457200" cy="777240"/>
-          </a:xfrm>
-          <a:prstGeom prst="rect">
-            <a:avLst/>
-          </a:prstGeom>
-          <a:solidFill>
-            <a:srgbClr val="FFFFFF"/>
-          </a:solidFill>
-          <a:ln w="9525">
-            <a:solidFill>
-              <a:srgbClr val="E9ECEF"/>
-            </a:solidFill>
-          </a:ln>
-          <a:effectLst/>
-        </p:spPr>
-        <p:style>
-          <a:lnRef idx="1">
-            <a:schemeClr val="accent1"/>
-          </a:lnRef>
-          <a:fillRef idx="3">
-            <a:schemeClr val="accent1"/>
-          </a:fillRef>
-          <a:effectRef idx="2">
-            <a:schemeClr val="accent1"/>
-          </a:effectRef>
-          <a:fontRef idx="minor">
-            <a:schemeClr val="lt1"/>
-          </a:fontRef>
-        </p:style>
-        <p:txBody>
-          <a:bodyPr rtlCol="0" anchor="ctr"/>
-          <a:lstStyle/>
-          <a:p>
-            <a:pPr algn="ctr"/>
-            <a:endParaRPr/>
-          </a:p>
-        </p:txBody>
-      </p:sp>
-      <p:sp>
-        <p:nvSpPr>
-          <p:cNvPr id="27" name="Rectangle 26"/>
-          <p:cNvSpPr/>
-          <p:nvPr/>
-        </p:nvSpPr>
-        <p:spPr>
-          <a:xfrm>
-            <a:off x="914400" y="3977640"/>
-            <a:ext cx="4572000" cy="777240"/>
-          </a:xfrm>
-          <a:prstGeom prst="rect">
-            <a:avLst/>
-          </a:prstGeom>
-          <a:solidFill>
-            <a:srgbClr val="FFFFFF"/>
-          </a:solidFill>
-          <a:ln w="9525">
-            <a:solidFill>
-              <a:srgbClr val="E9ECEF"/>
-            </a:solidFill>
-          </a:ln>
-          <a:effectLst/>
-        </p:spPr>
-        <p:style>
-          <a:lnRef idx="1">
-            <a:schemeClr val="accent1"/>
-          </a:lnRef>
-          <a:fillRef idx="3">
-            <a:schemeClr val="accent1"/>
-          </a:fillRef>
-          <a:effectRef idx="2">
-            <a:schemeClr val="accent1"/>
-          </a:effectRef>
-          <a:fontRef idx="minor">
-            <a:schemeClr val="lt1"/>
-          </a:fontRef>
-        </p:style>
-        <p:txBody>
-          <a:bodyPr rtlCol="0" anchor="ctr"/>
-          <a:lstStyle/>
-          <a:p>
-            <a:pPr algn="ctr"/>
-            <a:endParaRPr/>
-          </a:p>
-        </p:txBody>
-      </p:sp>
-      <p:sp>
-        <p:nvSpPr>
-          <p:cNvPr id="29" name="Rectangle 28"/>
-          <p:cNvSpPr/>
-          <p:nvPr/>
-        </p:nvSpPr>
-        <p:spPr>
-          <a:xfrm>
-            <a:off x="5486400" y="3977640"/>
-            <a:ext cx="6400800" cy="777240"/>
-          </a:xfrm>
-          <a:prstGeom prst="rect">
-            <a:avLst/>
-          </a:prstGeom>
-          <a:solidFill>
-            <a:srgbClr val="FFFFFF"/>
-          </a:solidFill>
-          <a:ln w="9525">
-            <a:solidFill>
-              <a:srgbClr val="E9ECEF"/>
-            </a:solidFill>
-          </a:ln>
-          <a:effectLst/>
-        </p:spPr>
-        <p:style>
-          <a:lnRef idx="1">
-            <a:schemeClr val="accent1"/>
-          </a:lnRef>
-          <a:fillRef idx="3">
-            <a:schemeClr val="accent1"/>
-          </a:fillRef>
-          <a:effectRef idx="2">
-            <a:schemeClr val="accent1"/>
-          </a:effectRef>
-          <a:fontRef idx="minor">
-            <a:schemeClr val="lt1"/>
-          </a:fontRef>
-        </p:style>
-        <p:txBody>
-          <a:bodyPr rtlCol="0" anchor="ctr"/>
-          <a:lstStyle/>
-          <a:p>
-            <a:pPr algn="ctr"/>
-            <a:endParaRPr/>
-          </a:p>
-        </p:txBody>
-      </p:sp>
-      <p:grpSp>
-        <p:nvGrpSpPr>
-          <p:cNvPr id="48" name="Gruppieren 47">
-            <a:extLst>
-              <a:ext uri="{FF2B5EF4-FFF2-40B4-BE49-F238E27FC236}">
-                <a16:creationId xmlns:a16="http://schemas.microsoft.com/office/drawing/2014/main" id="{2EDD4D63-973E-359A-E18E-64E41FBFA533}"/>
-              </a:ext>
-            </a:extLst>
-          </p:cNvPr>
-          <p:cNvGrpSpPr/>
-          <p:nvPr/>
-        </p:nvGrpSpPr>
-        <p:grpSpPr>
-          <a:xfrm>
-            <a:off x="594360" y="4142232"/>
-            <a:ext cx="11247120" cy="612648"/>
-            <a:chOff x="594360" y="4142232"/>
-            <a:chExt cx="11247120" cy="612648"/>
-          </a:xfrm>
-        </p:grpSpPr>
-        <p:sp>
-          <p:nvSpPr>
-            <p:cNvPr id="26" name="TextBox 25"/>
-            <p:cNvSpPr txBox="1"/>
-            <p:nvPr/>
-          </p:nvSpPr>
-          <p:spPr>
-            <a:xfrm>
-              <a:off x="594360" y="4142232"/>
-              <a:ext cx="274320" cy="612648"/>
-            </a:xfrm>
-            <a:prstGeom prst="rect">
-              <a:avLst/>
-            </a:prstGeom>
-            <a:noFill/>
-          </p:spPr>
-          <p:txBody>
-            <a:bodyPr wrap="square" lIns="0" tIns="0" rIns="0" bIns="0" anchor="t">
-              <a:spAutoFit/>
-            </a:bodyPr>
-            <a:lstStyle/>
-            <a:p>
-              <a:pPr algn="ctr">
-                <a:lnSpc>
-                  <a:spcPct val="115000"/>
-                </a:lnSpc>
-              </a:pPr>
-              <a:r>
-                <a:rPr sz="1300" b="1" i="0" dirty="0">
-                  <a:solidFill>
-                    <a:srgbClr val="C8102E"/>
-                  </a:solidFill>
-                  <a:latin typeface="Calibri"/>
-                </a:rPr>
-                <a:t>3</a:t>
-              </a:r>
-            </a:p>
-          </p:txBody>
-        </p:sp>
-        <p:sp>
-          <p:nvSpPr>
-            <p:cNvPr id="28" name="TextBox 27"/>
-            <p:cNvSpPr txBox="1"/>
-            <p:nvPr/>
-          </p:nvSpPr>
-          <p:spPr>
-            <a:xfrm>
-              <a:off x="1051560" y="4142232"/>
-              <a:ext cx="4389120" cy="612648"/>
-            </a:xfrm>
-            <a:prstGeom prst="rect">
-              <a:avLst/>
-            </a:prstGeom>
-            <a:noFill/>
-          </p:spPr>
-          <p:txBody>
-            <a:bodyPr wrap="square" lIns="0" tIns="0" rIns="0" bIns="0" anchor="t">
-              <a:spAutoFit/>
-            </a:bodyPr>
-            <a:lstStyle/>
-            <a:p>
-              <a:pPr algn="l">
-                <a:lnSpc>
-                  <a:spcPct val="115000"/>
-                </a:lnSpc>
-              </a:pPr>
-              <a:r>
-                <a:rPr sz="1300" b="0" i="0" dirty="0" err="1">
-                  <a:solidFill>
-                    <a:srgbClr val="1F2A36"/>
-                  </a:solidFill>
-                  <a:latin typeface="Calibri"/>
-                </a:rPr>
-                <a:t>Diagramm</a:t>
-              </a:r>
-              <a:r>
-                <a:rPr sz="1300" b="0" i="0" dirty="0">
-                  <a:solidFill>
-                    <a:srgbClr val="1F2A36"/>
-                  </a:solidFill>
-                  <a:latin typeface="Calibri"/>
-                </a:rPr>
-                <a:t> </a:t>
-              </a:r>
-              <a:r>
-                <a:rPr sz="1300" b="0" i="0" dirty="0" err="1">
-                  <a:solidFill>
-                    <a:srgbClr val="1F2A36"/>
-                  </a:solidFill>
-                  <a:latin typeface="Calibri"/>
-                </a:rPr>
-                <a:t>fokussierbar</a:t>
-              </a:r>
-              <a:r>
-                <a:rPr sz="1300" b="0" i="0" dirty="0">
-                  <a:solidFill>
-                    <a:srgbClr val="1F2A36"/>
-                  </a:solidFill>
-                  <a:latin typeface="Calibri"/>
-                </a:rPr>
-                <a:t>, </a:t>
-              </a:r>
-              <a:r>
-                <a:rPr sz="1300" b="0" i="0" dirty="0" err="1">
-                  <a:solidFill>
-                    <a:srgbClr val="1F2A36"/>
-                  </a:solidFill>
-                  <a:latin typeface="Calibri"/>
-                </a:rPr>
-                <a:t>aber</a:t>
-              </a:r>
-              <a:r>
-                <a:rPr sz="1300" b="0" i="0" dirty="0">
-                  <a:solidFill>
-                    <a:srgbClr val="1F2A36"/>
-                  </a:solidFill>
-                  <a:latin typeface="Calibri"/>
-                </a:rPr>
-                <a:t> </a:t>
-              </a:r>
-              <a:r>
-                <a:rPr sz="1300" b="0" i="0" dirty="0" err="1">
-                  <a:solidFill>
-                    <a:srgbClr val="1F2A36"/>
-                  </a:solidFill>
-                  <a:latin typeface="Calibri"/>
-                </a:rPr>
-                <a:t>ohne</a:t>
-              </a:r>
-              <a:r>
-                <a:rPr sz="1300" b="0" i="0" dirty="0">
-                  <a:solidFill>
-                    <a:srgbClr val="1F2A36"/>
-                  </a:solidFill>
-                  <a:latin typeface="Calibri"/>
-                </a:rPr>
-                <a:t> Namen</a:t>
-              </a:r>
-            </a:p>
-          </p:txBody>
-        </p:sp>
-        <p:sp>
-          <p:nvSpPr>
-            <p:cNvPr id="30" name="TextBox 29"/>
-            <p:cNvSpPr txBox="1"/>
-            <p:nvPr/>
-          </p:nvSpPr>
-          <p:spPr>
-            <a:xfrm>
-              <a:off x="5623560" y="4142232"/>
-              <a:ext cx="6217920" cy="612648"/>
-            </a:xfrm>
-            <a:prstGeom prst="rect">
-              <a:avLst/>
-            </a:prstGeom>
-            <a:noFill/>
-          </p:spPr>
-          <p:txBody>
-            <a:bodyPr wrap="square" lIns="0" tIns="0" rIns="0" bIns="0" anchor="t">
-              <a:spAutoFit/>
-            </a:bodyPr>
-            <a:lstStyle/>
-            <a:p>
-              <a:pPr algn="l">
-                <a:lnSpc>
-                  <a:spcPct val="115000"/>
-                </a:lnSpc>
-              </a:pPr>
-              <a:r>
-                <a:rPr sz="1300" b="0" i="0">
-                  <a:solidFill>
-                    <a:srgbClr val="1F2A36"/>
-                  </a:solidFill>
-                  <a:latin typeface="Calibri"/>
-                </a:rPr>
-                <a:t>role=img + aria-labelledby/-describedby bzw. AutomationProperties.Name + HelpText</a:t>
-              </a:r>
-            </a:p>
-          </p:txBody>
-        </p:sp>
-      </p:grpSp>
-      <p:sp>
-        <p:nvSpPr>
-          <p:cNvPr id="31" name="Rectangle 30"/>
-          <p:cNvSpPr/>
-          <p:nvPr/>
-        </p:nvSpPr>
-        <p:spPr>
-          <a:xfrm>
-            <a:off x="457200" y="4754880"/>
-            <a:ext cx="457200" cy="777240"/>
-          </a:xfrm>
-          <a:prstGeom prst="rect">
-            <a:avLst/>
-          </a:prstGeom>
-          <a:solidFill>
-            <a:srgbClr val="F5F6F8"/>
-          </a:solidFill>
-          <a:ln w="9525">
-            <a:solidFill>
-              <a:srgbClr val="E9ECEF"/>
-            </a:solidFill>
-          </a:ln>
-          <a:effectLst/>
-        </p:spPr>
-        <p:style>
-          <a:lnRef idx="1">
-            <a:schemeClr val="accent1"/>
-          </a:lnRef>
-          <a:fillRef idx="3">
-            <a:schemeClr val="accent1"/>
-          </a:fillRef>
-          <a:effectRef idx="2">
-            <a:schemeClr val="accent1"/>
-          </a:effectRef>
-          <a:fontRef idx="minor">
-            <a:schemeClr val="lt1"/>
-          </a:fontRef>
-        </p:style>
-        <p:txBody>
-          <a:bodyPr rtlCol="0" anchor="ctr"/>
-          <a:lstStyle/>
-          <a:p>
-            <a:pPr algn="ctr"/>
-            <a:endParaRPr/>
-          </a:p>
-        </p:txBody>
-      </p:sp>
-      <p:sp>
-        <p:nvSpPr>
-          <p:cNvPr id="33" name="Rectangle 32"/>
-          <p:cNvSpPr/>
-          <p:nvPr/>
-        </p:nvSpPr>
-        <p:spPr>
-          <a:xfrm>
-            <a:off x="914400" y="4754880"/>
-            <a:ext cx="4572000" cy="777240"/>
-          </a:xfrm>
-          <a:prstGeom prst="rect">
-            <a:avLst/>
-          </a:prstGeom>
-          <a:solidFill>
-            <a:srgbClr val="F5F6F8"/>
-          </a:solidFill>
-          <a:ln w="9525">
-            <a:solidFill>
-              <a:srgbClr val="E9ECEF"/>
-            </a:solidFill>
-          </a:ln>
-          <a:effectLst/>
-        </p:spPr>
-        <p:style>
-          <a:lnRef idx="1">
-            <a:schemeClr val="accent1"/>
-          </a:lnRef>
-          <a:fillRef idx="3">
-            <a:schemeClr val="accent1"/>
-          </a:fillRef>
-          <a:effectRef idx="2">
-            <a:schemeClr val="accent1"/>
-          </a:effectRef>
-          <a:fontRef idx="minor">
-            <a:schemeClr val="lt1"/>
-          </a:fontRef>
-        </p:style>
-        <p:txBody>
-          <a:bodyPr rtlCol="0" anchor="ctr"/>
-          <a:lstStyle/>
-          <a:p>
-            <a:pPr algn="ctr"/>
-            <a:endParaRPr/>
-          </a:p>
-        </p:txBody>
-      </p:sp>
-      <p:sp>
-        <p:nvSpPr>
-          <p:cNvPr id="35" name="Rectangle 34"/>
-          <p:cNvSpPr/>
-          <p:nvPr/>
-        </p:nvSpPr>
-        <p:spPr>
-          <a:xfrm>
-            <a:off x="5486400" y="4754880"/>
-            <a:ext cx="6400800" cy="777240"/>
-          </a:xfrm>
-          <a:prstGeom prst="rect">
-            <a:avLst/>
-          </a:prstGeom>
-          <a:solidFill>
-            <a:srgbClr val="F5F6F8"/>
-          </a:solidFill>
-          <a:ln w="9525">
-            <a:solidFill>
-              <a:srgbClr val="E9ECEF"/>
-            </a:solidFill>
-          </a:ln>
-          <a:effectLst/>
-        </p:spPr>
-        <p:style>
-          <a:lnRef idx="1">
-            <a:schemeClr val="accent1"/>
-          </a:lnRef>
-          <a:fillRef idx="3">
-            <a:schemeClr val="accent1"/>
-          </a:fillRef>
-          <a:effectRef idx="2">
-            <a:schemeClr val="accent1"/>
-          </a:effectRef>
-          <a:fontRef idx="minor">
-            <a:schemeClr val="lt1"/>
-          </a:fontRef>
-        </p:style>
-        <p:txBody>
-          <a:bodyPr rtlCol="0" anchor="ctr"/>
-          <a:lstStyle/>
-          <a:p>
-            <a:pPr algn="ctr"/>
-            <a:endParaRPr/>
-          </a:p>
-        </p:txBody>
-      </p:sp>
-      <p:grpSp>
-        <p:nvGrpSpPr>
-          <p:cNvPr id="49" name="Gruppieren 48">
-            <a:extLst>
-              <a:ext uri="{FF2B5EF4-FFF2-40B4-BE49-F238E27FC236}">
-                <a16:creationId xmlns:a16="http://schemas.microsoft.com/office/drawing/2014/main" id="{3A3C1759-A0B9-B0EB-9E28-72E50835E6EB}"/>
-              </a:ext>
-            </a:extLst>
-          </p:cNvPr>
-          <p:cNvGrpSpPr/>
-          <p:nvPr/>
-        </p:nvGrpSpPr>
-        <p:grpSpPr>
-          <a:xfrm>
-            <a:off x="594360" y="4919472"/>
-            <a:ext cx="11247120" cy="612648"/>
-            <a:chOff x="594360" y="4919472"/>
-            <a:chExt cx="11247120" cy="612648"/>
-          </a:xfrm>
-        </p:grpSpPr>
-        <p:sp>
-          <p:nvSpPr>
-            <p:cNvPr id="32" name="TextBox 31"/>
-            <p:cNvSpPr txBox="1"/>
-            <p:nvPr/>
-          </p:nvSpPr>
-          <p:spPr>
-            <a:xfrm>
-              <a:off x="594360" y="4919472"/>
-              <a:ext cx="274320" cy="612648"/>
-            </a:xfrm>
-            <a:prstGeom prst="rect">
-              <a:avLst/>
-            </a:prstGeom>
-            <a:noFill/>
-          </p:spPr>
-          <p:txBody>
-            <a:bodyPr wrap="square" lIns="0" tIns="0" rIns="0" bIns="0" anchor="t">
-              <a:spAutoFit/>
-            </a:bodyPr>
-            <a:lstStyle/>
-            <a:p>
-              <a:pPr algn="ctr">
-                <a:lnSpc>
-                  <a:spcPct val="115000"/>
-                </a:lnSpc>
-              </a:pPr>
-              <a:r>
-                <a:rPr sz="1300" b="1" i="0" dirty="0">
-                  <a:solidFill>
-                    <a:srgbClr val="C8102E"/>
-                  </a:solidFill>
-                  <a:latin typeface="Calibri"/>
-                </a:rPr>
-                <a:t>4</a:t>
-              </a:r>
-            </a:p>
-          </p:txBody>
-        </p:sp>
-        <p:sp>
-          <p:nvSpPr>
-            <p:cNvPr id="34" name="TextBox 33"/>
-            <p:cNvSpPr txBox="1"/>
-            <p:nvPr/>
-          </p:nvSpPr>
-          <p:spPr>
-            <a:xfrm>
-              <a:off x="1051560" y="4919472"/>
-              <a:ext cx="4389120" cy="612648"/>
-            </a:xfrm>
-            <a:prstGeom prst="rect">
-              <a:avLst/>
-            </a:prstGeom>
-            <a:noFill/>
-          </p:spPr>
-          <p:txBody>
-            <a:bodyPr wrap="square" lIns="0" tIns="0" rIns="0" bIns="0" anchor="t">
-              <a:spAutoFit/>
-            </a:bodyPr>
-            <a:lstStyle/>
-            <a:p>
-              <a:pPr algn="l">
-                <a:lnSpc>
-                  <a:spcPct val="115000"/>
-                </a:lnSpc>
-              </a:pPr>
-              <a:r>
-                <a:rPr sz="1300" b="0" i="0" dirty="0" err="1">
-                  <a:solidFill>
-                    <a:srgbClr val="1F2A36"/>
-                  </a:solidFill>
-                  <a:latin typeface="Calibri"/>
-                </a:rPr>
-                <a:t>Schaltfläche</a:t>
-              </a:r>
-              <a:r>
-                <a:rPr sz="1300" b="0" i="0" dirty="0">
-                  <a:solidFill>
-                    <a:srgbClr val="1F2A36"/>
-                  </a:solidFill>
-                  <a:latin typeface="Calibri"/>
-                </a:rPr>
-                <a:t> </a:t>
-              </a:r>
-              <a:r>
-                <a:rPr sz="1300" b="0" i="0" dirty="0" err="1">
-                  <a:solidFill>
-                    <a:srgbClr val="1F2A36"/>
-                  </a:solidFill>
-                  <a:latin typeface="Calibri"/>
-                </a:rPr>
-                <a:t>mit</a:t>
-              </a:r>
-              <a:r>
-                <a:rPr sz="1300" b="0" i="0" dirty="0">
-                  <a:solidFill>
-                    <a:srgbClr val="1F2A36"/>
-                  </a:solidFill>
-                  <a:latin typeface="Calibri"/>
-                </a:rPr>
-                <a:t> </a:t>
-              </a:r>
-              <a:r>
-                <a:rPr sz="1300" b="0" i="0" dirty="0" err="1">
-                  <a:solidFill>
-                    <a:srgbClr val="1F2A36"/>
-                  </a:solidFill>
-                  <a:latin typeface="Calibri"/>
-                </a:rPr>
-                <a:t>zu</a:t>
-              </a:r>
-              <a:r>
-                <a:rPr sz="1300" b="0" i="0" dirty="0">
-                  <a:solidFill>
-                    <a:srgbClr val="1F2A36"/>
-                  </a:solidFill>
-                  <a:latin typeface="Calibri"/>
-                </a:rPr>
-                <a:t> </a:t>
-              </a:r>
-              <a:r>
-                <a:rPr sz="1300" b="0" i="0" dirty="0" err="1">
-                  <a:solidFill>
-                    <a:srgbClr val="1F2A36"/>
-                  </a:solidFill>
-                  <a:latin typeface="Calibri"/>
-                </a:rPr>
-                <a:t>schwachem</a:t>
-              </a:r>
-              <a:r>
-                <a:rPr sz="1300" b="0" i="0" dirty="0">
-                  <a:solidFill>
-                    <a:srgbClr val="1F2A36"/>
-                  </a:solidFill>
-                  <a:latin typeface="Calibri"/>
-                </a:rPr>
-                <a:t> </a:t>
-              </a:r>
-              <a:r>
-                <a:rPr sz="1300" b="0" i="0" dirty="0" err="1">
-                  <a:solidFill>
-                    <a:srgbClr val="1F2A36"/>
-                  </a:solidFill>
-                  <a:latin typeface="Calibri"/>
-                </a:rPr>
-                <a:t>Kontrast</a:t>
-              </a:r>
-              <a:endParaRPr sz="1300" b="0" i="0" dirty="0">
-                <a:solidFill>
-                  <a:srgbClr val="1F2A36"/>
-                </a:solidFill>
-                <a:latin typeface="Calibri"/>
-              </a:endParaRPr>
-            </a:p>
-          </p:txBody>
-        </p:sp>
-        <p:sp>
-          <p:nvSpPr>
-            <p:cNvPr id="36" name="TextBox 35"/>
-            <p:cNvSpPr txBox="1"/>
-            <p:nvPr/>
-          </p:nvSpPr>
-          <p:spPr>
-            <a:xfrm>
-              <a:off x="5623560" y="4919472"/>
-              <a:ext cx="6217920" cy="612648"/>
-            </a:xfrm>
-            <a:prstGeom prst="rect">
-              <a:avLst/>
-            </a:prstGeom>
-            <a:noFill/>
-          </p:spPr>
-          <p:txBody>
-            <a:bodyPr wrap="square" lIns="0" tIns="0" rIns="0" bIns="0" anchor="t">
-              <a:spAutoFit/>
-            </a:bodyPr>
-            <a:lstStyle/>
-            <a:p>
-              <a:pPr algn="l">
-                <a:lnSpc>
-                  <a:spcPct val="115000"/>
-                </a:lnSpc>
-              </a:pPr>
-              <a:r>
-                <a:rPr sz="1300" b="0" i="0">
-                  <a:solidFill>
-                    <a:srgbClr val="1F2A36"/>
-                  </a:solidFill>
-                  <a:latin typeface="Calibri"/>
-                </a:rPr>
-                <a:t>WCAG-AA-Kontrast ≥ 4,5:1 (Text) bzw. ≥ 3:1 (Komponenten) sicherstellen.</a:t>
-              </a:r>
-            </a:p>
-          </p:txBody>
-        </p:sp>
-      </p:grpSp>
-      <p:sp>
-        <p:nvSpPr>
-          <p:cNvPr id="37" name="Rectangle 36"/>
-          <p:cNvSpPr/>
-          <p:nvPr/>
-        </p:nvSpPr>
-        <p:spPr>
-          <a:xfrm>
-            <a:off x="457200" y="5532120"/>
-            <a:ext cx="457200" cy="777240"/>
-          </a:xfrm>
-          <a:prstGeom prst="rect">
-            <a:avLst/>
-          </a:prstGeom>
-          <a:solidFill>
-            <a:srgbClr val="FFFFFF"/>
-          </a:solidFill>
-          <a:ln w="9525">
-            <a:solidFill>
-              <a:srgbClr val="E9ECEF"/>
-            </a:solidFill>
-          </a:ln>
-          <a:effectLst/>
-        </p:spPr>
-        <p:style>
-          <a:lnRef idx="1">
-            <a:schemeClr val="accent1"/>
-          </a:lnRef>
-          <a:fillRef idx="3">
-            <a:schemeClr val="accent1"/>
-          </a:fillRef>
-          <a:effectRef idx="2">
-            <a:schemeClr val="accent1"/>
-          </a:effectRef>
-          <a:fontRef idx="minor">
-            <a:schemeClr val="lt1"/>
-          </a:fontRef>
-        </p:style>
-        <p:txBody>
-          <a:bodyPr rtlCol="0" anchor="ctr"/>
-          <a:lstStyle/>
-          <a:p>
-            <a:pPr algn="ctr"/>
-            <a:endParaRPr/>
-          </a:p>
-        </p:txBody>
-      </p:sp>
-      <p:sp>
-        <p:nvSpPr>
-          <p:cNvPr id="39" name="Rectangle 38"/>
-          <p:cNvSpPr/>
-          <p:nvPr/>
-        </p:nvSpPr>
-        <p:spPr>
-          <a:xfrm>
-            <a:off x="914400" y="5532120"/>
-            <a:ext cx="4572000" cy="777240"/>
-          </a:xfrm>
-          <a:prstGeom prst="rect">
-            <a:avLst/>
-          </a:prstGeom>
-          <a:solidFill>
-            <a:srgbClr val="FFFFFF"/>
-          </a:solidFill>
-          <a:ln w="9525">
-            <a:solidFill>
-              <a:srgbClr val="E9ECEF"/>
-            </a:solidFill>
-          </a:ln>
-          <a:effectLst/>
-        </p:spPr>
-        <p:style>
-          <a:lnRef idx="1">
-            <a:schemeClr val="accent1"/>
-          </a:lnRef>
-          <a:fillRef idx="3">
-            <a:schemeClr val="accent1"/>
-          </a:fillRef>
-          <a:effectRef idx="2">
-            <a:schemeClr val="accent1"/>
-          </a:effectRef>
-          <a:fontRef idx="minor">
-            <a:schemeClr val="lt1"/>
-          </a:fontRef>
-        </p:style>
-        <p:txBody>
-          <a:bodyPr rtlCol="0" anchor="ctr"/>
-          <a:lstStyle/>
-          <a:p>
-            <a:pPr algn="ctr"/>
-            <a:endParaRPr/>
-          </a:p>
-        </p:txBody>
-      </p:sp>
-      <p:sp>
-        <p:nvSpPr>
-          <p:cNvPr id="41" name="Rectangle 40"/>
-          <p:cNvSpPr/>
-          <p:nvPr/>
-        </p:nvSpPr>
-        <p:spPr>
-          <a:xfrm>
-            <a:off x="5486400" y="5532120"/>
-            <a:ext cx="6400800" cy="777240"/>
-          </a:xfrm>
-          <a:prstGeom prst="rect">
-            <a:avLst/>
-          </a:prstGeom>
-          <a:solidFill>
-            <a:srgbClr val="FFFFFF"/>
-          </a:solidFill>
-          <a:ln w="9525">
-            <a:solidFill>
-              <a:srgbClr val="E9ECEF"/>
-            </a:solidFill>
-          </a:ln>
-          <a:effectLst/>
-        </p:spPr>
-        <p:style>
-          <a:lnRef idx="1">
-            <a:schemeClr val="accent1"/>
-          </a:lnRef>
-          <a:fillRef idx="3">
-            <a:schemeClr val="accent1"/>
-          </a:fillRef>
-          <a:effectRef idx="2">
-            <a:schemeClr val="accent1"/>
-          </a:effectRef>
-          <a:fontRef idx="minor">
-            <a:schemeClr val="lt1"/>
-          </a:fontRef>
-        </p:style>
-        <p:txBody>
-          <a:bodyPr rtlCol="0" anchor="ctr"/>
-          <a:lstStyle/>
-          <a:p>
-            <a:pPr algn="ctr"/>
-            <a:endParaRPr/>
-          </a:p>
-        </p:txBody>
-      </p:sp>
-      <p:grpSp>
-        <p:nvGrpSpPr>
-          <p:cNvPr id="50" name="Gruppieren 49">
-            <a:extLst>
-              <a:ext uri="{FF2B5EF4-FFF2-40B4-BE49-F238E27FC236}">
-                <a16:creationId xmlns:a16="http://schemas.microsoft.com/office/drawing/2014/main" id="{C665E448-635F-CBD3-5CFC-06F995A20719}"/>
-              </a:ext>
-            </a:extLst>
-          </p:cNvPr>
-          <p:cNvGrpSpPr/>
-          <p:nvPr/>
-        </p:nvGrpSpPr>
-        <p:grpSpPr>
-          <a:xfrm>
-            <a:off x="594360" y="5696712"/>
-            <a:ext cx="11247120" cy="612648"/>
-            <a:chOff x="594360" y="5696712"/>
-            <a:chExt cx="11247120" cy="612648"/>
-          </a:xfrm>
-        </p:grpSpPr>
-        <p:sp>
-          <p:nvSpPr>
-            <p:cNvPr id="38" name="TextBox 37"/>
-            <p:cNvSpPr txBox="1"/>
-            <p:nvPr/>
-          </p:nvSpPr>
-          <p:spPr>
-            <a:xfrm>
-              <a:off x="594360" y="5696712"/>
-              <a:ext cx="274320" cy="612648"/>
-            </a:xfrm>
-            <a:prstGeom prst="rect">
-              <a:avLst/>
-            </a:prstGeom>
-            <a:noFill/>
-          </p:spPr>
-          <p:txBody>
-            <a:bodyPr wrap="square" lIns="0" tIns="0" rIns="0" bIns="0" anchor="t">
-              <a:spAutoFit/>
-            </a:bodyPr>
-            <a:lstStyle/>
-            <a:p>
-              <a:pPr algn="ctr">
-                <a:lnSpc>
-                  <a:spcPct val="115000"/>
-                </a:lnSpc>
-              </a:pPr>
-              <a:r>
-                <a:rPr sz="1300" b="1" i="0" dirty="0">
-                  <a:solidFill>
-                    <a:srgbClr val="C8102E"/>
-                  </a:solidFill>
-                  <a:latin typeface="Calibri"/>
-                </a:rPr>
-                <a:t>5</a:t>
-              </a:r>
-            </a:p>
-          </p:txBody>
-        </p:sp>
-        <p:sp>
-          <p:nvSpPr>
-            <p:cNvPr id="40" name="TextBox 39"/>
-            <p:cNvSpPr txBox="1"/>
-            <p:nvPr/>
-          </p:nvSpPr>
-          <p:spPr>
-            <a:xfrm>
-              <a:off x="1051560" y="5696712"/>
-              <a:ext cx="4389120" cy="612648"/>
-            </a:xfrm>
-            <a:prstGeom prst="rect">
-              <a:avLst/>
-            </a:prstGeom>
-            <a:noFill/>
-          </p:spPr>
-          <p:txBody>
-            <a:bodyPr wrap="square" lIns="0" tIns="0" rIns="0" bIns="0" anchor="t">
-              <a:spAutoFit/>
-            </a:bodyPr>
-            <a:lstStyle/>
-            <a:p>
-              <a:pPr algn="l">
-                <a:lnSpc>
-                  <a:spcPct val="115000"/>
-                </a:lnSpc>
-              </a:pPr>
-              <a:r>
-                <a:rPr sz="1300" b="0" i="0" dirty="0">
-                  <a:solidFill>
-                    <a:srgbClr val="1F2A36"/>
-                  </a:solidFill>
-                  <a:latin typeface="Calibri"/>
-                </a:rPr>
-                <a:t>Icon-</a:t>
-              </a:r>
-              <a:r>
-                <a:rPr sz="1300" b="0" i="0" dirty="0" err="1">
-                  <a:solidFill>
-                    <a:srgbClr val="1F2A36"/>
-                  </a:solidFill>
-                  <a:latin typeface="Calibri"/>
-                </a:rPr>
-                <a:t>Schaltfläche</a:t>
-              </a:r>
-              <a:r>
-                <a:rPr sz="1300" b="0" i="0" dirty="0">
-                  <a:solidFill>
-                    <a:srgbClr val="1F2A36"/>
-                  </a:solidFill>
-                  <a:latin typeface="Calibri"/>
-                </a:rPr>
-                <a:t> </a:t>
-              </a:r>
-              <a:r>
-                <a:rPr sz="1300" b="0" i="0" dirty="0" err="1">
-                  <a:solidFill>
-                    <a:srgbClr val="1F2A36"/>
-                  </a:solidFill>
-                  <a:latin typeface="Calibri"/>
-                </a:rPr>
-                <a:t>ohne</a:t>
-              </a:r>
-              <a:r>
-                <a:rPr sz="1300" b="0" i="0" dirty="0">
-                  <a:solidFill>
-                    <a:srgbClr val="1F2A36"/>
-                  </a:solidFill>
-                  <a:latin typeface="Calibri"/>
-                </a:rPr>
-                <a:t> </a:t>
-              </a:r>
-              <a:r>
-                <a:rPr sz="1300" b="0" i="0" dirty="0" err="1">
-                  <a:solidFill>
-                    <a:srgbClr val="1F2A36"/>
-                  </a:solidFill>
-                  <a:latin typeface="Calibri"/>
-                </a:rPr>
-                <a:t>Beschriftung</a:t>
-              </a:r>
-              <a:endParaRPr sz="1300" b="0" i="0" dirty="0">
-                <a:solidFill>
-                  <a:srgbClr val="1F2A36"/>
-                </a:solidFill>
-                <a:latin typeface="Calibri"/>
-              </a:endParaRPr>
-            </a:p>
-          </p:txBody>
-        </p:sp>
-        <p:sp>
-          <p:nvSpPr>
-            <p:cNvPr id="42" name="TextBox 41"/>
-            <p:cNvSpPr txBox="1"/>
-            <p:nvPr/>
-          </p:nvSpPr>
-          <p:spPr>
-            <a:xfrm>
-              <a:off x="5623560" y="5696712"/>
-              <a:ext cx="6217920" cy="612648"/>
-            </a:xfrm>
-            <a:prstGeom prst="rect">
-              <a:avLst/>
-            </a:prstGeom>
-            <a:noFill/>
-          </p:spPr>
-          <p:txBody>
-            <a:bodyPr wrap="square" lIns="0" tIns="0" rIns="0" bIns="0" anchor="t">
-              <a:spAutoFit/>
-            </a:bodyPr>
-            <a:lstStyle/>
-            <a:p>
-              <a:pPr algn="l">
-                <a:lnSpc>
-                  <a:spcPct val="115000"/>
-                </a:lnSpc>
-              </a:pPr>
-              <a:r>
-                <a:rPr sz="1300" b="0" i="0">
-                  <a:solidFill>
-                    <a:srgbClr val="1F2A36"/>
-                  </a:solidFill>
-                  <a:latin typeface="Calibri"/>
-                </a:rPr>
-                <a:t>aria-label / AutomationProperties.Name / SemanticProperties.Description + Tooltip</a:t>
-              </a:r>
-            </a:p>
-          </p:txBody>
-        </p:sp>
-      </p:grpSp>
-      <p:sp>
-        <p:nvSpPr>
-          <p:cNvPr id="43" name="Rectangle 42"/>
-          <p:cNvSpPr/>
-          <p:nvPr/>
-        </p:nvSpPr>
-        <p:spPr>
-          <a:xfrm>
-            <a:off x="0" y="6537960"/>
-            <a:ext cx="12191695" cy="320040"/>
-          </a:xfrm>
-          <a:prstGeom prst="rect">
-            <a:avLst/>
-          </a:prstGeom>
-          <a:solidFill>
-            <a:srgbClr val="F5F6F8"/>
-          </a:solidFill>
-          <a:ln>
-            <a:noFill/>
-          </a:ln>
-          <a:effectLst/>
-        </p:spPr>
-        <p:style>
-          <a:lnRef idx="1">
-            <a:schemeClr val="accent1"/>
-          </a:lnRef>
-          <a:fillRef idx="3">
-            <a:schemeClr val="accent1"/>
-          </a:fillRef>
-          <a:effectRef idx="2">
-            <a:schemeClr val="accent1"/>
-          </a:effectRef>
-          <a:fontRef idx="minor">
-            <a:schemeClr val="lt1"/>
-          </a:fontRef>
-        </p:style>
-        <p:txBody>
-          <a:bodyPr rtlCol="0" anchor="ctr"/>
-          <a:lstStyle/>
-          <a:p>
-            <a:pPr algn="ctr"/>
-            <a:endParaRPr/>
-          </a:p>
-        </p:txBody>
-      </p:sp>
-      <p:sp>
-        <p:nvSpPr>
-          <p:cNvPr id="44" name="TextBox 43"/>
-          <p:cNvSpPr txBox="1"/>
-          <p:nvPr/>
-        </p:nvSpPr>
-        <p:spPr>
-          <a:xfrm>
-            <a:off x="457200" y="6556248"/>
-            <a:ext cx="9144000" cy="274320"/>
-          </a:xfrm>
-          <a:prstGeom prst="rect">
-            <a:avLst/>
-          </a:prstGeom>
-          <a:noFill/>
-        </p:spPr>
-        <p:txBody>
-          <a:bodyPr wrap="square" lIns="0" tIns="0" rIns="0" bIns="0" anchor="t">
-            <a:spAutoFit/>
-          </a:bodyPr>
-          <a:lstStyle/>
-          <a:p>
-            <a:pPr algn="l">
-              <a:lnSpc>
-                <a:spcPct val="115000"/>
-              </a:lnSpc>
-            </a:pPr>
-            <a:r>
-              <a:rPr sz="900" b="0" i="1">
-                <a:solidFill>
-                  <a:srgbClr val="5A6470"/>
-                </a:solidFill>
-                <a:latin typeface="Calibri"/>
-              </a:rPr>
-              <a:t>3 · Entwickeln</a:t>
-            </a:r>
-          </a:p>
-        </p:txBody>
-      </p:sp>
-      <p:sp>
-        <p:nvSpPr>
-          <p:cNvPr id="45" name="TextBox 44"/>
-          <p:cNvSpPr txBox="1"/>
-          <p:nvPr/>
-        </p:nvSpPr>
-        <p:spPr>
-          <a:xfrm>
-            <a:off x="10820095" y="6556248"/>
-            <a:ext cx="914400" cy="274320"/>
-          </a:xfrm>
-          <a:prstGeom prst="rect">
-            <a:avLst/>
-          </a:prstGeom>
-          <a:noFill/>
-        </p:spPr>
-        <p:txBody>
-          <a:bodyPr wrap="square" lIns="0" tIns="0" rIns="0" bIns="0" anchor="t">
-            <a:spAutoFit/>
-          </a:bodyPr>
-          <a:lstStyle/>
-          <a:p>
-            <a:pPr algn="r">
-              <a:lnSpc>
-                <a:spcPct val="115000"/>
-              </a:lnSpc>
-            </a:pPr>
-            <a:r>
-              <a:rPr sz="900" b="0" i="0">
-                <a:solidFill>
-                  <a:srgbClr val="5A6470"/>
-                </a:solidFill>
-                <a:latin typeface="Calibri"/>
-              </a:rPr>
-              <a:t>13 / 18</a:t>
-            </a:r>
-          </a:p>
-        </p:txBody>
-      </p:sp>
-    </p:spTree>
-  </p:cSld>
-  <p:clrMapOvr>
-    <a:masterClrMapping/>
-  </p:clrMapOvr>
-  <p:timing>
-    <p:tnLst>
-      <p:par>
-        <p:cTn id="1" dur="indefinite" restart="never" nodeType="tmRoot">
-          <p:childTnLst>
-            <p:seq concurrent="1" nextAc="seek">
-              <p:cTn id="2" dur="indefinite" nodeType="mainSeq">
-                <p:childTnLst>
-                  <p:par>
-                    <p:cTn id="3" fill="hold">
-                      <p:stCondLst>
-                        <p:cond delay="indefinite"/>
-                      </p:stCondLst>
-                      <p:childTnLst>
-                        <p:par>
-                          <p:cTn id="4" fill="hold">
-                            <p:stCondLst>
-                              <p:cond delay="0"/>
-                            </p:stCondLst>
-                            <p:childTnLst>
-                              <p:par>
-                                <p:cTn id="5" presetID="1" presetClass="entr" presetSubtype="0" fill="hold" nodeType="clickEffect">
-                                  <p:stCondLst>
-                                    <p:cond delay="0"/>
-                                  </p:stCondLst>
-                                  <p:childTnLst>
-                                    <p:set>
-                                      <p:cBhvr>
-                                        <p:cTn id="6" dur="1" fill="hold">
-                                          <p:stCondLst>
-                                            <p:cond delay="0"/>
-                                          </p:stCondLst>
-                                        </p:cTn>
-                                        <p:tgtEl>
-                                          <p:spTgt spid="46"/>
-                                        </p:tgtEl>
-                                        <p:attrNameLst>
-                                          <p:attrName>style.visibility</p:attrName>
-                                        </p:attrNameLst>
-                                      </p:cBhvr>
-                                      <p:to>
-                                        <p:strVal val="visible"/>
-                                      </p:to>
-                                    </p:set>
-                                  </p:childTnLst>
-                                </p:cTn>
-                              </p:par>
-                            </p:childTnLst>
-                          </p:cTn>
-                        </p:par>
-                      </p:childTnLst>
-                    </p:cTn>
-                  </p:par>
-                  <p:par>
-                    <p:cTn id="7" fill="hold">
-                      <p:stCondLst>
-                        <p:cond delay="indefinite"/>
-                      </p:stCondLst>
-                      <p:childTnLst>
-                        <p:par>
-                          <p:cTn id="8" fill="hold">
-                            <p:stCondLst>
-                              <p:cond delay="0"/>
-                            </p:stCondLst>
-                            <p:childTnLst>
-                              <p:par>
-                                <p:cTn id="9" presetID="1" presetClass="entr" presetSubtype="0" fill="hold" nodeType="clickEffect">
-                                  <p:stCondLst>
-                                    <p:cond delay="0"/>
-                                  </p:stCondLst>
-                                  <p:childTnLst>
-                                    <p:set>
-                                      <p:cBhvr>
-                                        <p:cTn id="10" dur="1" fill="hold">
-                                          <p:stCondLst>
-                                            <p:cond delay="0"/>
-                                          </p:stCondLst>
-                                        </p:cTn>
-                                        <p:tgtEl>
-                                          <p:spTgt spid="47"/>
-                                        </p:tgtEl>
-                                        <p:attrNameLst>
-                                          <p:attrName>style.visibility</p:attrName>
-                                        </p:attrNameLst>
-                                      </p:cBhvr>
-                                      <p:to>
-                                        <p:strVal val="visible"/>
-                                      </p:to>
-                                    </p:set>
-                                  </p:childTnLst>
-                                </p:cTn>
-                              </p:par>
-                            </p:childTnLst>
-                          </p:cTn>
-                        </p:par>
-                      </p:childTnLst>
-                    </p:cTn>
-                  </p:par>
-                  <p:par>
-                    <p:cTn id="11" fill="hold">
-                      <p:stCondLst>
-                        <p:cond delay="indefinite"/>
-                      </p:stCondLst>
-                      <p:childTnLst>
-                        <p:par>
-                          <p:cTn id="12" fill="hold">
-                            <p:stCondLst>
-                              <p:cond delay="0"/>
-                            </p:stCondLst>
-                            <p:childTnLst>
-                              <p:par>
-                                <p:cTn id="13" presetID="1" presetClass="entr" presetSubtype="0" fill="hold" nodeType="clickEffect">
-                                  <p:stCondLst>
-                                    <p:cond delay="0"/>
-                                  </p:stCondLst>
-                                  <p:childTnLst>
-                                    <p:set>
-                                      <p:cBhvr>
-                                        <p:cTn id="14" dur="1" fill="hold">
-                                          <p:stCondLst>
-                                            <p:cond delay="0"/>
-                                          </p:stCondLst>
-                                        </p:cTn>
-                                        <p:tgtEl>
-                                          <p:spTgt spid="48"/>
-                                        </p:tgtEl>
-                                        <p:attrNameLst>
-                                          <p:attrName>style.visibility</p:attrName>
-                                        </p:attrNameLst>
-                                      </p:cBhvr>
-                                      <p:to>
-                                        <p:strVal val="visible"/>
-                                      </p:to>
-                                    </p:set>
-                                  </p:childTnLst>
-                                </p:cTn>
-                              </p:par>
-                            </p:childTnLst>
-                          </p:cTn>
-                        </p:par>
-                      </p:childTnLst>
-                    </p:cTn>
-                  </p:par>
-                  <p:par>
-                    <p:cTn id="15" fill="hold">
-                      <p:stCondLst>
-                        <p:cond delay="indefinite"/>
-                      </p:stCondLst>
-                      <p:childTnLst>
-                        <p:par>
-                          <p:cTn id="16" fill="hold">
-                            <p:stCondLst>
-                              <p:cond delay="0"/>
-                            </p:stCondLst>
-                            <p:childTnLst>
-                              <p:par>
-                                <p:cTn id="17" presetID="1" presetClass="entr" presetSubtype="0" fill="hold" nodeType="clickEffect">
-                                  <p:stCondLst>
-                                    <p:cond delay="0"/>
-                                  </p:stCondLst>
-                                  <p:childTnLst>
-                                    <p:set>
-                                      <p:cBhvr>
-                                        <p:cTn id="18" dur="1" fill="hold">
-                                          <p:stCondLst>
-                                            <p:cond delay="0"/>
-                                          </p:stCondLst>
-                                        </p:cTn>
-                                        <p:tgtEl>
-                                          <p:spTgt spid="49"/>
-                                        </p:tgtEl>
-                                        <p:attrNameLst>
-                                          <p:attrName>style.visibility</p:attrName>
-                                        </p:attrNameLst>
-                                      </p:cBhvr>
-                                      <p:to>
-                                        <p:strVal val="visible"/>
-                                      </p:to>
-                                    </p:set>
-                                  </p:childTnLst>
-                                </p:cTn>
-                              </p:par>
-                            </p:childTnLst>
-                          </p:cTn>
-                        </p:par>
-                      </p:childTnLst>
-                    </p:cTn>
-                  </p:par>
-                  <p:par>
-                    <p:cTn id="19" fill="hold">
-                      <p:stCondLst>
-                        <p:cond delay="indefinite"/>
-                      </p:stCondLst>
-                      <p:childTnLst>
-                        <p:par>
-                          <p:cTn id="20" fill="hold">
-                            <p:stCondLst>
-                              <p:cond delay="0"/>
-                            </p:stCondLst>
-                            <p:childTnLst>
-                              <p:par>
-                                <p:cTn id="21" presetID="1" presetClass="entr" presetSubtype="0" fill="hold" nodeType="clickEffect">
-                                  <p:stCondLst>
-                                    <p:cond delay="0"/>
-                                  </p:stCondLst>
-                                  <p:childTnLst>
-                                    <p:set>
-                                      <p:cBhvr>
-                                        <p:cTn id="22" dur="1" fill="hold">
-                                          <p:stCondLst>
-                                            <p:cond delay="0"/>
-                                          </p:stCondLst>
-                                        </p:cTn>
-                                        <p:tgtEl>
-                                          <p:spTgt spid="50"/>
-                                        </p:tgtEl>
-                                        <p:attrNameLst>
-                                          <p:attrName>style.visibility</p:attrName>
-                                        </p:attrNameLst>
-                                      </p:cBhvr>
-                                      <p:to>
-                                        <p:strVal val="visible"/>
-                                      </p:to>
-                                    </p:set>
-                                  </p:childTnLst>
-                                </p:cTn>
-                              </p:par>
-                            </p:childTnLst>
-                          </p:cTn>
-                        </p:par>
-                      </p:childTnLst>
-                    </p:cTn>
-                  </p:par>
-                </p:childTnLst>
-              </p:cTn>
-              <p:prevCondLst>
-                <p:cond evt="onPrev" delay="0">
-                  <p:tgtEl>
-                    <p:sldTgt/>
-                  </p:tgtEl>
-                </p:cond>
-              </p:prevCondLst>
-              <p:nextCondLst>
-                <p:cond evt="onNext" delay="0">
-                  <p:tgtEl>
-                    <p:sldTgt/>
-                  </p:tgtEl>
-                </p:cond>
-              </p:nextCondLst>
-            </p:seq>
-          </p:childTnLst>
-        </p:cTn>
-      </p:par>
-    </p:tnLst>
-  </p:timing>
-</p:sld>
-</file>
-
-<file path=ppt/slides/slide16.xml><?xml version="1.0" encoding="utf-8"?>
-<p:sld xmlns:a="http://schemas.openxmlformats.org/drawingml/2006/main" xmlns:r="http://schemas.openxmlformats.org/officeDocument/2006/relationships" xmlns:p="http://schemas.openxmlformats.org/presentationml/2006/main">
-  <p:cSld>
-    <p:spTree>
-      <p:nvGrpSpPr>
         <p:cNvPr id="1" name="">
           <a:extLst>
             <a:ext uri="{FF2B5EF4-FFF2-40B4-BE49-F238E27FC236}">
@@ -15467,7 +13176,7 @@
                 </a:solidFill>
                 <a:latin typeface="Calibri"/>
               </a:rPr>
-              <a:t>Es muss trotzdem immer wieder nachgebessert werden bzw. besser Richtlinien-Dateien als Basis in jeden Projektordner, in dem die Anforderungen in dem Bereich genau ausformuliert sind.</a:t>
+              <a:t>Es muss trotzdem immer wieder nachgebessert werden und vor allem auch Richtlinien definiert werden – am besten Dateien als Basis in jeden Projektordner, in dem die Anforderungen für das Projekt genau ausformuliert sind und darin immer konkrete Barrierefreiheits-Anforderungen</a:t>
             </a:r>
             <a:endParaRPr sz="1400" b="0" i="1" dirty="0">
               <a:solidFill>
@@ -15493,7 +13202,7 @@
         <p:spPr>
           <a:xfrm>
             <a:off x="457199" y="2525377"/>
-            <a:ext cx="5486400" cy="568808"/>
+            <a:ext cx="5486400" cy="1115947"/>
           </a:xfrm>
           <a:prstGeom prst="rect">
             <a:avLst/>
@@ -15535,6 +13244,22 @@
               </a:rPr>
               <a:t>Nachbesserungsbedarf</a:t>
             </a:r>
+          </a:p>
+          <a:p>
+            <a:pPr>
+              <a:lnSpc>
+                <a:spcPct val="115000"/>
+              </a:lnSpc>
+            </a:pPr>
+            <a:r>
+              <a:rPr lang="de-DE" sz="1600" dirty="0">
+                <a:latin typeface="Calibri"/>
+              </a:rPr>
+              <a:t>(im Python Lösungs-Beispiel)</a:t>
+            </a:r>
+            <a:endParaRPr lang="de-DE" sz="1600" i="0" dirty="0">
+              <a:latin typeface="Calibri"/>
+            </a:endParaRPr>
           </a:p>
           <a:p>
             <a:pPr algn="l">
@@ -15858,7 +13583,7 @@
 </p:sld>
 </file>
 
-<file path=ppt/slides/slide17.xml><?xml version="1.0" encoding="utf-8"?>
+<file path=ppt/slides/slide16.xml><?xml version="1.0" encoding="utf-8"?>
 <p:sld xmlns:a="http://schemas.openxmlformats.org/drawingml/2006/main" xmlns:r="http://schemas.openxmlformats.org/officeDocument/2006/relationships" xmlns:p="http://schemas.openxmlformats.org/presentationml/2006/main">
   <p:cSld>
     <p:spTree>
@@ -16323,7 +14048,7 @@
           <p:spPr>
             <a:xfrm>
               <a:off x="1554480" y="2880360"/>
-              <a:ext cx="10058400" cy="457200"/>
+              <a:ext cx="10058400" cy="333168"/>
             </a:xfrm>
             <a:prstGeom prst="rect">
               <a:avLst/>
@@ -16349,6 +14074,15 @@
                   <a:latin typeface="Calibri"/>
                 </a:rPr>
                 <a:t>Anpassen</a:t>
+              </a:r>
+              <a:r>
+                <a:rPr lang="de-DE" sz="2000" b="1" i="0" dirty="0">
+                  <a:solidFill>
+                    <a:srgbClr val="FFFFFF"/>
+                  </a:solidFill>
+                  <a:latin typeface="Calibri"/>
+                </a:rPr>
+                <a:t> (lassen)</a:t>
               </a:r>
               <a:endParaRPr sz="2000" b="1" i="0" dirty="0">
                 <a:solidFill>
@@ -16381,19 +14115,28 @@
             </a:bodyPr>
             <a:lstStyle/>
             <a:p>
-              <a:pPr algn="l">
+              <a:pPr>
                 <a:lnSpc>
                   <a:spcPct val="115000"/>
                 </a:lnSpc>
               </a:pPr>
               <a:r>
+                <a:rPr lang="de-DE" sz="1400" b="0" i="0" dirty="0">
+                  <a:solidFill>
+                    <a:srgbClr val="E9ECEF"/>
+                  </a:solidFill>
+                  <a:latin typeface="Calibri"/>
+                </a:rPr>
+                <a:t>Screenreader</a:t>
+              </a:r>
+              <a:r>
                 <a:rPr sz="1400" b="0" i="0" dirty="0">
                   <a:solidFill>
                     <a:srgbClr val="E9ECEF"/>
                   </a:solidFill>
                   <a:latin typeface="Calibri"/>
                 </a:rPr>
-                <a:t>NVDA und JAWS </a:t>
+                <a:t> </a:t>
               </a:r>
               <a:r>
                 <a:rPr lang="de-DE" sz="1400" b="0" i="0" dirty="0">
@@ -16420,25 +14163,31 @@
                   </a:solidFill>
                   <a:latin typeface="Calibri"/>
                 </a:rPr>
-                <a:t>-Schnittstellen oder mit DL® </a:t>
-              </a:r>
-              <a:r>
-                <a:rPr lang="de-DE" sz="1400" b="0" i="0" dirty="0" err="1">
+                <a:t>-Schnittstellen angepasst werden </a:t>
+              </a:r>
+              <a:r>
+                <a:rPr lang="de-DE" sz="1400" dirty="0">
                   <a:solidFill>
                     <a:srgbClr val="E9ECEF"/>
                   </a:solidFill>
-                  <a:latin typeface="Calibri"/>
+                </a:rPr>
+                <a:t>oder Anwendungen mit DL® </a:t>
+              </a:r>
+              <a:r>
+                <a:rPr lang="de-DE" sz="1400" dirty="0" err="1">
+                  <a:solidFill>
+                    <a:srgbClr val="E9ECEF"/>
+                  </a:solidFill>
                 </a:rPr>
                 <a:t>XTab</a:t>
               </a:r>
               <a:r>
-                <a:rPr lang="de-DE" sz="1400" b="0" i="0" dirty="0">
+                <a:rPr lang="de-DE" sz="1400" dirty="0">
                   <a:solidFill>
                     <a:srgbClr val="E9ECEF"/>
                   </a:solidFill>
-                  <a:latin typeface="Calibri"/>
-                </a:rPr>
-                <a:t> angepasst werden</a:t>
+                </a:rPr>
+                <a:t> </a:t>
               </a:r>
               <a:endParaRPr sz="1400" b="0" i="0" dirty="0">
                 <a:solidFill>
@@ -16567,6 +14316,15 @@
                 </a:rPr>
                 <a:t>Entwickeln</a:t>
               </a:r>
+              <a:r>
+                <a:rPr lang="de-DE" sz="2000" b="1" i="0" dirty="0">
+                  <a:solidFill>
+                    <a:srgbClr val="FFFFFF"/>
+                  </a:solidFill>
+                  <a:latin typeface="Calibri"/>
+                </a:rPr>
+                <a:t> (lassen – Anforderung/Ausschreibungskriterien)</a:t>
+              </a:r>
               <a:endParaRPr sz="2000" b="1" i="0" dirty="0">
                 <a:solidFill>
                   <a:srgbClr val="FFFFFF"/>
@@ -16990,15 +14748,12 @@
                 </a:rPr>
                 <a:t>Kür</a:t>
               </a:r>
-              <a:r>
-                <a:rPr sz="1400" b="0" i="0" dirty="0">
-                  <a:solidFill>
-                    <a:srgbClr val="E9ECEF"/>
-                  </a:solidFill>
-                  <a:latin typeface="Calibri"/>
-                </a:rPr>
-                <a:t>.</a:t>
-              </a:r>
+              <a:endParaRPr sz="1400" b="0" i="0" dirty="0">
+                <a:solidFill>
+                  <a:srgbClr val="E9ECEF"/>
+                </a:solidFill>
+                <a:latin typeface="Calibri"/>
+              </a:endParaRPr>
             </a:p>
           </p:txBody>
         </p:sp>
@@ -17466,7 +15221,7 @@
 </p:sld>
 </file>
 
-<file path=ppt/slides/slide18.xml><?xml version="1.0" encoding="utf-8"?>
+<file path=ppt/slides/slide17.xml><?xml version="1.0" encoding="utf-8"?>
 <p:sld xmlns:a="http://schemas.openxmlformats.org/drawingml/2006/main" xmlns:r="http://schemas.openxmlformats.org/officeDocument/2006/relationships" xmlns:p="http://schemas.openxmlformats.org/presentationml/2006/main">
   <p:cSld>
     <p:spTree>
@@ -17708,9 +15463,9 @@
         <p:grpSpPr>
           <a:xfrm>
             <a:off x="868680" y="2011680"/>
-            <a:ext cx="10744200" cy="1883486"/>
+            <a:ext cx="10744200" cy="2379006"/>
             <a:chOff x="868680" y="2011680"/>
-            <a:chExt cx="10744200" cy="1883486"/>
+            <a:chExt cx="10744200" cy="2379006"/>
           </a:xfrm>
         </p:grpSpPr>
         <p:sp>
@@ -17843,7 +15598,7 @@
           <p:spPr>
             <a:xfrm>
               <a:off x="1554480" y="2423160"/>
-              <a:ext cx="10058400" cy="1472006"/>
+              <a:ext cx="10058400" cy="1967526"/>
             </a:xfrm>
             <a:prstGeom prst="rect">
               <a:avLst/>
@@ -17886,7 +15641,7 @@
                   </a:solidFill>
                   <a:latin typeface="Calibri"/>
                 </a:rPr>
-                <a:t>zu den W3C Design Patterns and </a:t>
+                <a:t>W3C Design Patterns and </a:t>
               </a:r>
               <a:r>
                 <a:rPr lang="de-DE" sz="1400" b="0" i="0" dirty="0" err="1">
@@ -18006,7 +15761,7 @@
                   </a:solidFill>
                   <a:latin typeface="Calibri"/>
                 </a:rPr>
-                <a:t>Standards</a:t>
+                <a:t>Standards wie EN 301 549</a:t>
               </a:r>
             </a:p>
             <a:p>
@@ -18026,6 +15781,32 @@
                 </a:rPr>
                 <a:t>Tests</a:t>
               </a:r>
+              <a:r>
+                <a:rPr lang="de-DE" sz="1400" dirty="0">
+                  <a:solidFill>
+                    <a:srgbClr val="E9ECEF"/>
+                  </a:solidFill>
+                </a:rPr>
+                <a:t> wie BIT inklusiv BITV-Softwaretest</a:t>
+              </a:r>
+            </a:p>
+            <a:p>
+              <a:pPr marL="285750" indent="-285750">
+                <a:lnSpc>
+                  <a:spcPct val="115000"/>
+                </a:lnSpc>
+                <a:buFontTx/>
+                <a:buChar char="-"/>
+              </a:pPr>
+              <a:r>
+                <a:rPr lang="de-DE" sz="1400" dirty="0">
+                  <a:solidFill>
+                    <a:srgbClr val="E9ECEF"/>
+                  </a:solidFill>
+                  <a:latin typeface="Calibri"/>
+                </a:rPr>
+                <a:t>…</a:t>
+              </a:r>
             </a:p>
             <a:p>
               <a:pPr>
@@ -18033,6 +15814,28 @@
                   <a:spcPct val="115000"/>
                 </a:lnSpc>
               </a:pPr>
+              <a:endParaRPr lang="de-DE" sz="1400" b="0" i="0" dirty="0">
+                <a:solidFill>
+                  <a:srgbClr val="E9ECEF"/>
+                </a:solidFill>
+                <a:latin typeface="Calibri"/>
+              </a:endParaRPr>
+            </a:p>
+            <a:p>
+              <a:pPr>
+                <a:lnSpc>
+                  <a:spcPct val="115000"/>
+                </a:lnSpc>
+              </a:pPr>
+              <a:r>
+                <a:rPr lang="de-DE" sz="1400" dirty="0">
+                  <a:solidFill>
+                    <a:srgbClr val="E9ECEF"/>
+                  </a:solidFill>
+                  <a:latin typeface="Calibri"/>
+                </a:rPr>
+                <a:t>unter</a:t>
+              </a:r>
               <a:endParaRPr lang="de-DE" sz="1400" b="0" i="0" dirty="0">
                 <a:solidFill>
                   <a:srgbClr val="E9ECEF"/>
@@ -19002,7 +16805,7 @@
           <p:spPr>
             <a:xfrm>
               <a:off x="731520" y="4389120"/>
-              <a:ext cx="3108960" cy="728726"/>
+              <a:ext cx="3108960" cy="480966"/>
             </a:xfrm>
             <a:prstGeom prst="rect">
               <a:avLst/>
@@ -19021,13 +16824,22 @@
                 </a:lnSpc>
               </a:pPr>
               <a:r>
+                <a:rPr sz="1400" b="0" i="0" dirty="0">
+                  <a:solidFill>
+                    <a:srgbClr val="1F2A36"/>
+                  </a:solidFill>
+                  <a:latin typeface="Calibri"/>
+                </a:rPr>
+                <a:t>Anwendungen </a:t>
+              </a:r>
+              <a:r>
                 <a:rPr sz="1400" b="0" i="0" dirty="0" err="1">
                   <a:solidFill>
                     <a:srgbClr val="1F2A36"/>
                   </a:solidFill>
                   <a:latin typeface="Calibri"/>
                 </a:rPr>
-                <a:t>Anwendungen</a:t>
+                <a:t>systematisch</a:t>
               </a:r>
               <a:r>
                 <a:rPr sz="1400" b="0" i="0" dirty="0">
@@ -19036,6 +16848,24 @@
                   </a:solidFill>
                   <a:latin typeface="Calibri"/>
                 </a:rPr>
+                <a:t> auf </a:t>
+              </a:r>
+              <a:r>
+                <a:rPr sz="1400" b="0" i="0" dirty="0" err="1">
+                  <a:solidFill>
+                    <a:srgbClr val="1F2A36"/>
+                  </a:solidFill>
+                  <a:latin typeface="Calibri"/>
+                </a:rPr>
+                <a:t>Barrierefreiheit</a:t>
+              </a:r>
+              <a:r>
+                <a:rPr sz="1400" b="0" i="0" dirty="0">
+                  <a:solidFill>
+                    <a:srgbClr val="1F2A36"/>
+                  </a:solidFill>
+                  <a:latin typeface="Calibri"/>
+                </a:rPr>
                 <a:t> </a:t>
               </a:r>
               <a:r>
@@ -19045,115 +16875,14 @@
                   </a:solidFill>
                   <a:latin typeface="Calibri"/>
                 </a:rPr>
-                <a:t>systematisch</a:t>
-              </a:r>
-              <a:r>
-                <a:rPr sz="1400" b="0" i="0" dirty="0">
-                  <a:solidFill>
-                    <a:srgbClr val="1F2A36"/>
-                  </a:solidFill>
-                  <a:latin typeface="Calibri"/>
-                </a:rPr>
-                <a:t> auf </a:t>
-              </a:r>
-              <a:r>
-                <a:rPr sz="1400" b="0" i="0" dirty="0" err="1">
-                  <a:solidFill>
-                    <a:srgbClr val="1F2A36"/>
-                  </a:solidFill>
-                  <a:latin typeface="Calibri"/>
-                </a:rPr>
-                <a:t>Barrierefreiheit</a:t>
-              </a:r>
-              <a:r>
-                <a:rPr sz="1400" b="0" i="0" dirty="0">
-                  <a:solidFill>
-                    <a:srgbClr val="1F2A36"/>
-                  </a:solidFill>
-                  <a:latin typeface="Calibri"/>
-                </a:rPr>
-                <a:t> </a:t>
-              </a:r>
-              <a:r>
-                <a:rPr sz="1400" b="0" i="0" dirty="0" err="1">
-                  <a:solidFill>
-                    <a:srgbClr val="1F2A36"/>
-                  </a:solidFill>
-                  <a:latin typeface="Calibri"/>
-                </a:rPr>
                 <a:t>testen</a:t>
               </a:r>
-              <a:r>
-                <a:rPr sz="1400" b="0" i="0" dirty="0">
-                  <a:solidFill>
-                    <a:srgbClr val="1F2A36"/>
-                  </a:solidFill>
-                  <a:latin typeface="Calibri"/>
-                </a:rPr>
-                <a:t> – </a:t>
-              </a:r>
-              <a:br>
-                <a:rPr lang="de-DE" sz="1400" b="0" i="0" dirty="0">
-                  <a:solidFill>
-                    <a:srgbClr val="1F2A36"/>
-                  </a:solidFill>
-                  <a:latin typeface="Calibri"/>
-                </a:rPr>
-              </a:br>
-              <a:r>
-                <a:rPr sz="1400" b="0" i="0" dirty="0" err="1">
-                  <a:solidFill>
-                    <a:srgbClr val="1F2A36"/>
-                  </a:solidFill>
-                  <a:latin typeface="Calibri"/>
-                </a:rPr>
-                <a:t>mit</a:t>
-              </a:r>
-              <a:r>
-                <a:rPr sz="1400" b="0" i="0" dirty="0">
-                  <a:solidFill>
-                    <a:srgbClr val="1F2A36"/>
-                  </a:solidFill>
-                  <a:latin typeface="Calibri"/>
-                </a:rPr>
-                <a:t> </a:t>
-              </a:r>
-              <a:r>
-                <a:rPr sz="1400" b="0" i="0" dirty="0" err="1">
-                  <a:solidFill>
-                    <a:srgbClr val="1F2A36"/>
-                  </a:solidFill>
-                  <a:latin typeface="Calibri"/>
-                </a:rPr>
-                <a:t>Screenreader</a:t>
-              </a:r>
-              <a:r>
-                <a:rPr sz="1400" b="0" i="0" dirty="0">
-                  <a:solidFill>
-                    <a:srgbClr val="1F2A36"/>
-                  </a:solidFill>
-                  <a:latin typeface="Calibri"/>
-                </a:rPr>
-                <a:t>, </a:t>
-              </a:r>
-              <a:r>
-                <a:rPr sz="1400" b="0" i="0" dirty="0" err="1">
-                  <a:solidFill>
-                    <a:srgbClr val="1F2A36"/>
-                  </a:solidFill>
-                  <a:latin typeface="Calibri"/>
-                </a:rPr>
-                <a:t>Tastatur</a:t>
-              </a:r>
-              <a:r>
-                <a:rPr sz="1400" b="0" i="0" dirty="0">
-                  <a:solidFill>
-                    <a:srgbClr val="1F2A36"/>
-                  </a:solidFill>
-                  <a:latin typeface="Calibri"/>
-                </a:rPr>
-                <a:t> und Tools.</a:t>
-              </a:r>
+              <a:endParaRPr sz="1400" b="0" i="0" dirty="0">
+                <a:solidFill>
+                  <a:srgbClr val="1F2A36"/>
+                </a:solidFill>
+                <a:latin typeface="Calibri"/>
+              </a:endParaRPr>
             </a:p>
           </p:txBody>
         </p:sp>
@@ -19414,7 +17143,7 @@
           <p:spPr>
             <a:xfrm>
               <a:off x="4636008" y="4389120"/>
-              <a:ext cx="3108960" cy="728726"/>
+              <a:ext cx="3108960" cy="976486"/>
             </a:xfrm>
             <a:prstGeom prst="rect">
               <a:avLst/>
@@ -19497,7 +17226,7 @@
                   </a:solidFill>
                   <a:latin typeface="Calibri"/>
                 </a:rPr>
-                <a:t> mit</a:t>
+                <a:t> für</a:t>
               </a:r>
               <a:r>
                 <a:rPr sz="1400" b="0" i="0" dirty="0">
@@ -19533,7 +17262,7 @@
                   </a:solidFill>
                   <a:latin typeface="Calibri"/>
                 </a:rPr>
-                <a:t> oder mit DL </a:t>
+                <a:t>, oder Screenreader-unabhängig mit DL </a:t>
               </a:r>
               <a:r>
                 <a:rPr lang="de-DE" sz="1400" b="0" i="0" dirty="0" err="1">
@@ -19542,7 +17271,34 @@
                   </a:solidFill>
                   <a:latin typeface="Calibri"/>
                 </a:rPr>
-                <a:t>XTab</a:t>
+                <a:t>X</a:t>
+              </a:r>
+              <a:r>
+                <a:rPr lang="de-DE" sz="1400" dirty="0" err="1">
+                  <a:solidFill>
+                    <a:srgbClr val="1F2A36"/>
+                  </a:solidFill>
+                  <a:latin typeface="Calibri"/>
+                </a:rPr>
+                <a:t>T</a:t>
+              </a:r>
+              <a:r>
+                <a:rPr lang="de-DE" sz="1400" b="0" i="0" dirty="0" err="1">
+                  <a:solidFill>
+                    <a:srgbClr val="1F2A36"/>
+                  </a:solidFill>
+                  <a:latin typeface="Calibri"/>
+                </a:rPr>
+                <a:t>ab</a:t>
+              </a:r>
+              <a:r>
+                <a:rPr lang="de-DE" sz="1400" b="0" i="0" dirty="0">
+                  <a:solidFill>
+                    <a:srgbClr val="1F2A36"/>
+                  </a:solidFill>
+                  <a:latin typeface="Calibri"/>
+                </a:rPr>
+                <a:t> </a:t>
               </a:r>
               <a:endParaRPr sz="1400" b="0" i="0" dirty="0">
                 <a:solidFill>
@@ -19924,12 +17680,15 @@
                 </a:rPr>
                 <a:t> für Web, WPF, </a:t>
               </a:r>
-              <a:endParaRPr lang="de-DE" sz="1400" b="0" i="0" dirty="0">
-                <a:solidFill>
-                  <a:srgbClr val="1F2A36"/>
-                </a:solidFill>
-                <a:latin typeface="Calibri"/>
-              </a:endParaRPr>
+              <a:r>
+                <a:rPr lang="de-DE" sz="1400" b="0" i="0" dirty="0">
+                  <a:solidFill>
+                    <a:srgbClr val="1F2A36"/>
+                  </a:solidFill>
+                  <a:latin typeface="Calibri"/>
+                </a:rPr>
+                <a:t>Python,</a:t>
+              </a:r>
             </a:p>
             <a:p>
               <a:pPr algn="l">
@@ -20952,9 +18711,9 @@
         <p:grpSpPr>
           <a:xfrm>
             <a:off x="457200" y="1691640"/>
-            <a:ext cx="5486400" cy="2804835"/>
+            <a:ext cx="5486400" cy="4356029"/>
             <a:chOff x="457200" y="1691640"/>
-            <a:chExt cx="5486400" cy="2804835"/>
+            <a:chExt cx="5486400" cy="4356029"/>
           </a:xfrm>
         </p:grpSpPr>
         <p:sp>
@@ -21032,7 +18791,7 @@
           <p:spPr>
             <a:xfrm>
               <a:off x="457200" y="2240280"/>
-              <a:ext cx="5486400" cy="2256195"/>
+              <a:ext cx="5486400" cy="3807389"/>
             </a:xfrm>
             <a:prstGeom prst="rect">
               <a:avLst/>
@@ -21072,6 +18831,15 @@
                 <a:t>Blinde</a:t>
               </a:r>
               <a:r>
+                <a:rPr lang="de-DE" sz="1400" dirty="0">
+                  <a:solidFill>
+                    <a:srgbClr val="1F2A36"/>
+                  </a:solidFill>
+                  <a:latin typeface="Calibri"/>
+                </a:rPr>
+                <a:t> und stark seheingeschränkte</a:t>
+              </a:r>
+              <a:r>
                 <a:rPr sz="1400" dirty="0">
                   <a:solidFill>
                     <a:srgbClr val="1F2A36"/>
@@ -21115,60 +18883,6 @@
                   <a:latin typeface="Calibri"/>
                 </a:rPr>
                 <a:t> </a:t>
-              </a:r>
-              <a:r>
-                <a:rPr sz="1400" dirty="0" err="1">
-                  <a:solidFill>
-                    <a:srgbClr val="1F2A36"/>
-                  </a:solidFill>
-                  <a:latin typeface="Calibri"/>
-                </a:rPr>
-                <a:t>sonst</a:t>
-              </a:r>
-              <a:r>
-                <a:rPr sz="1400" dirty="0">
-                  <a:solidFill>
-                    <a:srgbClr val="1F2A36"/>
-                  </a:solidFill>
-                  <a:latin typeface="Calibri"/>
-                </a:rPr>
-                <a:t> </a:t>
-              </a:r>
-              <a:r>
-                <a:rPr sz="1400" dirty="0" err="1">
-                  <a:solidFill>
-                    <a:srgbClr val="1F2A36"/>
-                  </a:solidFill>
-                  <a:latin typeface="Calibri"/>
-                </a:rPr>
-                <a:t>täglich</a:t>
-              </a:r>
-              <a:r>
-                <a:rPr sz="1400" dirty="0">
-                  <a:solidFill>
-                    <a:srgbClr val="1F2A36"/>
-                  </a:solidFill>
-                  <a:latin typeface="Calibri"/>
-                </a:rPr>
-                <a:t> auf </a:t>
-              </a:r>
-              <a:r>
-                <a:rPr sz="1400" dirty="0" err="1">
-                  <a:solidFill>
-                    <a:srgbClr val="1F2A36"/>
-                  </a:solidFill>
-                  <a:latin typeface="Calibri"/>
-                </a:rPr>
-                <a:t>Hürden</a:t>
-              </a:r>
-              <a:r>
-                <a:rPr sz="1400" dirty="0">
-                  <a:solidFill>
-                    <a:srgbClr val="1F2A36"/>
-                  </a:solidFill>
-                  <a:latin typeface="Calibri"/>
-                </a:rPr>
-                <a:t> – </a:t>
               </a:r>
               <a:br>
                 <a:rPr lang="de-DE" sz="1400" dirty="0">
@@ -21185,7 +18899,7 @@
                   </a:solidFill>
                   <a:latin typeface="Calibri"/>
                 </a:rPr>
-                <a:t>	</a:t>
+                <a:t>    </a:t>
               </a:r>
               <a:r>
                 <a:rPr sz="1400" dirty="0" err="1">
@@ -21194,7 +18908,7 @@
                   </a:solidFill>
                   <a:latin typeface="Calibri"/>
                 </a:rPr>
-                <a:t>Praktika</a:t>
+                <a:t>sonst</a:t>
               </a:r>
               <a:r>
                 <a:rPr sz="1400" dirty="0">
@@ -21212,8 +18926,330 @@
                   </a:solidFill>
                   <a:latin typeface="Calibri"/>
                 </a:rPr>
+                <a:t>täglich</a:t>
+              </a:r>
+              <a:r>
+                <a:rPr sz="1400" dirty="0">
+                  <a:solidFill>
+                    <a:srgbClr val="1F2A36"/>
+                  </a:solidFill>
+                  <a:latin typeface="Calibri"/>
+                </a:rPr>
+                <a:t> auf </a:t>
+              </a:r>
+              <a:r>
+                <a:rPr sz="1400" dirty="0" err="1">
+                  <a:solidFill>
+                    <a:srgbClr val="1F2A36"/>
+                  </a:solidFill>
+                  <a:latin typeface="Calibri"/>
+                </a:rPr>
+                <a:t>Hürden</a:t>
+              </a:r>
+              <a:r>
+                <a:rPr sz="1400" dirty="0">
+                  <a:solidFill>
+                    <a:srgbClr val="1F2A36"/>
+                  </a:solidFill>
+                  <a:latin typeface="Calibri"/>
+                </a:rPr>
+                <a:t> – </a:t>
+              </a:r>
+              <a:r>
+                <a:rPr lang="de-DE" sz="1400" dirty="0">
+                  <a:solidFill>
+                    <a:srgbClr val="1F2A36"/>
+                  </a:solidFill>
+                  <a:latin typeface="Calibri"/>
+                </a:rPr>
+                <a:t>P</a:t>
+              </a:r>
+              <a:r>
+                <a:rPr sz="1400" dirty="0" err="1">
+                  <a:solidFill>
+                    <a:srgbClr val="1F2A36"/>
+                  </a:solidFill>
+                  <a:latin typeface="Calibri"/>
+                </a:rPr>
+                <a:t>raktika</a:t>
+              </a:r>
+              <a:r>
+                <a:rPr sz="1400" dirty="0">
+                  <a:solidFill>
+                    <a:srgbClr val="1F2A36"/>
+                  </a:solidFill>
+                  <a:latin typeface="Calibri"/>
+                </a:rPr>
+                <a:t> </a:t>
+              </a:r>
+              <a:r>
+                <a:rPr lang="de-DE" sz="1400" dirty="0">
+                  <a:solidFill>
+                    <a:srgbClr val="1F2A36"/>
+                  </a:solidFill>
+                  <a:latin typeface="Calibri"/>
+                </a:rPr>
+                <a:t>und Arbeitsplätze </a:t>
+              </a:r>
+              <a:r>
+                <a:rPr sz="1400" dirty="0" err="1">
+                  <a:solidFill>
+                    <a:srgbClr val="1F2A36"/>
+                  </a:solidFill>
+                  <a:latin typeface="Calibri"/>
+                </a:rPr>
                 <a:t>scheitern</a:t>
               </a:r>
+              <a:br>
+                <a:rPr lang="de-DE" sz="1400" dirty="0">
+                  <a:solidFill>
+                    <a:srgbClr val="1F2A36"/>
+                  </a:solidFill>
+                  <a:latin typeface="Calibri"/>
+                </a:rPr>
+              </a:br>
+              <a:endParaRPr sz="1400" dirty="0">
+                <a:solidFill>
+                  <a:srgbClr val="1F2A36"/>
+                </a:solidFill>
+                <a:latin typeface="Calibri"/>
+              </a:endParaRPr>
+            </a:p>
+            <a:p>
+              <a:pPr>
+                <a:lnSpc>
+                  <a:spcPct val="120000"/>
+                </a:lnSpc>
+                <a:spcAft>
+                  <a:spcPts val="400"/>
+                </a:spcAft>
+              </a:pPr>
+              <a:r>
+                <a:rPr sz="1400" b="1" dirty="0">
+                  <a:solidFill>
+                    <a:srgbClr val="C8102E"/>
+                  </a:solidFill>
+                  <a:latin typeface="Calibri"/>
+                </a:rPr>
+                <a:t>• </a:t>
+              </a:r>
+              <a:r>
+                <a:rPr lang="de-DE" sz="1400" b="1" dirty="0">
+                  <a:solidFill>
+                    <a:srgbClr val="C8102E"/>
+                  </a:solidFill>
+                  <a:latin typeface="Calibri"/>
+                </a:rPr>
+                <a:t> </a:t>
+              </a:r>
+              <a:r>
+                <a:rPr sz="1400" dirty="0" err="1">
+                  <a:solidFill>
+                    <a:srgbClr val="1F2A36"/>
+                  </a:solidFill>
+                  <a:latin typeface="Calibri"/>
+                </a:rPr>
+                <a:t>Funde</a:t>
+              </a:r>
+              <a:r>
+                <a:rPr sz="1400" dirty="0">
+                  <a:solidFill>
+                    <a:srgbClr val="1F2A36"/>
+                  </a:solidFill>
+                  <a:latin typeface="Calibri"/>
+                </a:rPr>
+                <a:t> </a:t>
+              </a:r>
+              <a:r>
+                <a:rPr lang="de-DE" sz="1400" dirty="0">
+                  <a:solidFill>
+                    <a:srgbClr val="1F2A36"/>
+                  </a:solidFill>
+                  <a:latin typeface="Calibri"/>
+                </a:rPr>
+                <a:t>während der Entwicklung </a:t>
+              </a:r>
+              <a:r>
+                <a:rPr sz="1400" dirty="0" err="1">
+                  <a:solidFill>
+                    <a:srgbClr val="1F2A36"/>
+                  </a:solidFill>
+                  <a:latin typeface="Calibri"/>
+                </a:rPr>
+                <a:t>sind</a:t>
+              </a:r>
+              <a:r>
+                <a:rPr sz="1400" dirty="0">
+                  <a:solidFill>
+                    <a:srgbClr val="1F2A36"/>
+                  </a:solidFill>
+                  <a:latin typeface="Calibri"/>
+                </a:rPr>
+                <a:t> </a:t>
+              </a:r>
+              <a:r>
+                <a:rPr lang="de-DE" sz="1400" dirty="0">
+                  <a:solidFill>
+                    <a:srgbClr val="1F2A36"/>
+                  </a:solidFill>
+                  <a:latin typeface="Calibri"/>
+                </a:rPr>
+                <a:t>deutlich </a:t>
+              </a:r>
+              <a:r>
+                <a:rPr sz="1400" dirty="0" err="1">
+                  <a:solidFill>
+                    <a:srgbClr val="1F2A36"/>
+                  </a:solidFill>
+                  <a:latin typeface="Calibri"/>
+                </a:rPr>
+                <a:t>billiger</a:t>
+              </a:r>
+              <a:r>
+                <a:rPr sz="1400" dirty="0">
+                  <a:solidFill>
+                    <a:srgbClr val="1F2A36"/>
+                  </a:solidFill>
+                  <a:latin typeface="Calibri"/>
+                </a:rPr>
+                <a:t> </a:t>
+              </a:r>
+              <a:r>
+                <a:rPr sz="1400" dirty="0" err="1">
+                  <a:solidFill>
+                    <a:srgbClr val="1F2A36"/>
+                  </a:solidFill>
+                  <a:latin typeface="Calibri"/>
+                </a:rPr>
+                <a:t>als</a:t>
+              </a:r>
+              <a:br>
+                <a:rPr lang="de-DE" sz="1400" dirty="0">
+                  <a:solidFill>
+                    <a:srgbClr val="1F2A36"/>
+                  </a:solidFill>
+                  <a:latin typeface="Calibri"/>
+                </a:rPr>
+              </a:br>
+              <a:r>
+                <a:rPr lang="de-DE" sz="1400" dirty="0">
+                  <a:solidFill>
+                    <a:srgbClr val="1F2A36"/>
+                  </a:solidFill>
+                  <a:latin typeface="Calibri"/>
+                </a:rPr>
+                <a:t>    </a:t>
+              </a:r>
+              <a:r>
+                <a:rPr sz="1400" dirty="0" err="1">
+                  <a:solidFill>
+                    <a:srgbClr val="1F2A36"/>
+                  </a:solidFill>
+                  <a:latin typeface="Calibri"/>
+                </a:rPr>
+                <a:t>Nachbesserungen</a:t>
+              </a:r>
+              <a:r>
+                <a:rPr sz="1400" dirty="0">
+                  <a:solidFill>
+                    <a:srgbClr val="1F2A36"/>
+                  </a:solidFill>
+                  <a:latin typeface="Calibri"/>
+                </a:rPr>
+                <a:t> </a:t>
+              </a:r>
+              <a:r>
+                <a:rPr sz="1400" dirty="0" err="1">
+                  <a:solidFill>
+                    <a:srgbClr val="1F2A36"/>
+                  </a:solidFill>
+                  <a:latin typeface="Calibri"/>
+                </a:rPr>
+                <a:t>im</a:t>
+              </a:r>
+              <a:r>
+                <a:rPr sz="1400" dirty="0">
+                  <a:solidFill>
+                    <a:srgbClr val="1F2A36"/>
+                  </a:solidFill>
+                  <a:latin typeface="Calibri"/>
+                </a:rPr>
+                <a:t> </a:t>
+              </a:r>
+              <a:r>
+                <a:rPr sz="1400" dirty="0" err="1">
+                  <a:solidFill>
+                    <a:srgbClr val="1F2A36"/>
+                  </a:solidFill>
+                  <a:latin typeface="Calibri"/>
+                </a:rPr>
+                <a:t>Betrieb</a:t>
+              </a:r>
+              <a:r>
+                <a:rPr lang="de-DE" sz="1400" dirty="0">
+                  <a:solidFill>
+                    <a:srgbClr val="1F2A36"/>
+                  </a:solidFill>
+                  <a:latin typeface="Calibri"/>
+                </a:rPr>
+                <a:t> - Boehm / IBM </a:t>
+              </a:r>
+              <a:r>
+                <a:rPr lang="de-DE" sz="1400" dirty="0" err="1">
+                  <a:solidFill>
+                    <a:srgbClr val="1F2A36"/>
+                  </a:solidFill>
+                  <a:latin typeface="Calibri"/>
+                </a:rPr>
+                <a:t>Cost</a:t>
+              </a:r>
+              <a:r>
+                <a:rPr lang="de-DE" sz="1400" dirty="0">
+                  <a:solidFill>
+                    <a:srgbClr val="1F2A36"/>
+                  </a:solidFill>
+                </a:rPr>
+                <a:t>-of-Change und</a:t>
+              </a:r>
+              <a:br>
+                <a:rPr lang="de-DE" sz="1400" dirty="0">
+                  <a:solidFill>
+                    <a:srgbClr val="1F2A36"/>
+                  </a:solidFill>
+                </a:rPr>
+              </a:br>
+              <a:r>
+                <a:rPr lang="de-DE" sz="1400" dirty="0">
+                  <a:solidFill>
+                    <a:srgbClr val="1F2A36"/>
+                  </a:solidFill>
+                </a:rPr>
+                <a:t>    </a:t>
+              </a:r>
+              <a:r>
+                <a:rPr lang="de-DE" sz="1400" dirty="0">
+                  <a:solidFill>
+                    <a:srgbClr val="1F2A36"/>
+                  </a:solidFill>
+                  <a:hlinkClick r:id="rId3"/>
+                </a:rPr>
+                <a:t>https://htdhealth.com/insights/the-true-cost-of-accessibility-why-adding-accessibility-later-can-cost-10x-more/</a:t>
+              </a:r>
+              <a:r>
+                <a:rPr lang="de-DE" sz="1400" dirty="0">
+                  <a:solidFill>
+                    <a:srgbClr val="1F2A36"/>
+                  </a:solidFill>
+                </a:rPr>
+                <a:t> </a:t>
+              </a:r>
+              <a:br>
+                <a:rPr lang="de-DE" sz="1400" dirty="0">
+                  <a:solidFill>
+                    <a:srgbClr val="1F2A36"/>
+                  </a:solidFill>
+                </a:rPr>
+              </a:br>
               <a:endParaRPr sz="1400" dirty="0">
                 <a:solidFill>
                   <a:srgbClr val="1F2A36"/>
@@ -21237,175 +19273,6 @@
                   </a:solidFill>
                   <a:latin typeface="Calibri"/>
                 </a:rPr>
-                <a:t>• </a:t>
-              </a:r>
-              <a:r>
-                <a:rPr lang="de-DE" sz="1400" b="1" dirty="0">
-                  <a:solidFill>
-                    <a:srgbClr val="C8102E"/>
-                  </a:solidFill>
-                  <a:latin typeface="Calibri"/>
-                </a:rPr>
-                <a:t> </a:t>
-              </a:r>
-              <a:r>
-                <a:rPr sz="1400" dirty="0" err="1">
-                  <a:solidFill>
-                    <a:srgbClr val="1F2A36"/>
-                  </a:solidFill>
-                  <a:latin typeface="Calibri"/>
-                </a:rPr>
-                <a:t>Funde</a:t>
-              </a:r>
-              <a:r>
-                <a:rPr sz="1400" dirty="0">
-                  <a:solidFill>
-                    <a:srgbClr val="1F2A36"/>
-                  </a:solidFill>
-                  <a:latin typeface="Calibri"/>
-                </a:rPr>
-                <a:t> </a:t>
-              </a:r>
-              <a:r>
-                <a:rPr lang="de-DE" sz="1400" dirty="0">
-                  <a:solidFill>
-                    <a:srgbClr val="1F2A36"/>
-                  </a:solidFill>
-                  <a:latin typeface="Calibri"/>
-                </a:rPr>
-                <a:t>während der Entwicklung </a:t>
-              </a:r>
-              <a:r>
-                <a:rPr sz="1400" dirty="0" err="1">
-                  <a:solidFill>
-                    <a:srgbClr val="1F2A36"/>
-                  </a:solidFill>
-                  <a:latin typeface="Calibri"/>
-                </a:rPr>
-                <a:t>sind</a:t>
-              </a:r>
-              <a:r>
-                <a:rPr sz="1400" dirty="0">
-                  <a:solidFill>
-                    <a:srgbClr val="1F2A36"/>
-                  </a:solidFill>
-                  <a:latin typeface="Calibri"/>
-                </a:rPr>
-                <a:t> 10–100× </a:t>
-              </a:r>
-              <a:r>
-                <a:rPr sz="1400" dirty="0" err="1">
-                  <a:solidFill>
-                    <a:srgbClr val="1F2A36"/>
-                  </a:solidFill>
-                  <a:latin typeface="Calibri"/>
-                </a:rPr>
-                <a:t>billiger</a:t>
-              </a:r>
-              <a:r>
-                <a:rPr sz="1400" dirty="0">
-                  <a:solidFill>
-                    <a:srgbClr val="1F2A36"/>
-                  </a:solidFill>
-                  <a:latin typeface="Calibri"/>
-                </a:rPr>
-                <a:t> </a:t>
-              </a:r>
-              <a:r>
-                <a:rPr sz="1400" dirty="0" err="1">
-                  <a:solidFill>
-                    <a:srgbClr val="1F2A36"/>
-                  </a:solidFill>
-                  <a:latin typeface="Calibri"/>
-                </a:rPr>
-                <a:t>als</a:t>
-              </a:r>
-              <a:r>
-                <a:rPr sz="1400" dirty="0">
-                  <a:solidFill>
-                    <a:srgbClr val="1F2A36"/>
-                  </a:solidFill>
-                  <a:latin typeface="Calibri"/>
-                </a:rPr>
-                <a:t> </a:t>
-              </a:r>
-              <a:r>
-                <a:rPr lang="de-DE" sz="1400" dirty="0">
-                  <a:solidFill>
-                    <a:srgbClr val="1F2A36"/>
-                  </a:solidFill>
-                  <a:latin typeface="Calibri"/>
-                </a:rPr>
-                <a:t>	</a:t>
-              </a:r>
-              <a:r>
-                <a:rPr sz="1400" dirty="0" err="1">
-                  <a:solidFill>
-                    <a:srgbClr val="1F2A36"/>
-                  </a:solidFill>
-                  <a:latin typeface="Calibri"/>
-                </a:rPr>
-                <a:t>Nachbesserungen</a:t>
-              </a:r>
-              <a:r>
-                <a:rPr sz="1400" dirty="0">
-                  <a:solidFill>
-                    <a:srgbClr val="1F2A36"/>
-                  </a:solidFill>
-                  <a:latin typeface="Calibri"/>
-                </a:rPr>
-                <a:t> </a:t>
-              </a:r>
-              <a:r>
-                <a:rPr sz="1400" dirty="0" err="1">
-                  <a:solidFill>
-                    <a:srgbClr val="1F2A36"/>
-                  </a:solidFill>
-                  <a:latin typeface="Calibri"/>
-                </a:rPr>
-                <a:t>im</a:t>
-              </a:r>
-              <a:r>
-                <a:rPr sz="1400" dirty="0">
-                  <a:solidFill>
-                    <a:srgbClr val="1F2A36"/>
-                  </a:solidFill>
-                  <a:latin typeface="Calibri"/>
-                </a:rPr>
-                <a:t> </a:t>
-              </a:r>
-              <a:r>
-                <a:rPr sz="1400" dirty="0" err="1">
-                  <a:solidFill>
-                    <a:srgbClr val="1F2A36"/>
-                  </a:solidFill>
-                  <a:latin typeface="Calibri"/>
-                </a:rPr>
-                <a:t>Betrieb</a:t>
-              </a:r>
-              <a:endParaRPr sz="1400" dirty="0">
-                <a:solidFill>
-                  <a:srgbClr val="1F2A36"/>
-                </a:solidFill>
-                <a:latin typeface="Calibri"/>
-              </a:endParaRPr>
-            </a:p>
-            <a:p>
-              <a:pPr algn="l">
-                <a:lnSpc>
-                  <a:spcPct val="120000"/>
-                </a:lnSpc>
-                <a:spcAft>
-                  <a:spcPts val="400"/>
-                </a:spcAft>
-              </a:pPr>
-              <a:r>
-                <a:rPr sz="1400" b="1" dirty="0">
-                  <a:solidFill>
-                    <a:srgbClr val="C8102E"/>
-                  </a:solidFill>
-                  <a:latin typeface="Calibri"/>
-                </a:rPr>
                 <a:t>•  </a:t>
               </a:r>
               <a:r>
@@ -21495,7 +19362,7 @@
                   </a:solidFill>
                   <a:latin typeface="Calibri"/>
                 </a:rPr>
-                <a:t>	</a:t>
+                <a:t>    </a:t>
               </a:r>
               <a:r>
                 <a:rPr sz="1400" dirty="0">
@@ -21542,6 +19409,14 @@
                 </a:rPr>
                 <a:t>“)</a:t>
               </a:r>
+              <a:br>
+                <a:rPr lang="de-DE" sz="1400" dirty="0">
+                  <a:solidFill>
+                    <a:srgbClr val="1F2A36"/>
+                  </a:solidFill>
+                  <a:latin typeface="Calibri"/>
+                </a:rPr>
+              </a:br>
               <a:endParaRPr lang="de-DE" sz="1400" dirty="0">
                 <a:solidFill>
                   <a:srgbClr val="1F2A36"/>
@@ -21572,7 +19447,22 @@
                     <a:srgbClr val="1F2A36"/>
                   </a:solidFill>
                 </a:rPr>
-                <a:t>BFSG, EU-Web­barriere­freiheits­richtlinie, BITV 2.0 verlangen Nachweise</a:t>
+                <a:t>BFSG, EU-Web­barriere­freiheits­richtlinie, BITV 2.0 – </a:t>
+              </a:r>
+              <a:br>
+                <a:rPr lang="de-DE" sz="1400" dirty="0">
+                  <a:solidFill>
+                    <a:srgbClr val="1F2A36"/>
+                  </a:solidFill>
+                </a:rPr>
+              </a:br>
+              <a:r>
+                <a:rPr lang="de-DE" sz="1400" dirty="0">
+                  <a:solidFill>
+                    <a:srgbClr val="1F2A36"/>
+                  </a:solidFill>
+                </a:rPr>
+                <a:t>    Arbeitnehmendenrechte, Nachweispflicht, Ausschreibungskriterien</a:t>
               </a:r>
             </a:p>
             <a:p>
@@ -21847,15 +19737,12 @@
                 </a:rPr>
                 <a:t>Struktur</a:t>
               </a:r>
-              <a:r>
-                <a:rPr sz="1200" b="0" i="0" dirty="0">
-                  <a:solidFill>
-                    <a:srgbClr val="5A6470"/>
-                  </a:solidFill>
-                  <a:latin typeface="Calibri"/>
-                </a:rPr>
-                <a:t>.</a:t>
-              </a:r>
+              <a:endParaRPr sz="1200" b="0" i="0" dirty="0">
+                <a:solidFill>
+                  <a:srgbClr val="5A6470"/>
+                </a:solidFill>
+                <a:latin typeface="Calibri"/>
+              </a:endParaRPr>
             </a:p>
           </p:txBody>
         </p:sp>
@@ -22048,7 +19935,7 @@
                   </a:solidFill>
                   <a:latin typeface="Calibri"/>
                 </a:rPr>
-                <a:t> Zeit.</a:t>
+                <a:t> Zeit</a:t>
               </a:r>
             </a:p>
           </p:txBody>
@@ -22253,15 +20140,12 @@
                 </a:rPr>
                 <a:t>Hilfen</a:t>
               </a:r>
-              <a:r>
-                <a:rPr sz="1200" b="0" i="0" dirty="0">
-                  <a:solidFill>
-                    <a:srgbClr val="5A6470"/>
-                  </a:solidFill>
-                  <a:latin typeface="Calibri"/>
-                </a:rPr>
-                <a:t>.</a:t>
-              </a:r>
+              <a:endParaRPr sz="1200" b="0" i="0" dirty="0">
+                <a:solidFill>
+                  <a:srgbClr val="5A6470"/>
+                </a:solidFill>
+                <a:latin typeface="Calibri"/>
+              </a:endParaRPr>
             </a:p>
           </p:txBody>
         </p:sp>
@@ -22420,7 +20304,7 @@
                   </a:solidFill>
                   <a:latin typeface="Calibri"/>
                 </a:rPr>
-                <a:t> Markup, ARIA, UI Automation.</a:t>
+                <a:t> Markup, ARIA, UI Automation</a:t>
               </a:r>
             </a:p>
           </p:txBody>
@@ -23876,7 +21760,7 @@
           <p:spPr>
             <a:xfrm>
               <a:off x="4636008" y="2971800"/>
-              <a:ext cx="3108960" cy="1741631"/>
+              <a:ext cx="3108960" cy="974241"/>
             </a:xfrm>
             <a:prstGeom prst="rect">
               <a:avLst/>
@@ -23907,84 +21791,40 @@
                 <a:t>•  </a:t>
               </a:r>
               <a:r>
-                <a:rPr sz="1200" dirty="0" err="1">
+                <a:rPr sz="1200" dirty="0">
                   <a:solidFill>
                     <a:srgbClr val="1F2A36"/>
                   </a:solidFill>
                   <a:latin typeface="Calibri"/>
                 </a:rPr>
-                <a:t>Vorlesen</a:t>
-              </a:r>
-              <a:r>
-                <a:rPr sz="1200" dirty="0">
+                <a:t>NVDA Speech-Viewer</a:t>
+              </a:r>
+              <a:r>
+                <a:rPr lang="de-DE" sz="1200" dirty="0">
                   <a:solidFill>
                     <a:srgbClr val="1F2A36"/>
                   </a:solidFill>
                   <a:latin typeface="Calibri"/>
                 </a:rPr>
-                <a:t> </a:t>
-              </a:r>
-              <a:r>
-                <a:rPr sz="1200" dirty="0" err="1">
+                <a:t>, JAWS </a:t>
+              </a:r>
+              <a:r>
+                <a:rPr lang="de-DE" sz="1200" dirty="0" err="1">
                   <a:solidFill>
                     <a:srgbClr val="1F2A36"/>
                   </a:solidFill>
                   <a:latin typeface="Calibri"/>
                 </a:rPr>
-                <a:t>jedes</a:t>
-              </a:r>
-              <a:r>
-                <a:rPr sz="1200" dirty="0">
+                <a:t>Braillebetrachter</a:t>
+              </a:r>
+              <a:r>
+                <a:rPr lang="de-DE" sz="1200" dirty="0">
                   <a:solidFill>
                     <a:srgbClr val="1F2A36"/>
                   </a:solidFill>
                   <a:latin typeface="Calibri"/>
                 </a:rPr>
-                <a:t> </a:t>
-              </a:r>
-              <a:r>
-                <a:rPr sz="1200" dirty="0" err="1">
-                  <a:solidFill>
-                    <a:srgbClr val="1F2A36"/>
-                  </a:solidFill>
-                  <a:latin typeface="Calibri"/>
-                </a:rPr>
-                <a:t>interaktiven</a:t>
-              </a:r>
-              <a:r>
-                <a:rPr sz="1200" dirty="0">
-                  <a:solidFill>
-                    <a:srgbClr val="1F2A36"/>
-                  </a:solidFill>
-                  <a:latin typeface="Calibri"/>
-                </a:rPr>
-                <a:t> Elements: </a:t>
-              </a:r>
-              <a:br>
-                <a:rPr lang="de-DE" sz="1200" dirty="0">
-                  <a:solidFill>
-                    <a:srgbClr val="1F2A36"/>
-                  </a:solidFill>
-                  <a:latin typeface="Calibri"/>
-                </a:rPr>
-              </a:br>
-              <a:r>
-                <a:rPr lang="de-DE" sz="1200" dirty="0">
-                  <a:solidFill>
-                    <a:srgbClr val="1F2A36"/>
-                  </a:solidFill>
-                  <a:latin typeface="Calibri"/>
-                </a:rPr>
-                <a:t>	</a:t>
-              </a:r>
-              <a:r>
-                <a:rPr sz="1200" dirty="0">
-                  <a:solidFill>
-                    <a:srgbClr val="1F2A36"/>
-                  </a:solidFill>
-                  <a:latin typeface="Calibri"/>
-                </a:rPr>
-                <a:t>Name, Rolle, Wert.</a:t>
+                <a:t>…</a:t>
               </a:r>
             </a:p>
             <a:p>
@@ -23996,60 +21836,6 @@
                   <a:spcPts val="400"/>
                 </a:spcAft>
               </a:pPr>
-              <a:r>
-                <a:rPr sz="1200" b="1" dirty="0">
-                  <a:solidFill>
-                    <a:srgbClr val="C8102E"/>
-                  </a:solidFill>
-                  <a:latin typeface="Calibri"/>
-                </a:rPr>
-                <a:t>•  </a:t>
-              </a:r>
-              <a:r>
-                <a:rPr sz="1200" dirty="0">
-                  <a:solidFill>
-                    <a:srgbClr val="1F2A36"/>
-                  </a:solidFill>
-                  <a:latin typeface="Calibri"/>
-                </a:rPr>
-                <a:t>Browse-/</a:t>
-              </a:r>
-              <a:r>
-                <a:rPr sz="1200" dirty="0" err="1">
-                  <a:solidFill>
-                    <a:srgbClr val="1F2A36"/>
-                  </a:solidFill>
-                  <a:latin typeface="Calibri"/>
-                </a:rPr>
-                <a:t>Fokus</a:t>
-              </a:r>
-              <a:r>
-                <a:rPr sz="1200" dirty="0">
-                  <a:solidFill>
-                    <a:srgbClr val="1F2A36"/>
-                  </a:solidFill>
-                  <a:latin typeface="Calibri"/>
-                </a:rPr>
-                <a:t>-Modus (Web) </a:t>
-              </a:r>
-              <a:r>
-                <a:rPr sz="1200" dirty="0" err="1">
-                  <a:solidFill>
-                    <a:srgbClr val="1F2A36"/>
-                  </a:solidFill>
-                  <a:latin typeface="Calibri"/>
-                </a:rPr>
-                <a:t>bzw</a:t>
-              </a:r>
-              <a:r>
-                <a:rPr sz="1200" dirty="0">
-                  <a:solidFill>
-                    <a:srgbClr val="1F2A36"/>
-                  </a:solidFill>
-                  <a:latin typeface="Calibri"/>
-                </a:rPr>
-                <a:t>. </a:t>
-              </a:r>
               <a:endParaRPr lang="de-DE" sz="1200" dirty="0">
                 <a:solidFill>
                   <a:srgbClr val="1F2A36"/>
@@ -24058,7 +21844,7 @@
               </a:endParaRPr>
             </a:p>
             <a:p>
-              <a:pPr algn="l">
+              <a:pPr>
                 <a:lnSpc>
                   <a:spcPct val="120000"/>
                 </a:lnSpc>
@@ -24067,179 +21853,22 @@
                 </a:spcAft>
               </a:pPr>
               <a:r>
+                <a:rPr lang="de-DE" sz="1200" b="1" dirty="0">
+                  <a:solidFill>
+                    <a:srgbClr val="C8102E"/>
+                  </a:solidFill>
+                </a:rPr>
+                <a:t>• PRAXIS-VORFÜHRUNG</a:t>
+              </a:r>
+              <a:br>
                 <a:rPr lang="de-DE" sz="1200" dirty="0">
                   <a:solidFill>
                     <a:srgbClr val="1F2A36"/>
                   </a:solidFill>
                   <a:latin typeface="Calibri"/>
                 </a:rPr>
-                <a:t>	</a:t>
-              </a:r>
-              <a:r>
-                <a:rPr sz="1200" dirty="0" err="1">
-                  <a:solidFill>
-                    <a:srgbClr val="1F2A36"/>
-                  </a:solidFill>
-                  <a:latin typeface="Calibri"/>
-                </a:rPr>
-                <a:t>Objekt­navigation</a:t>
-              </a:r>
-              <a:r>
-                <a:rPr sz="1200" dirty="0">
-                  <a:solidFill>
-                    <a:srgbClr val="1F2A36"/>
-                  </a:solidFill>
-                  <a:latin typeface="Calibri"/>
-                </a:rPr>
-                <a:t> </a:t>
-              </a:r>
-              <a:r>
-                <a:rPr sz="1200" dirty="0" err="1">
-                  <a:solidFill>
-                    <a:srgbClr val="1F2A36"/>
-                  </a:solidFill>
-                  <a:latin typeface="Calibri"/>
-                </a:rPr>
-                <a:t>testen</a:t>
-              </a:r>
-              <a:r>
-                <a:rPr sz="1200" dirty="0">
-                  <a:solidFill>
-                    <a:srgbClr val="1F2A36"/>
-                  </a:solidFill>
-                  <a:latin typeface="Calibri"/>
-                </a:rPr>
-                <a:t>.</a:t>
-              </a:r>
-            </a:p>
-            <a:p>
-              <a:pPr algn="l">
-                <a:lnSpc>
-                  <a:spcPct val="120000"/>
-                </a:lnSpc>
-                <a:spcAft>
-                  <a:spcPts val="400"/>
-                </a:spcAft>
-              </a:pPr>
-              <a:r>
-                <a:rPr sz="1200" b="1" dirty="0">
-                  <a:solidFill>
-                    <a:srgbClr val="C8102E"/>
-                  </a:solidFill>
-                  <a:latin typeface="Calibri"/>
-                </a:rPr>
-                <a:t>•  </a:t>
-              </a:r>
-              <a:r>
-                <a:rPr sz="1200" dirty="0">
-                  <a:solidFill>
-                    <a:srgbClr val="1F2A36"/>
-                  </a:solidFill>
-                  <a:latin typeface="Calibri"/>
-                </a:rPr>
-                <a:t>Live-Regions, </a:t>
-              </a:r>
-              <a:r>
-                <a:rPr sz="1200" dirty="0" err="1">
-                  <a:solidFill>
-                    <a:srgbClr val="1F2A36"/>
-                  </a:solidFill>
-                  <a:latin typeface="Calibri"/>
-                </a:rPr>
-                <a:t>Statusmeldungen</a:t>
-              </a:r>
-              <a:r>
-                <a:rPr sz="1200" dirty="0">
-                  <a:solidFill>
-                    <a:srgbClr val="1F2A36"/>
-                  </a:solidFill>
-                  <a:latin typeface="Calibri"/>
-                </a:rPr>
-                <a:t>, </a:t>
-              </a:r>
-              <a:r>
-                <a:rPr lang="de-DE" sz="1200" dirty="0">
-                  <a:solidFill>
-                    <a:srgbClr val="1F2A36"/>
-                  </a:solidFill>
-                  <a:latin typeface="Calibri"/>
-                </a:rPr>
-                <a:t>	</a:t>
-              </a:r>
-              <a:r>
-                <a:rPr sz="1200" dirty="0" err="1">
-                  <a:solidFill>
-                    <a:srgbClr val="1F2A36"/>
-                  </a:solidFill>
-                  <a:latin typeface="Calibri"/>
-                </a:rPr>
-                <a:t>Fehlerausgaben</a:t>
-              </a:r>
-              <a:r>
-                <a:rPr sz="1200" dirty="0">
-                  <a:solidFill>
-                    <a:srgbClr val="1F2A36"/>
-                  </a:solidFill>
-                  <a:latin typeface="Calibri"/>
-                </a:rPr>
-                <a:t>.</a:t>
-              </a:r>
-            </a:p>
-            <a:p>
-              <a:pPr algn="l">
-                <a:lnSpc>
-                  <a:spcPct val="120000"/>
-                </a:lnSpc>
-                <a:spcAft>
-                  <a:spcPts val="400"/>
-                </a:spcAft>
-              </a:pPr>
-              <a:r>
-                <a:rPr sz="1200" b="1" dirty="0">
-                  <a:solidFill>
-                    <a:srgbClr val="C8102E"/>
-                  </a:solidFill>
-                  <a:latin typeface="Calibri"/>
-                </a:rPr>
-                <a:t>•  </a:t>
-              </a:r>
-              <a:r>
-                <a:rPr sz="1200" dirty="0">
-                  <a:solidFill>
-                    <a:srgbClr val="1F2A36"/>
-                  </a:solidFill>
-                  <a:latin typeface="Calibri"/>
-                </a:rPr>
-                <a:t>NVDA Speech-Viewer</a:t>
-              </a:r>
-              <a:r>
-                <a:rPr lang="de-DE" sz="1200" dirty="0">
-                  <a:solidFill>
-                    <a:srgbClr val="1F2A36"/>
-                  </a:solidFill>
-                  <a:latin typeface="Calibri"/>
-                </a:rPr>
-                <a:t>, JAWS </a:t>
-              </a:r>
-              <a:r>
-                <a:rPr lang="de-DE" sz="1200" dirty="0" err="1">
-                  <a:solidFill>
-                    <a:srgbClr val="1F2A36"/>
-                  </a:solidFill>
-                  <a:latin typeface="Calibri"/>
-                </a:rPr>
-                <a:t>Braillebetrachter</a:t>
-              </a:r>
-              <a:r>
-                <a:rPr lang="de-DE" sz="1200" dirty="0">
-                  <a:solidFill>
-                    <a:srgbClr val="1F2A36"/>
-                  </a:solidFill>
-                  <a:latin typeface="Calibri"/>
-                </a:rPr>
-                <a:t>…</a:t>
-              </a:r>
-              <a:endParaRPr sz="1200" dirty="0">
+              </a:br>
+              <a:endParaRPr lang="de-DE" sz="1200" dirty="0">
                 <a:solidFill>
                   <a:srgbClr val="1F2A36"/>
                 </a:solidFill>
@@ -24718,7 +22347,33 @@
                   </a:solidFill>
                   <a:latin typeface="Calibri"/>
                 </a:rPr>
-                <a:t>Windows-Apps: Accessibility Insights for Windows.</a:t>
+                <a:t>Windows-Apps: </a:t>
+              </a:r>
+              <a:br>
+                <a:rPr lang="de-DE" sz="1200" dirty="0">
+                  <a:solidFill>
+                    <a:srgbClr val="1F2A36"/>
+                  </a:solidFill>
+                  <a:latin typeface="Calibri"/>
+                </a:rPr>
+              </a:br>
+              <a:r>
+                <a:rPr lang="de-DE" sz="1200" dirty="0">
+                  <a:solidFill>
+                    <a:srgbClr val="1F2A36"/>
+                  </a:solidFill>
+                  <a:latin typeface="Calibri"/>
+                </a:rPr>
+                <a:t>    </a:t>
+              </a:r>
+              <a:r>
+                <a:rPr sz="1200" dirty="0">
+                  <a:solidFill>
+                    <a:srgbClr val="1F2A36"/>
+                  </a:solidFill>
+                  <a:latin typeface="Calibri"/>
+                </a:rPr>
+                <a:t>Accessibility Insights for Windows</a:t>
               </a:r>
             </a:p>
             <a:p>
@@ -24746,7 +22401,16 @@
                   </a:solidFill>
                   <a:latin typeface="Calibri"/>
                 </a:rPr>
-                <a:t>PDFs: PAC 2024 / Adobe Pro </a:t>
+                <a:t>PDFs: PAC 2024 / Adobe Pro Voll</a:t>
+              </a:r>
+              <a:r>
+                <a:rPr lang="de-DE" sz="1200" dirty="0">
+                  <a:solidFill>
+                    <a:srgbClr val="1F2A36"/>
+                  </a:solidFill>
+                  <a:latin typeface="Calibri"/>
+                </a:rPr>
+                <a:t>-P</a:t>
               </a:r>
               <a:r>
                 <a:rPr sz="1200" dirty="0" err="1">
@@ -24755,16 +22419,7 @@
                   </a:solidFill>
                   <a:latin typeface="Calibri"/>
                 </a:rPr>
-                <a:t>Vollprüfung</a:t>
-              </a:r>
-              <a:r>
-                <a:rPr sz="1200" dirty="0">
-                  <a:solidFill>
-                    <a:srgbClr val="1F2A36"/>
-                  </a:solidFill>
-                  <a:latin typeface="Calibri"/>
-                </a:rPr>
-                <a:t>.</a:t>
+                <a:t>rüfung</a:t>
               </a:r>
               <a:endParaRPr lang="de-DE" sz="1200" dirty="0">
                 <a:solidFill>
@@ -24854,7 +22509,7 @@
                     <a:srgbClr val="1F2A36"/>
                   </a:solidFill>
                 </a:rPr>
-                <a:t>BITV Test</a:t>
+                <a:t>BIK BITV Tests</a:t>
               </a:r>
               <a:endParaRPr sz="1200" dirty="0">
                 <a:solidFill>
@@ -25899,7 +23554,7 @@
                   </a:solidFill>
                   <a:latin typeface="Calibri"/>
                 </a:rPr>
-                <a:t>Entwickeln mit KI-Assistent</a:t>
+                <a:t>Entwickeln mit KI-Assistent (Claude Code)</a:t>
               </a:r>
               <a:endParaRPr sz="1800" b="1" i="0" dirty="0">
                 <a:solidFill>
@@ -25956,9 +23611,9 @@
         <p:grpSpPr>
           <a:xfrm>
             <a:off x="457200" y="1976288"/>
-            <a:ext cx="5486400" cy="2951585"/>
+            <a:ext cx="5486400" cy="2420157"/>
             <a:chOff x="457200" y="1976288"/>
-            <a:chExt cx="5486400" cy="2951585"/>
+            <a:chExt cx="5486400" cy="2420157"/>
           </a:xfrm>
         </p:grpSpPr>
         <p:sp>
@@ -25970,7 +23625,7 @@
           <p:spPr>
             <a:xfrm>
               <a:off x="457200" y="2526831"/>
-              <a:ext cx="5486400" cy="2401042"/>
+              <a:ext cx="5486400" cy="1869614"/>
             </a:xfrm>
             <a:prstGeom prst="rect">
               <a:avLst/>
@@ -26029,53 +23684,7 @@
                     <a:srgbClr val="1F2A36"/>
                   </a:solidFill>
                 </a:rPr>
-                <a:t>-Sprache (JSS-Dateien) für firmenspezifische Anwendungen</a:t>
-              </a:r>
-            </a:p>
-            <a:p>
-              <a:pPr algn="l">
-                <a:lnSpc>
-                  <a:spcPct val="120000"/>
-                </a:lnSpc>
-                <a:spcAft>
-                  <a:spcPts val="400"/>
-                </a:spcAft>
-              </a:pPr>
-              <a:r>
-                <a:rPr sz="1300" b="1" dirty="0">
-                  <a:solidFill>
-                    <a:srgbClr val="C8102E"/>
-                  </a:solidFill>
-                  <a:latin typeface="Calibri"/>
-                </a:rPr>
-                <a:t>•  </a:t>
-              </a:r>
-              <a:r>
-                <a:rPr sz="1300" dirty="0">
-                  <a:solidFill>
-                    <a:srgbClr val="1F2A36"/>
-                  </a:solidFill>
-                  <a:latin typeface="Calibri"/>
-                </a:rPr>
-                <a:t>JAWS-Cursor / PC-Cursor / </a:t>
-              </a:r>
-              <a:r>
-                <a:rPr sz="1300" dirty="0" err="1">
-                  <a:solidFill>
-                    <a:srgbClr val="1F2A36"/>
-                  </a:solidFill>
-                  <a:latin typeface="Calibri"/>
-                </a:rPr>
-                <a:t>virtuelles</a:t>
-              </a:r>
-              <a:r>
-                <a:rPr sz="1300" dirty="0">
-                  <a:solidFill>
-                    <a:srgbClr val="1F2A36"/>
-                  </a:solidFill>
-                  <a:latin typeface="Calibri"/>
-                </a:rPr>
-                <a:t> Cursor-Modell</a:t>
+                <a:t>-Sprache (JSS-Dateien)</a:t>
               </a:r>
             </a:p>
             <a:p>
@@ -26977,7 +24586,7 @@
           <p:nvPr/>
         </p:nvPicPr>
         <p:blipFill>
-          <a:blip r:embed="rId2"/>
+          <a:blip r:embed="rId3"/>
           <a:stretch>
             <a:fillRect/>
           </a:stretch>
@@ -27007,7 +24616,7 @@
           <p:nvPr/>
         </p:nvPicPr>
         <p:blipFill>
-          <a:blip r:embed="rId3"/>
+          <a:blip r:embed="rId4"/>
           <a:stretch>
             <a:fillRect/>
           </a:stretch>
@@ -27022,6 +24631,45 @@
           </a:prstGeom>
         </p:spPr>
       </p:pic>
+      <p:sp>
+        <p:nvSpPr>
+          <p:cNvPr id="6" name="Textfeld 5">
+            <a:extLst>
+              <a:ext uri="{FF2B5EF4-FFF2-40B4-BE49-F238E27FC236}">
+                <a16:creationId xmlns:a16="http://schemas.microsoft.com/office/drawing/2014/main" id="{10B9F374-63B7-960A-731C-433C58468A49}"/>
+              </a:ext>
+            </a:extLst>
+          </p:cNvPr>
+          <p:cNvSpPr txBox="1"/>
+          <p:nvPr/>
+        </p:nvSpPr>
+        <p:spPr>
+          <a:xfrm>
+            <a:off x="6562208" y="1842129"/>
+            <a:ext cx="4644887" cy="461665"/>
+          </a:xfrm>
+          <a:prstGeom prst="rect">
+            <a:avLst/>
+          </a:prstGeom>
+          <a:noFill/>
+        </p:spPr>
+        <p:txBody>
+          <a:bodyPr wrap="square" rtlCol="0">
+            <a:spAutoFit/>
+          </a:bodyPr>
+          <a:lstStyle/>
+          <a:p>
+            <a:r>
+              <a:rPr lang="de-DE" sz="2400" b="1" dirty="0">
+                <a:solidFill>
+                  <a:srgbClr val="FF0000"/>
+                </a:solidFill>
+              </a:rPr>
+              <a:t>KURZE PRAXIS-VORFÜHRUNG</a:t>
+            </a:r>
+          </a:p>
+        </p:txBody>
+      </p:sp>
     </p:spTree>
     <p:extLst>
       <p:ext uri="{BB962C8B-B14F-4D97-AF65-F5344CB8AC3E}">
@@ -27130,6 +24778,51 @@
                       </p:childTnLst>
                     </p:cTn>
                   </p:par>
+                  <p:par>
+                    <p:cTn id="11" fill="hold">
+                      <p:stCondLst>
+                        <p:cond delay="indefinite"/>
+                      </p:stCondLst>
+                      <p:childTnLst>
+                        <p:par>
+                          <p:cTn id="12" fill="hold">
+                            <p:stCondLst>
+                              <p:cond delay="0"/>
+                            </p:stCondLst>
+                            <p:childTnLst>
+                              <p:par>
+                                <p:cTn id="13" presetID="1" presetClass="entr" presetSubtype="0" fill="hold" grpId="0" nodeType="clickEffect">
+                                  <p:stCondLst>
+                                    <p:cond delay="0"/>
+                                  </p:stCondLst>
+                                  <p:childTnLst>
+                                    <p:set>
+                                      <p:cBhvr>
+                                        <p:cTn id="14" dur="1" fill="hold">
+                                          <p:stCondLst>
+                                            <p:cond delay="0"/>
+                                          </p:stCondLst>
+                                        </p:cTn>
+                                        <p:tgtEl>
+                                          <p:spTgt spid="6"/>
+                                        </p:tgtEl>
+                                        <p:attrNameLst>
+                                          <p:attrName>style.visibility</p:attrName>
+                                        </p:attrNameLst>
+                                      </p:cBhvr>
+                                      <p:to>
+                                        <p:strVal val="visible"/>
+                                      </p:to>
+                                    </p:set>
+                                  </p:childTnLst>
+                                </p:cTn>
+                              </p:par>
+                            </p:childTnLst>
+                          </p:cTn>
+                        </p:par>
+                      </p:childTnLst>
+                    </p:cTn>
+                  </p:par>
                 </p:childTnLst>
               </p:cTn>
               <p:prevCondLst>
@@ -27151,6 +24844,9 @@
         </p:cTn>
       </p:par>
     </p:tnLst>
+    <p:bldLst>
+      <p:bldP spid="6" grpId="0"/>
+    </p:bldLst>
   </p:timing>
 </p:sld>
 </file>
@@ -27306,13 +25002,22 @@
               </a:lnSpc>
             </a:pPr>
             <a:r>
-              <a:rPr sz="3000" b="1" i="0">
+              <a:rPr sz="3000" b="1" i="0" dirty="0" err="1">
                 <a:solidFill>
                   <a:srgbClr val="C8102E"/>
                 </a:solidFill>
                 <a:latin typeface="Calibri"/>
               </a:rPr>
-              <a:t>Screenreader-Anpassungen · NVDA</a:t>
+              <a:t>Screenreader-Anpassungen</a:t>
+            </a:r>
+            <a:r>
+              <a:rPr sz="3000" b="1" i="0" dirty="0">
+                <a:solidFill>
+                  <a:srgbClr val="C8102E"/>
+                </a:solidFill>
+                <a:latin typeface="Calibri"/>
+              </a:rPr>
+              <a:t> · NVDA</a:t>
             </a:r>
           </a:p>
         </p:txBody>
@@ -27470,9 +25175,9 @@
         <p:grpSpPr>
           <a:xfrm>
             <a:off x="6355080" y="2103120"/>
-            <a:ext cx="5486400" cy="4160520"/>
+            <a:ext cx="5486400" cy="1892403"/>
             <a:chOff x="6355080" y="2103120"/>
-            <a:chExt cx="5486400" cy="4160520"/>
+            <a:chExt cx="5486400" cy="1892403"/>
           </a:xfrm>
         </p:grpSpPr>
         <p:sp>
@@ -27509,43 +25214,16 @@
                   </a:solidFill>
                   <a:latin typeface="Calibri"/>
                 </a:rPr>
-                <a:t>Hilfen</a:t>
-              </a:r>
-              <a:r>
-                <a:rPr sz="1800" b="1" i="0" dirty="0">
+                <a:t>Hilfe</a:t>
+              </a:r>
+              <a:r>
+                <a:rPr lang="de-DE" sz="1800" b="1" i="0" dirty="0">
                   <a:solidFill>
                     <a:srgbClr val="1F2A36"/>
                   </a:solidFill>
                   <a:latin typeface="Calibri"/>
                 </a:rPr>
-                <a:t> </a:t>
-              </a:r>
-              <a:r>
-                <a:rPr lang="de-DE" sz="1800" b="1" i="0" dirty="0">
-                  <a:solidFill>
-                    <a:srgbClr val="1F2A36"/>
-                  </a:solidFill>
-                  <a:latin typeface="Calibri"/>
-                </a:rPr>
-                <a:t>(</a:t>
-              </a:r>
-              <a:r>
-                <a:rPr sz="1800" b="1" i="0" dirty="0">
-                  <a:solidFill>
-                    <a:srgbClr val="1F2A36"/>
-                  </a:solidFill>
-                  <a:latin typeface="Calibri"/>
-                </a:rPr>
-                <a:t>für die Demonstration</a:t>
-              </a:r>
-              <a:r>
-                <a:rPr lang="de-DE" sz="1800" b="1" i="0" dirty="0">
-                  <a:solidFill>
-                    <a:srgbClr val="1F2A36"/>
-                  </a:solidFill>
-                  <a:latin typeface="Calibri"/>
-                </a:rPr>
-                <a:t>)</a:t>
+                <a:t>n</a:t>
               </a:r>
               <a:endParaRPr sz="1800" b="1" i="0" dirty="0">
                 <a:solidFill>
@@ -27565,7 +25243,7 @@
           <p:spPr>
             <a:xfrm>
               <a:off x="6355080" y="2606040"/>
-              <a:ext cx="5486400" cy="3657600"/>
+              <a:ext cx="5486400" cy="1389483"/>
             </a:xfrm>
             <a:prstGeom prst="rect">
               <a:avLst/>
@@ -27602,7 +25280,25 @@
                   </a:solidFill>
                   <a:latin typeface="Calibri"/>
                 </a:rPr>
-                <a:t>Speech Viewer (NVDA-</a:t>
+                <a:t>Speech </a:t>
+              </a:r>
+              <a:r>
+                <a:rPr lang="de-DE" sz="1300" dirty="0">
+                  <a:solidFill>
+                    <a:srgbClr val="1F2A36"/>
+                  </a:solidFill>
+                  <a:latin typeface="Calibri"/>
+                </a:rPr>
+                <a:t>und Braille </a:t>
+              </a:r>
+              <a:r>
+                <a:rPr sz="1300" dirty="0">
+                  <a:solidFill>
+                    <a:srgbClr val="1F2A36"/>
+                  </a:solidFill>
+                  <a:latin typeface="Calibri"/>
+                </a:rPr>
+                <a:t>Viewer (NVDA-</a:t>
               </a:r>
               <a:r>
                 <a:rPr sz="1300" dirty="0" err="1">
@@ -27638,79 +25334,7 @@
                   </a:solidFill>
                   <a:latin typeface="Calibri"/>
                 </a:rPr>
-                <a:t> → </a:t>
-              </a:r>
-              <a:r>
-                <a:rPr sz="1300" dirty="0" err="1">
-                  <a:solidFill>
-                    <a:srgbClr val="1F2A36"/>
-                  </a:solidFill>
-                  <a:latin typeface="Calibri"/>
-                </a:rPr>
-                <a:t>Sprach­anzeige</a:t>
-              </a:r>
-              <a:r>
-                <a:rPr sz="1300" dirty="0">
-                  <a:solidFill>
-                    <a:srgbClr val="1F2A36"/>
-                  </a:solidFill>
-                  <a:latin typeface="Calibri"/>
-                </a:rPr>
-                <a:t>) – </a:t>
-              </a:r>
-              <a:r>
-                <a:rPr sz="1300" dirty="0" err="1">
-                  <a:solidFill>
-                    <a:srgbClr val="1F2A36"/>
-                  </a:solidFill>
-                  <a:latin typeface="Calibri"/>
-                </a:rPr>
-                <a:t>Publikum</a:t>
-              </a:r>
-              <a:r>
-                <a:rPr sz="1300" dirty="0">
-                  <a:solidFill>
-                    <a:srgbClr val="1F2A36"/>
-                  </a:solidFill>
-                  <a:latin typeface="Calibri"/>
-                </a:rPr>
-                <a:t> </a:t>
-              </a:r>
-              <a:r>
-                <a:rPr sz="1300" dirty="0" err="1">
-                  <a:solidFill>
-                    <a:srgbClr val="1F2A36"/>
-                  </a:solidFill>
-                  <a:latin typeface="Calibri"/>
-                </a:rPr>
-                <a:t>liest</a:t>
-              </a:r>
-              <a:r>
-                <a:rPr sz="1300" dirty="0">
-                  <a:solidFill>
-                    <a:srgbClr val="1F2A36"/>
-                  </a:solidFill>
-                  <a:latin typeface="Calibri"/>
-                </a:rPr>
-                <a:t> </a:t>
-              </a:r>
-              <a:r>
-                <a:rPr sz="1300" dirty="0" err="1">
-                  <a:solidFill>
-                    <a:srgbClr val="1F2A36"/>
-                  </a:solidFill>
-                  <a:latin typeface="Calibri"/>
-                </a:rPr>
-                <a:t>mit</a:t>
-              </a:r>
-              <a:r>
-                <a:rPr sz="1300" dirty="0">
-                  <a:solidFill>
-                    <a:srgbClr val="1F2A36"/>
-                  </a:solidFill>
-                  <a:latin typeface="Calibri"/>
-                </a:rPr>
-                <a:t>.</a:t>
+                <a:t>)</a:t>
               </a:r>
             </a:p>
             <a:p>
@@ -27819,7 +25443,7 @@
                   </a:solidFill>
                   <a:latin typeface="Calibri"/>
                 </a:rPr>
-                <a:t> an.</a:t>
+                <a:t> an</a:t>
               </a:r>
             </a:p>
             <a:p>
@@ -27869,7 +25493,7 @@
               </a:r>
             </a:p>
             <a:p>
-              <a:pPr algn="l">
+              <a:pPr>
                 <a:lnSpc>
                   <a:spcPct val="120000"/>
                 </a:lnSpc>
@@ -27878,80 +25502,20 @@
                 </a:spcAft>
               </a:pPr>
               <a:r>
-                <a:rPr sz="1300" b="1" dirty="0">
+                <a:rPr lang="de-DE" sz="1300" b="1" dirty="0">
                   <a:solidFill>
                     <a:srgbClr val="C8102E"/>
                   </a:solidFill>
-                  <a:latin typeface="Calibri"/>
                 </a:rPr>
                 <a:t>•  </a:t>
               </a:r>
               <a:r>
-                <a:rPr sz="1300" dirty="0">
-                  <a:solidFill>
-                    <a:srgbClr val="1F2A36"/>
-                  </a:solidFill>
-                  <a:latin typeface="Calibri"/>
-                </a:rPr>
-                <a:t>Browser-Modus </a:t>
-              </a:r>
-              <a:r>
-                <a:rPr sz="1300" dirty="0" err="1">
-                  <a:solidFill>
-                    <a:srgbClr val="1F2A36"/>
-                  </a:solidFill>
-                  <a:latin typeface="Calibri"/>
-                </a:rPr>
-                <a:t>mit</a:t>
-              </a:r>
-              <a:r>
-                <a:rPr sz="1300" dirty="0">
-                  <a:solidFill>
-                    <a:srgbClr val="1F2A36"/>
-                  </a:solidFill>
-                  <a:latin typeface="Calibri"/>
-                </a:rPr>
-                <a:t> </a:t>
-              </a:r>
-              <a:r>
-                <a:rPr sz="1300" dirty="0" err="1">
-                  <a:solidFill>
-                    <a:srgbClr val="1F2A36"/>
-                  </a:solidFill>
-                  <a:latin typeface="Calibri"/>
-                </a:rPr>
-                <a:t>NVDA+Leertaste</a:t>
-              </a:r>
-              <a:r>
-                <a:rPr sz="1300" dirty="0">
-                  <a:solidFill>
-                    <a:srgbClr val="1F2A36"/>
-                  </a:solidFill>
-                  <a:latin typeface="Calibri"/>
-                </a:rPr>
-                <a:t> </a:t>
-              </a:r>
-              <a:r>
-                <a:rPr sz="1300" dirty="0" err="1">
-                  <a:solidFill>
-                    <a:srgbClr val="1F2A36"/>
-                  </a:solidFill>
-                  <a:latin typeface="Calibri"/>
-                </a:rPr>
-                <a:t>umschalten</a:t>
-              </a:r>
-              <a:r>
-                <a:rPr sz="1300" dirty="0">
-                  <a:solidFill>
-                    <a:srgbClr val="1F2A36"/>
-                  </a:solidFill>
-                  <a:latin typeface="Calibri"/>
-                </a:rPr>
-                <a:t>.</a:t>
+                <a:rPr lang="de-DE" sz="1300" dirty="0"/>
+                <a:t>Viele Zusatz-Funktionen über Plugins</a:t>
               </a:r>
             </a:p>
             <a:p>
-              <a:pPr algn="l">
+              <a:pPr>
                 <a:lnSpc>
                   <a:spcPct val="120000"/>
                 </a:lnSpc>
@@ -27960,96 +25524,28 @@
                 </a:spcAft>
               </a:pPr>
               <a:r>
-                <a:rPr sz="1300" b="1" dirty="0">
+                <a:rPr lang="de-DE" sz="1300" b="1" dirty="0">
                   <a:solidFill>
                     <a:srgbClr val="C8102E"/>
                   </a:solidFill>
-                  <a:latin typeface="Calibri"/>
                 </a:rPr>
                 <a:t>•  </a:t>
               </a:r>
               <a:r>
-                <a:rPr sz="1300" dirty="0">
-                  <a:solidFill>
-                    <a:srgbClr val="1F2A36"/>
-                  </a:solidFill>
-                  <a:latin typeface="Calibri"/>
-                </a:rPr>
-                <a:t>Schnelle Navigation: H für Headings, F für Felder, B für Buttons.</a:t>
-              </a:r>
-            </a:p>
-            <a:p>
-              <a:pPr algn="l">
-                <a:lnSpc>
-                  <a:spcPct val="120000"/>
-                </a:lnSpc>
-                <a:spcAft>
-                  <a:spcPts val="400"/>
-                </a:spcAft>
-              </a:pPr>
-              <a:r>
-                <a:rPr sz="1300" b="1" dirty="0">
-                  <a:solidFill>
-                    <a:srgbClr val="C8102E"/>
-                  </a:solidFill>
-                  <a:latin typeface="Calibri"/>
-                </a:rPr>
-                <a:t>•  </a:t>
-              </a:r>
-              <a:r>
-                <a:rPr sz="1300" dirty="0" err="1">
-                  <a:solidFill>
-                    <a:srgbClr val="1F2A36"/>
-                  </a:solidFill>
-                  <a:latin typeface="Calibri"/>
-                </a:rPr>
-                <a:t>Konfigurationsprofile</a:t>
-              </a:r>
-              <a:r>
-                <a:rPr sz="1300" dirty="0">
-                  <a:solidFill>
-                    <a:srgbClr val="1F2A36"/>
-                  </a:solidFill>
-                  <a:latin typeface="Calibri"/>
-                </a:rPr>
-                <a:t> pro </a:t>
-              </a:r>
-              <a:r>
-                <a:rPr sz="1300" dirty="0" err="1">
-                  <a:solidFill>
-                    <a:srgbClr val="1F2A36"/>
-                  </a:solidFill>
-                  <a:latin typeface="Calibri"/>
-                </a:rPr>
-                <a:t>Anwendung</a:t>
-              </a:r>
-              <a:r>
-                <a:rPr sz="1300" dirty="0">
-                  <a:solidFill>
-                    <a:srgbClr val="1F2A36"/>
-                  </a:solidFill>
-                  <a:latin typeface="Calibri"/>
-                </a:rPr>
-                <a:t> </a:t>
-              </a:r>
-              <a:r>
-                <a:rPr sz="1300" dirty="0" err="1">
-                  <a:solidFill>
-                    <a:srgbClr val="1F2A36"/>
-                  </a:solidFill>
-                  <a:latin typeface="Calibri"/>
-                </a:rPr>
-                <a:t>möglich</a:t>
-              </a:r>
-              <a:r>
-                <a:rPr sz="1300" dirty="0">
-                  <a:solidFill>
-                    <a:srgbClr val="1F2A36"/>
-                  </a:solidFill>
-                  <a:latin typeface="Calibri"/>
-                </a:rPr>
-                <a:t>.</a:t>
-              </a:r>
+                <a:rPr lang="en-US" sz="1300" dirty="0">
+                  <a:latin typeface="Calibri"/>
+                </a:rPr>
+                <a:t>Developer Guide: </a:t>
+              </a:r>
+              <a:r>
+                <a:rPr lang="en-US" sz="1100" dirty="0">
+                  <a:latin typeface="Calibri"/>
+                </a:rPr>
+                <a:t>https://download.nvaccess.org/documentation/developerGuide.html</a:t>
+              </a:r>
+              <a:endParaRPr lang="de-DE" sz="1300" dirty="0">
+                <a:latin typeface="Calibri"/>
+              </a:endParaRPr>
             </a:p>
           </p:txBody>
         </p:sp>
@@ -28192,9 +25688,9 @@
         <p:grpSpPr>
           <a:xfrm>
             <a:off x="457200" y="2120675"/>
-            <a:ext cx="5486400" cy="1648664"/>
+            <a:ext cx="5486400" cy="1357302"/>
             <a:chOff x="457200" y="2120675"/>
-            <a:chExt cx="5486400" cy="1648664"/>
+            <a:chExt cx="5486400" cy="1357302"/>
           </a:xfrm>
         </p:grpSpPr>
         <p:sp>
@@ -28212,7 +25708,7 @@
           <p:spPr>
             <a:xfrm>
               <a:off x="457200" y="2671218"/>
-              <a:ext cx="5486400" cy="1098121"/>
+              <a:ext cx="5486400" cy="806759"/>
             </a:xfrm>
             <a:prstGeom prst="rect">
               <a:avLst/>
@@ -28273,51 +25769,6 @@
                     <a:srgbClr val="C8102E"/>
                   </a:solidFill>
                   <a:latin typeface="Calibri"/>
-                </a:rPr>
-                <a:t>•  </a:t>
-              </a:r>
-              <a:r>
-                <a:rPr sz="1300" dirty="0">
-                  <a:solidFill>
-                    <a:srgbClr val="1F2A36"/>
-                  </a:solidFill>
-                  <a:latin typeface="Calibri"/>
-                </a:rPr>
-                <a:t>JAWS-Cursor / PC-Cursor / </a:t>
-              </a:r>
-              <a:r>
-                <a:rPr sz="1300" dirty="0" err="1">
-                  <a:solidFill>
-                    <a:srgbClr val="1F2A36"/>
-                  </a:solidFill>
-                  <a:latin typeface="Calibri"/>
-                </a:rPr>
-                <a:t>virtuelles</a:t>
-              </a:r>
-              <a:r>
-                <a:rPr sz="1300" dirty="0">
-                  <a:solidFill>
-                    <a:srgbClr val="1F2A36"/>
-                  </a:solidFill>
-                  <a:latin typeface="Calibri"/>
-                </a:rPr>
-                <a:t> Cursor-Modell</a:t>
-              </a:r>
-            </a:p>
-            <a:p>
-              <a:pPr>
-                <a:lnSpc>
-                  <a:spcPct val="120000"/>
-                </a:lnSpc>
-                <a:spcAft>
-                  <a:spcPts val="400"/>
-                </a:spcAft>
-              </a:pPr>
-              <a:r>
-                <a:rPr lang="de-DE" sz="1300" b="1" dirty="0">
-                  <a:solidFill>
-                    <a:srgbClr val="C8102E"/>
-                  </a:solidFill>
                 </a:rPr>
                 <a:t>•  </a:t>
               </a:r>
@@ -28406,6 +25857,48 @@
           </p:txBody>
         </p:sp>
       </p:grpSp>
+      <p:sp>
+        <p:nvSpPr>
+          <p:cNvPr id="16" name="Textfeld 15">
+            <a:extLst>
+              <a:ext uri="{FF2B5EF4-FFF2-40B4-BE49-F238E27FC236}">
+                <a16:creationId xmlns:a16="http://schemas.microsoft.com/office/drawing/2014/main" id="{1F02416A-E02A-B8D5-5A63-97B867617BAF}"/>
+              </a:ext>
+            </a:extLst>
+          </p:cNvPr>
+          <p:cNvSpPr txBox="1"/>
+          <p:nvPr/>
+        </p:nvSpPr>
+        <p:spPr>
+          <a:xfrm>
+            <a:off x="6255026" y="4552122"/>
+            <a:ext cx="4644887" cy="830997"/>
+          </a:xfrm>
+          <a:prstGeom prst="rect">
+            <a:avLst/>
+          </a:prstGeom>
+          <a:noFill/>
+        </p:spPr>
+        <p:txBody>
+          <a:bodyPr wrap="square" rtlCol="0">
+            <a:spAutoFit/>
+          </a:bodyPr>
+          <a:lstStyle/>
+          <a:p>
+            <a:r>
+              <a:rPr lang="de-DE" sz="2400" b="1" dirty="0">
+                <a:solidFill>
+                  <a:srgbClr val="FF0000"/>
+                </a:solidFill>
+              </a:rPr>
+              <a:t>PRAXIS-VORFÜHRUNG</a:t>
+            </a:r>
+          </a:p>
+          <a:p>
+            <a:endParaRPr lang="de-DE" sz="2400" dirty="0"/>
+          </a:p>
+        </p:txBody>
+      </p:sp>
     </p:spTree>
   </p:cSld>
   <p:clrMapOvr>
@@ -28509,6 +26002,51 @@
                       </p:childTnLst>
                     </p:cTn>
                   </p:par>
+                  <p:par>
+                    <p:cTn id="11" fill="hold">
+                      <p:stCondLst>
+                        <p:cond delay="indefinite"/>
+                      </p:stCondLst>
+                      <p:childTnLst>
+                        <p:par>
+                          <p:cTn id="12" fill="hold">
+                            <p:stCondLst>
+                              <p:cond delay="0"/>
+                            </p:stCondLst>
+                            <p:childTnLst>
+                              <p:par>
+                                <p:cTn id="13" presetID="1" presetClass="entr" presetSubtype="0" fill="hold" grpId="0" nodeType="clickEffect">
+                                  <p:stCondLst>
+                                    <p:cond delay="0"/>
+                                  </p:stCondLst>
+                                  <p:childTnLst>
+                                    <p:set>
+                                      <p:cBhvr>
+                                        <p:cTn id="14" dur="1" fill="hold">
+                                          <p:stCondLst>
+                                            <p:cond delay="0"/>
+                                          </p:stCondLst>
+                                        </p:cTn>
+                                        <p:tgtEl>
+                                          <p:spTgt spid="16"/>
+                                        </p:tgtEl>
+                                        <p:attrNameLst>
+                                          <p:attrName>style.visibility</p:attrName>
+                                        </p:attrNameLst>
+                                      </p:cBhvr>
+                                      <p:to>
+                                        <p:strVal val="visible"/>
+                                      </p:to>
+                                    </p:set>
+                                  </p:childTnLst>
+                                </p:cTn>
+                              </p:par>
+                            </p:childTnLst>
+                          </p:cTn>
+                        </p:par>
+                      </p:childTnLst>
+                    </p:cTn>
+                  </p:par>
                 </p:childTnLst>
               </p:cTn>
               <p:prevCondLst>
@@ -28530,6 +26068,9 @@
         </p:cTn>
       </p:par>
     </p:tnLst>
+    <p:bldLst>
+      <p:bldP spid="16" grpId="0"/>
+    </p:bldLst>
   </p:timing>
 </p:sld>
 </file>

--- a/Praesentation_Barrierefreiheit.pptx
+++ b/Praesentation_Barrierefreiheit.pptx
@@ -224,7 +224,7 @@
           <a:p>
             <a:fld id="{7FFCB3C0-C4D2-4443-94B7-511EA8E27017}" type="datetimeFigureOut">
               <a:rPr lang="de-DE" smtClean="0"/>
-              <a:t>07.06.2026</a:t>
+              <a:t>08.06.2026</a:t>
             </a:fld>
             <a:endParaRPr lang="de-DE"/>
           </a:p>
@@ -537,7 +537,7 @@
           <a:p>
             <a:r>
               <a:rPr lang="de-DE" dirty="0"/>
-              <a:t>Mein Kollege Rainer Brell und ich möchten in den folgenden 5 Stunden, nein 20 Minuten, dafür sensibilisieren, wie man Software-Anwendungen prüfen, anpassen und barrierefrei entwickeln kann.</a:t>
+              <a:t>Mein Kollege Rainer Brell und ich möchten in den nächsten Minuten, dafür sensibilisieren, wie man Software-Anwendungen prüfen, anpassen und barrierefrei entwickeln kann.</a:t>
             </a:r>
           </a:p>
         </p:txBody>
@@ -624,7 +624,15 @@
           <a:p>
             <a:r>
               <a:rPr lang="de-DE" dirty="0"/>
-              <a:t>Vorab eine Warnung: Das wird jetzt aus Zeitgründen ein wilder Ritt durch die 3 Themengebiete – keine Angst, alle Infos, Codes und einiges mehr gibt es im Web unter der Adresse am Ende der Präsentation</a:t>
+              <a:t>Vorab eine Warnung: Das wird jetzt aus Zeitgründen </a:t>
+            </a:r>
+            <a:r>
+              <a:rPr lang="de-DE"/>
+              <a:t>ein etwas wilder </a:t>
+            </a:r>
+            <a:r>
+              <a:rPr lang="de-DE" dirty="0"/>
+              <a:t>Ritt durch die 3 Themengebiete – keine Angst, alle Infos, Codes und einiges mehr gibt es im Web unter der Adresse am Ende der Präsentation</a:t>
             </a:r>
           </a:p>
         </p:txBody>
@@ -1481,7 +1489,7 @@
           <a:p>
             <a:fld id="{5BCAD085-E8A6-8845-BD4E-CB4CCA059FC4}" type="datetimeFigureOut">
               <a:rPr lang="en-US" smtClean="0"/>
-              <a:t>6/7/2026</a:t>
+              <a:t>6/8/2026</a:t>
             </a:fld>
             <a:endParaRPr lang="en-US"/>
           </a:p>
@@ -1649,7 +1657,7 @@
           <a:p>
             <a:fld id="{5BCAD085-E8A6-8845-BD4E-CB4CCA059FC4}" type="datetimeFigureOut">
               <a:rPr lang="en-US" smtClean="0"/>
-              <a:t>6/7/2026</a:t>
+              <a:t>6/8/2026</a:t>
             </a:fld>
             <a:endParaRPr lang="en-US"/>
           </a:p>
@@ -1827,7 +1835,7 @@
           <a:p>
             <a:fld id="{5BCAD085-E8A6-8845-BD4E-CB4CCA059FC4}" type="datetimeFigureOut">
               <a:rPr lang="en-US" smtClean="0"/>
-              <a:t>6/7/2026</a:t>
+              <a:t>6/8/2026</a:t>
             </a:fld>
             <a:endParaRPr lang="en-US"/>
           </a:p>
@@ -1995,7 +2003,7 @@
           <a:p>
             <a:fld id="{5BCAD085-E8A6-8845-BD4E-CB4CCA059FC4}" type="datetimeFigureOut">
               <a:rPr lang="en-US" smtClean="0"/>
-              <a:t>6/7/2026</a:t>
+              <a:t>6/8/2026</a:t>
             </a:fld>
             <a:endParaRPr lang="en-US"/>
           </a:p>
@@ -2240,7 +2248,7 @@
           <a:p>
             <a:fld id="{5BCAD085-E8A6-8845-BD4E-CB4CCA059FC4}" type="datetimeFigureOut">
               <a:rPr lang="en-US" smtClean="0"/>
-              <a:t>6/7/2026</a:t>
+              <a:t>6/8/2026</a:t>
             </a:fld>
             <a:endParaRPr lang="en-US"/>
           </a:p>
@@ -2525,7 +2533,7 @@
           <a:p>
             <a:fld id="{5BCAD085-E8A6-8845-BD4E-CB4CCA059FC4}" type="datetimeFigureOut">
               <a:rPr lang="en-US" smtClean="0"/>
-              <a:t>6/7/2026</a:t>
+              <a:t>6/8/2026</a:t>
             </a:fld>
             <a:endParaRPr lang="en-US"/>
           </a:p>
@@ -2944,7 +2952,7 @@
           <a:p>
             <a:fld id="{5BCAD085-E8A6-8845-BD4E-CB4CCA059FC4}" type="datetimeFigureOut">
               <a:rPr lang="en-US" smtClean="0"/>
-              <a:t>6/7/2026</a:t>
+              <a:t>6/8/2026</a:t>
             </a:fld>
             <a:endParaRPr lang="en-US"/>
           </a:p>
@@ -3061,7 +3069,7 @@
           <a:p>
             <a:fld id="{5BCAD085-E8A6-8845-BD4E-CB4CCA059FC4}" type="datetimeFigureOut">
               <a:rPr lang="en-US" smtClean="0"/>
-              <a:t>6/7/2026</a:t>
+              <a:t>6/8/2026</a:t>
             </a:fld>
             <a:endParaRPr lang="en-US"/>
           </a:p>
@@ -3156,7 +3164,7 @@
           <a:p>
             <a:fld id="{5BCAD085-E8A6-8845-BD4E-CB4CCA059FC4}" type="datetimeFigureOut">
               <a:rPr lang="en-US" smtClean="0"/>
-              <a:t>6/7/2026</a:t>
+              <a:t>6/8/2026</a:t>
             </a:fld>
             <a:endParaRPr lang="en-US"/>
           </a:p>
@@ -3431,7 +3439,7 @@
           <a:p>
             <a:fld id="{5BCAD085-E8A6-8845-BD4E-CB4CCA059FC4}" type="datetimeFigureOut">
               <a:rPr lang="en-US" smtClean="0"/>
-              <a:t>6/7/2026</a:t>
+              <a:t>6/8/2026</a:t>
             </a:fld>
             <a:endParaRPr lang="en-US"/>
           </a:p>
@@ -3683,7 +3691,7 @@
           <a:p>
             <a:fld id="{5BCAD085-E8A6-8845-BD4E-CB4CCA059FC4}" type="datetimeFigureOut">
               <a:rPr lang="en-US" smtClean="0"/>
-              <a:t>6/7/2026</a:t>
+              <a:t>6/8/2026</a:t>
             </a:fld>
             <a:endParaRPr lang="en-US"/>
           </a:p>
@@ -3894,7 +3902,7 @@
           <a:p>
             <a:fld id="{5BCAD085-E8A6-8845-BD4E-CB4CCA059FC4}" type="datetimeFigureOut">
               <a:rPr lang="en-US" smtClean="0"/>
-              <a:t>6/7/2026</a:t>
+              <a:t>6/8/2026</a:t>
             </a:fld>
             <a:endParaRPr lang="en-US"/>
           </a:p>
